--- a/design/SESSION2_Refactoring_QA_Expansion.pptx
+++ b/design/SESSION2_Refactoring_QA_Expansion.pptx
@@ -5,21 +5,20 @@
     <p:sldMasterId id="2147483660" r:id="rId1"/>
   </p:sldMasterIdLst>
   <p:notesMasterIdLst>
-    <p:notesMasterId r:id="rId14"/>
+    <p:notesMasterId r:id="rId13"/>
   </p:notesMasterIdLst>
   <p:sldIdLst>
     <p:sldId id="256" r:id="rId2"/>
     <p:sldId id="267" r:id="rId3"/>
     <p:sldId id="257" r:id="rId4"/>
-    <p:sldId id="258" r:id="rId5"/>
-    <p:sldId id="259" r:id="rId6"/>
-    <p:sldId id="260" r:id="rId7"/>
-    <p:sldId id="261" r:id="rId8"/>
-    <p:sldId id="262" r:id="rId9"/>
-    <p:sldId id="263" r:id="rId10"/>
-    <p:sldId id="264" r:id="rId11"/>
-    <p:sldId id="265" r:id="rId12"/>
-    <p:sldId id="266" r:id="rId13"/>
+    <p:sldId id="259" r:id="rId5"/>
+    <p:sldId id="260" r:id="rId6"/>
+    <p:sldId id="261" r:id="rId7"/>
+    <p:sldId id="262" r:id="rId8"/>
+    <p:sldId id="263" r:id="rId9"/>
+    <p:sldId id="264" r:id="rId10"/>
+    <p:sldId id="265" r:id="rId11"/>
+    <p:sldId id="266" r:id="rId12"/>
   </p:sldIdLst>
   <p:sldSz cx="9144000" cy="6858000" type="screen4x3"/>
   <p:notesSz cx="6858000" cy="9144000"/>
@@ -140,7 +139,7 @@
 <file path=ppt/revisionInfo.xml><?xml version="1.0" encoding="utf-8"?>
 <p1510:revInfo xmlns:a="http://schemas.openxmlformats.org/drawingml/2006/main" xmlns:r="http://schemas.openxmlformats.org/officeDocument/2006/relationships" xmlns:p1510="http://schemas.microsoft.com/office/powerpoint/2015/10/main">
   <p1510:revLst>
-    <p1510:client id="{ECA7CEFF-F6E4-4DBC-BB3A-33D0E7643ABB}" v="18" dt="2026-01-08T08:47:59.552"/>
+    <p1510:client id="{ECA7CEFF-F6E4-4DBC-BB3A-33D0E7643ABB}" v="21" dt="2026-01-09T09:01:27.032"/>
   </p1510:revLst>
 </p1510:revInfo>
 </file>
@@ -149,8 +148,8 @@
 <pc:chgInfo xmlns:a="http://schemas.openxmlformats.org/drawingml/2006/main" xmlns:r="http://schemas.openxmlformats.org/officeDocument/2006/relationships" xmlns:ac="http://schemas.microsoft.com/office/drawing/2013/main/command" xmlns:pc="http://schemas.microsoft.com/office/powerpoint/2013/main/command">
   <pc:docChgLst>
     <pc:chgData name="Hemavathi N" userId="03ffe50d-d8c4-450f-8767-16fec8f145ea" providerId="ADAL" clId="{F670BC12-C9CA-4FC8-99C4-9688C5EDF73A}"/>
-    <pc:docChg chg="undo custSel addSld modSld">
-      <pc:chgData name="Hemavathi N" userId="03ffe50d-d8c4-450f-8767-16fec8f145ea" providerId="ADAL" clId="{F670BC12-C9CA-4FC8-99C4-9688C5EDF73A}" dt="2026-01-08T09:01:04.013" v="282" actId="20577"/>
+    <pc:docChg chg="undo custSel addSld delSld modSld">
+      <pc:chgData name="Hemavathi N" userId="03ffe50d-d8c4-450f-8767-16fec8f145ea" providerId="ADAL" clId="{F670BC12-C9CA-4FC8-99C4-9688C5EDF73A}" dt="2026-01-09T09:01:52.663" v="323" actId="478"/>
       <pc:docMkLst>
         <pc:docMk/>
       </pc:docMkLst>
@@ -304,8 +303,8 @@
           </ac:spMkLst>
         </pc:spChg>
       </pc:sldChg>
-      <pc:sldChg chg="delSp modSp mod">
-        <pc:chgData name="Hemavathi N" userId="03ffe50d-d8c4-450f-8767-16fec8f145ea" providerId="ADAL" clId="{F670BC12-C9CA-4FC8-99C4-9688C5EDF73A}" dt="2026-01-08T05:44:10.420" v="32" actId="20577"/>
+      <pc:sldChg chg="delSp modSp del mod">
+        <pc:chgData name="Hemavathi N" userId="03ffe50d-d8c4-450f-8767-16fec8f145ea" providerId="ADAL" clId="{F670BC12-C9CA-4FC8-99C4-9688C5EDF73A}" dt="2026-01-09T09:00:16.476" v="304" actId="47"/>
         <pc:sldMkLst>
           <pc:docMk/>
           <pc:sldMk cId="0" sldId="258"/>
@@ -342,8 +341,8 @@
           </ac:spMkLst>
         </pc:spChg>
       </pc:sldChg>
-      <pc:sldChg chg="modSp mod">
-        <pc:chgData name="Hemavathi N" userId="03ffe50d-d8c4-450f-8767-16fec8f145ea" providerId="ADAL" clId="{F670BC12-C9CA-4FC8-99C4-9688C5EDF73A}" dt="2026-01-08T05:46:27.694" v="73" actId="20577"/>
+      <pc:sldChg chg="addSp delSp modSp mod">
+        <pc:chgData name="Hemavathi N" userId="03ffe50d-d8c4-450f-8767-16fec8f145ea" providerId="ADAL" clId="{F670BC12-C9CA-4FC8-99C4-9688C5EDF73A}" dt="2026-01-09T09:01:52.663" v="323" actId="478"/>
         <pc:sldMkLst>
           <pc:docMk/>
           <pc:sldMk cId="0" sldId="260"/>
@@ -370,6 +369,14 @@
             <pc:docMk/>
             <pc:sldMk cId="0" sldId="260"/>
             <ac:spMk id="4" creationId="{00000000-0000-0000-0000-000000000000}"/>
+          </ac:spMkLst>
+        </pc:spChg>
+        <pc:spChg chg="add del mod">
+          <ac:chgData name="Hemavathi N" userId="03ffe50d-d8c4-450f-8767-16fec8f145ea" providerId="ADAL" clId="{F670BC12-C9CA-4FC8-99C4-9688C5EDF73A}" dt="2026-01-09T09:01:52.663" v="323" actId="478"/>
+          <ac:spMkLst>
+            <pc:docMk/>
+            <pc:sldMk cId="0" sldId="260"/>
+            <ac:spMk id="5" creationId="{24712ABB-5529-E8C8-1E6B-D67789786146}"/>
           </ac:spMkLst>
         </pc:spChg>
       </pc:sldChg>
@@ -497,7 +504,7 @@
         </pc:spChg>
       </pc:sldChg>
       <pc:sldChg chg="addSp delSp modSp new mod setBg">
-        <pc:chgData name="Hemavathi N" userId="03ffe50d-d8c4-450f-8767-16fec8f145ea" providerId="ADAL" clId="{F670BC12-C9CA-4FC8-99C4-9688C5EDF73A}" dt="2026-01-08T08:47:59.552" v="257"/>
+        <pc:chgData name="Hemavathi N" userId="03ffe50d-d8c4-450f-8767-16fec8f145ea" providerId="ADAL" clId="{F670BC12-C9CA-4FC8-99C4-9688C5EDF73A}" dt="2026-01-09T08:28:16.328" v="303"/>
         <pc:sldMkLst>
           <pc:docMk/>
           <pc:sldMk cId="3882671747" sldId="267"/>
@@ -567,7 +574,7 @@
           </ac:grpSpMkLst>
         </pc:grpChg>
         <pc:graphicFrameChg chg="add mod modGraphic">
-          <ac:chgData name="Hemavathi N" userId="03ffe50d-d8c4-450f-8767-16fec8f145ea" providerId="ADAL" clId="{F670BC12-C9CA-4FC8-99C4-9688C5EDF73A}" dt="2026-01-08T08:47:59.552" v="257"/>
+          <ac:chgData name="Hemavathi N" userId="03ffe50d-d8c4-450f-8767-16fec8f145ea" providerId="ADAL" clId="{F670BC12-C9CA-4FC8-99C4-9688C5EDF73A}" dt="2026-01-09T08:28:16.328" v="303"/>
           <ac:graphicFrameMkLst>
             <pc:docMk/>
             <pc:sldMk cId="3882671747" sldId="267"/>
@@ -1387,7 +1394,7 @@
         <a:p>
           <a:r>
             <a:rPr lang="en-US" dirty="0"/>
-            <a:t>Applying the Repository Pattern using Copilot Edits</a:t>
+            <a:t>Applying the Repository Pattern </a:t>
           </a:r>
         </a:p>
       </dgm:t>
@@ -1422,10 +1429,10 @@
         <a:lstStyle/>
         <a:p>
           <a:r>
-            <a:rPr lang="en-US" b="1"/>
+            <a:rPr lang="en-US" b="1" dirty="0"/>
             <a:t>Expanding Test Coverage with Copilot</a:t>
           </a:r>
-          <a:endParaRPr lang="en-US"/>
+          <a:endParaRPr lang="en-US" dirty="0"/>
         </a:p>
       </dgm:t>
     </dgm:pt>
@@ -1676,49 +1683,16 @@
       <dgm:prSet presAssocID="{CB3BB080-D0D5-45A6-9360-94C33A68EF53}" presName="spaceBetweenRectangles" presStyleCnt="0"/>
       <dgm:spPr/>
     </dgm:pt>
-    <dgm:pt modelId="{5AAB1615-20DA-48E7-AFB1-19943E3DC2A9}" type="pres">
-      <dgm:prSet presAssocID="{E62AC61C-5DE4-4ED0-8E8B-64EC1B047EB7}" presName="parentLin" presStyleCnt="0"/>
-      <dgm:spPr/>
-    </dgm:pt>
-    <dgm:pt modelId="{9DCEAAB0-6D23-4421-92D5-042F47D8C4C5}" type="pres">
-      <dgm:prSet presAssocID="{E62AC61C-5DE4-4ED0-8E8B-64EC1B047EB7}" presName="parentLeftMargin" presStyleLbl="node1" presStyleIdx="0" presStyleCnt="4"/>
-      <dgm:spPr/>
-    </dgm:pt>
-    <dgm:pt modelId="{8397A9AE-F50C-4BCC-888B-F79BF181981E}" type="pres">
-      <dgm:prSet presAssocID="{E62AC61C-5DE4-4ED0-8E8B-64EC1B047EB7}" presName="parentText" presStyleLbl="node1" presStyleIdx="1" presStyleCnt="4">
-        <dgm:presLayoutVars>
-          <dgm:chMax val="0"/>
-          <dgm:bulletEnabled val="1"/>
-        </dgm:presLayoutVars>
-      </dgm:prSet>
-      <dgm:spPr/>
-    </dgm:pt>
-    <dgm:pt modelId="{4AA840D6-6418-49BE-8CDC-0DAC6449683B}" type="pres">
-      <dgm:prSet presAssocID="{E62AC61C-5DE4-4ED0-8E8B-64EC1B047EB7}" presName="negativeSpace" presStyleCnt="0"/>
-      <dgm:spPr/>
-    </dgm:pt>
-    <dgm:pt modelId="{C4E777D7-FA04-4266-BABA-10FE491DB90E}" type="pres">
-      <dgm:prSet presAssocID="{E62AC61C-5DE4-4ED0-8E8B-64EC1B047EB7}" presName="childText" presStyleLbl="conFgAcc1" presStyleIdx="1" presStyleCnt="4">
-        <dgm:presLayoutVars>
-          <dgm:bulletEnabled val="1"/>
-        </dgm:presLayoutVars>
-      </dgm:prSet>
-      <dgm:spPr/>
-    </dgm:pt>
-    <dgm:pt modelId="{CB266567-9F39-4CAA-B0A5-B7113222C068}" type="pres">
-      <dgm:prSet presAssocID="{8B4B50C4-D9BD-47B4-B851-EA4EA202E427}" presName="spaceBetweenRectangles" presStyleCnt="0"/>
-      <dgm:spPr/>
-    </dgm:pt>
     <dgm:pt modelId="{500FE704-5E1A-4E93-A44C-7FC4417DA5FE}" type="pres">
       <dgm:prSet presAssocID="{9EF486C7-DD9B-4327-A90F-8602E0E89DC3}" presName="parentLin" presStyleCnt="0"/>
       <dgm:spPr/>
     </dgm:pt>
     <dgm:pt modelId="{20290F0B-1DCC-4BEE-983B-E33971049006}" type="pres">
-      <dgm:prSet presAssocID="{9EF486C7-DD9B-4327-A90F-8602E0E89DC3}" presName="parentLeftMargin" presStyleLbl="node1" presStyleIdx="1" presStyleCnt="4"/>
+      <dgm:prSet presAssocID="{9EF486C7-DD9B-4327-A90F-8602E0E89DC3}" presName="parentLeftMargin" presStyleLbl="node1" presStyleIdx="0" presStyleCnt="4"/>
       <dgm:spPr/>
     </dgm:pt>
     <dgm:pt modelId="{E0AE5A9D-56D7-46B6-B40C-1A260FFEAAB8}" type="pres">
-      <dgm:prSet presAssocID="{9EF486C7-DD9B-4327-A90F-8602E0E89DC3}" presName="parentText" presStyleLbl="node1" presStyleIdx="2" presStyleCnt="4">
+      <dgm:prSet presAssocID="{9EF486C7-DD9B-4327-A90F-8602E0E89DC3}" presName="parentText" presStyleLbl="node1" presStyleIdx="1" presStyleCnt="4">
         <dgm:presLayoutVars>
           <dgm:chMax val="0"/>
           <dgm:bulletEnabled val="1"/>
@@ -1731,7 +1705,7 @@
       <dgm:spPr/>
     </dgm:pt>
     <dgm:pt modelId="{B4D039A4-829B-4E05-BADE-A110732AE240}" type="pres">
-      <dgm:prSet presAssocID="{9EF486C7-DD9B-4327-A90F-8602E0E89DC3}" presName="childText" presStyleLbl="conFgAcc1" presStyleIdx="2" presStyleCnt="4">
+      <dgm:prSet presAssocID="{9EF486C7-DD9B-4327-A90F-8602E0E89DC3}" presName="childText" presStyleLbl="conFgAcc1" presStyleIdx="1" presStyleCnt="4">
         <dgm:presLayoutVars>
           <dgm:bulletEnabled val="1"/>
         </dgm:presLayoutVars>
@@ -1747,11 +1721,11 @@
       <dgm:spPr/>
     </dgm:pt>
     <dgm:pt modelId="{9BA69BA7-D48E-4E54-B839-3868E71CC42B}" type="pres">
-      <dgm:prSet presAssocID="{B25E6CB5-4ACB-4DC7-A394-9C1C9DC4D605}" presName="parentLeftMargin" presStyleLbl="node1" presStyleIdx="2" presStyleCnt="4"/>
+      <dgm:prSet presAssocID="{B25E6CB5-4ACB-4DC7-A394-9C1C9DC4D605}" presName="parentLeftMargin" presStyleLbl="node1" presStyleIdx="1" presStyleCnt="4"/>
       <dgm:spPr/>
     </dgm:pt>
     <dgm:pt modelId="{7622A6F9-2A36-4BCE-891F-C3CB760D30EA}" type="pres">
-      <dgm:prSet presAssocID="{B25E6CB5-4ACB-4DC7-A394-9C1C9DC4D605}" presName="parentText" presStyleLbl="node1" presStyleIdx="3" presStyleCnt="4">
+      <dgm:prSet presAssocID="{B25E6CB5-4ACB-4DC7-A394-9C1C9DC4D605}" presName="parentText" presStyleLbl="node1" presStyleIdx="2" presStyleCnt="4">
         <dgm:presLayoutVars>
           <dgm:chMax val="0"/>
           <dgm:bulletEnabled val="1"/>
@@ -1764,7 +1738,40 @@
       <dgm:spPr/>
     </dgm:pt>
     <dgm:pt modelId="{B9DBE8BA-5FFA-4800-8DA9-746409569340}" type="pres">
-      <dgm:prSet presAssocID="{B25E6CB5-4ACB-4DC7-A394-9C1C9DC4D605}" presName="childText" presStyleLbl="conFgAcc1" presStyleIdx="3" presStyleCnt="4">
+      <dgm:prSet presAssocID="{B25E6CB5-4ACB-4DC7-A394-9C1C9DC4D605}" presName="childText" presStyleLbl="conFgAcc1" presStyleIdx="2" presStyleCnt="4">
+        <dgm:presLayoutVars>
+          <dgm:bulletEnabled val="1"/>
+        </dgm:presLayoutVars>
+      </dgm:prSet>
+      <dgm:spPr/>
+    </dgm:pt>
+    <dgm:pt modelId="{3DA91EF9-1A18-463C-B4EB-46064433066F}" type="pres">
+      <dgm:prSet presAssocID="{586A20D0-B27A-42A0-A209-46C9378B3E4C}" presName="spaceBetweenRectangles" presStyleCnt="0"/>
+      <dgm:spPr/>
+    </dgm:pt>
+    <dgm:pt modelId="{5AAB1615-20DA-48E7-AFB1-19943E3DC2A9}" type="pres">
+      <dgm:prSet presAssocID="{E62AC61C-5DE4-4ED0-8E8B-64EC1B047EB7}" presName="parentLin" presStyleCnt="0"/>
+      <dgm:spPr/>
+    </dgm:pt>
+    <dgm:pt modelId="{9DCEAAB0-6D23-4421-92D5-042F47D8C4C5}" type="pres">
+      <dgm:prSet presAssocID="{E62AC61C-5DE4-4ED0-8E8B-64EC1B047EB7}" presName="parentLeftMargin" presStyleLbl="node1" presStyleIdx="2" presStyleCnt="4"/>
+      <dgm:spPr/>
+    </dgm:pt>
+    <dgm:pt modelId="{8397A9AE-F50C-4BCC-888B-F79BF181981E}" type="pres">
+      <dgm:prSet presAssocID="{E62AC61C-5DE4-4ED0-8E8B-64EC1B047EB7}" presName="parentText" presStyleLbl="node1" presStyleIdx="3" presStyleCnt="4">
+        <dgm:presLayoutVars>
+          <dgm:chMax val="0"/>
+          <dgm:bulletEnabled val="1"/>
+        </dgm:presLayoutVars>
+      </dgm:prSet>
+      <dgm:spPr/>
+    </dgm:pt>
+    <dgm:pt modelId="{4AA840D6-6418-49BE-8CDC-0DAC6449683B}" type="pres">
+      <dgm:prSet presAssocID="{E62AC61C-5DE4-4ED0-8E8B-64EC1B047EB7}" presName="negativeSpace" presStyleCnt="0"/>
+      <dgm:spPr/>
+    </dgm:pt>
+    <dgm:pt modelId="{C4E777D7-FA04-4266-BABA-10FE491DB90E}" type="pres">
+      <dgm:prSet presAssocID="{E62AC61C-5DE4-4ED0-8E8B-64EC1B047EB7}" presName="childText" presStyleLbl="conFgAcc1" presStyleIdx="3" presStyleCnt="4">
         <dgm:presLayoutVars>
           <dgm:bulletEnabled val="1"/>
         </dgm:presLayoutVars>
@@ -1773,50 +1780,50 @@
     </dgm:pt>
   </dgm:ptLst>
   <dgm:cxnLst>
-    <dgm:cxn modelId="{E09B9D0B-40B5-4D90-B78B-B78C4A898545}" type="presOf" srcId="{E62AC61C-5DE4-4ED0-8E8B-64EC1B047EB7}" destId="{9DCEAAB0-6D23-4421-92D5-042F47D8C4C5}" srcOrd="0" destOrd="0" presId="urn:microsoft.com/office/officeart/2005/8/layout/list1"/>
-    <dgm:cxn modelId="{F6EE090C-4945-48E3-A8EE-96A07C7C3DC8}" type="presOf" srcId="{04DD4B5E-3BDD-4497-9BA2-CBDCD4607EF0}" destId="{B9DBE8BA-5FFA-4800-8DA9-746409569340}" srcOrd="0" destOrd="0" presId="urn:microsoft.com/office/officeart/2005/8/layout/list1"/>
-    <dgm:cxn modelId="{AB78E10F-0012-47A0-AA35-A8E3FB47EC62}" type="presOf" srcId="{B5F2D9F4-F6CD-4F5E-9157-39733AAF8438}" destId="{3CC66823-2F7E-498F-9F2C-29E8A0B76D78}" srcOrd="0" destOrd="0" presId="urn:microsoft.com/office/officeart/2005/8/layout/list1"/>
-    <dgm:cxn modelId="{CBB6F61D-45EF-486C-B012-FCE5CB49ECEB}" type="presOf" srcId="{FFC1CE41-156B-4F32-AE2F-5FE5A232EC13}" destId="{C4E777D7-FA04-4266-BABA-10FE491DB90E}" srcOrd="0" destOrd="0" presId="urn:microsoft.com/office/officeart/2005/8/layout/list1"/>
+    <dgm:cxn modelId="{CADF5905-5B8E-439E-B58C-7C2667C6AB44}" type="presOf" srcId="{B25E6CB5-4ACB-4DC7-A394-9C1C9DC4D605}" destId="{9BA69BA7-D48E-4E54-B839-3868E71CC42B}" srcOrd="0" destOrd="0" presId="urn:microsoft.com/office/officeart/2005/8/layout/list1"/>
+    <dgm:cxn modelId="{C0CA4709-35E8-4D20-B614-ECD6A05C5A3E}" type="presOf" srcId="{34A66802-0D4E-4E98-8329-ACAE1FE0747A}" destId="{42E0B7F2-2C85-4B7D-A14F-9275F9D77CB3}" srcOrd="0" destOrd="0" presId="urn:microsoft.com/office/officeart/2005/8/layout/list1"/>
+    <dgm:cxn modelId="{AF28340C-7A0D-43CC-A3DE-5C74DAC22A00}" type="presOf" srcId="{B25E6CB5-4ACB-4DC7-A394-9C1C9DC4D605}" destId="{7622A6F9-2A36-4BCE-891F-C3CB760D30EA}" srcOrd="1" destOrd="0" presId="urn:microsoft.com/office/officeart/2005/8/layout/list1"/>
+    <dgm:cxn modelId="{EF8DE115-6191-4843-840C-206FB734AB39}" type="presOf" srcId="{B5F2D9F4-F6CD-4F5E-9157-39733AAF8438}" destId="{20499983-B11A-433A-8D7D-CC886C4FA1D3}" srcOrd="1" destOrd="0" presId="urn:microsoft.com/office/officeart/2005/8/layout/list1"/>
     <dgm:cxn modelId="{E9DD7124-C694-4294-AE68-D01E709C8898}" type="presOf" srcId="{7C6ED9C6-ED9D-438C-8CFF-CEE0EC2160BD}" destId="{DB45C06E-82FD-4E5D-B528-D893927397DA}" srcOrd="0" destOrd="0" presId="urn:microsoft.com/office/officeart/2005/8/layout/list1"/>
     <dgm:cxn modelId="{3127822C-B1B3-440B-9A14-9749130741BE}" srcId="{B25E6CB5-4ACB-4DC7-A394-9C1C9DC4D605}" destId="{04DD4B5E-3BDD-4497-9BA2-CBDCD4607EF0}" srcOrd="0" destOrd="0" parTransId="{AFA7BEA2-58AE-446C-954B-35A4363A5B15}" sibTransId="{2288C925-15D7-4DB2-9AE4-A8566E47BDCD}"/>
-    <dgm:cxn modelId="{03430C32-CCD1-4DD7-84D3-5624D633E835}" type="presOf" srcId="{9EF486C7-DD9B-4327-A90F-8602E0E89DC3}" destId="{E0AE5A9D-56D7-46B6-B40C-1A260FFEAAB8}" srcOrd="1" destOrd="0" presId="urn:microsoft.com/office/officeart/2005/8/layout/list1"/>
-    <dgm:cxn modelId="{54C03C33-F93B-49DB-BF0D-1527F97DC753}" type="presOf" srcId="{9EF486C7-DD9B-4327-A90F-8602E0E89DC3}" destId="{20290F0B-1DCC-4BEE-983B-E33971049006}" srcOrd="0" destOrd="0" presId="urn:microsoft.com/office/officeart/2005/8/layout/list1"/>
-    <dgm:cxn modelId="{3DAC1336-9301-457F-A40A-4A5D1F9C73DD}" srcId="{7C6ED9C6-ED9D-438C-8CFF-CEE0EC2160BD}" destId="{B25E6CB5-4ACB-4DC7-A394-9C1C9DC4D605}" srcOrd="3" destOrd="0" parTransId="{2AD49BA8-DCAE-4765-99D6-97DA39AF3BC6}" sibTransId="{586A20D0-B27A-42A0-A209-46C9378B3E4C}"/>
+    <dgm:cxn modelId="{3DAC1336-9301-457F-A40A-4A5D1F9C73DD}" srcId="{7C6ED9C6-ED9D-438C-8CFF-CEE0EC2160BD}" destId="{B25E6CB5-4ACB-4DC7-A394-9C1C9DC4D605}" srcOrd="2" destOrd="0" parTransId="{2AD49BA8-DCAE-4765-99D6-97DA39AF3BC6}" sibTransId="{586A20D0-B27A-42A0-A209-46C9378B3E4C}"/>
+    <dgm:cxn modelId="{54A9183B-F7C3-48A8-8F97-B6CA7DA2501A}" type="presOf" srcId="{E62AC61C-5DE4-4ED0-8E8B-64EC1B047EB7}" destId="{9DCEAAB0-6D23-4421-92D5-042F47D8C4C5}" srcOrd="0" destOrd="0" presId="urn:microsoft.com/office/officeart/2005/8/layout/list1"/>
     <dgm:cxn modelId="{2DFA763B-28A3-4496-8B03-1FA6783D4A61}" srcId="{7C6ED9C6-ED9D-438C-8CFF-CEE0EC2160BD}" destId="{B5F2D9F4-F6CD-4F5E-9157-39733AAF8438}" srcOrd="0" destOrd="0" parTransId="{F6139DEC-150C-4203-988A-8F72E87359BF}" sibTransId="{CB3BB080-D0D5-45A6-9360-94C33A68EF53}"/>
-    <dgm:cxn modelId="{F536993C-F6AD-42C2-9ED2-1135ACA3BC8C}" type="presOf" srcId="{B25E6CB5-4ACB-4DC7-A394-9C1C9DC4D605}" destId="{9BA69BA7-D48E-4E54-B839-3868E71CC42B}" srcOrd="0" destOrd="0" presId="urn:microsoft.com/office/officeart/2005/8/layout/list1"/>
-    <dgm:cxn modelId="{EC5C505B-D9E0-4395-9D05-FD4AD2FA51F1}" type="presOf" srcId="{E62AC61C-5DE4-4ED0-8E8B-64EC1B047EB7}" destId="{8397A9AE-F50C-4BCC-888B-F79BF181981E}" srcOrd="1" destOrd="0" presId="urn:microsoft.com/office/officeart/2005/8/layout/list1"/>
-    <dgm:cxn modelId="{AE563872-FBCA-46A3-B812-54A86878B395}" type="presOf" srcId="{B5F2D9F4-F6CD-4F5E-9157-39733AAF8438}" destId="{20499983-B11A-433A-8D7D-CC886C4FA1D3}" srcOrd="1" destOrd="0" presId="urn:microsoft.com/office/officeart/2005/8/layout/list1"/>
-    <dgm:cxn modelId="{DB6D70AC-FF67-4A9C-A6FC-0585BC3A99D5}" type="presOf" srcId="{B25E6CB5-4ACB-4DC7-A394-9C1C9DC4D605}" destId="{7622A6F9-2A36-4BCE-891F-C3CB760D30EA}" srcOrd="1" destOrd="0" presId="urn:microsoft.com/office/officeart/2005/8/layout/list1"/>
-    <dgm:cxn modelId="{98AA7DB8-09E1-4822-B928-BAE462692BE5}" srcId="{7C6ED9C6-ED9D-438C-8CFF-CEE0EC2160BD}" destId="{E62AC61C-5DE4-4ED0-8E8B-64EC1B047EB7}" srcOrd="1" destOrd="0" parTransId="{707D4A0D-70C8-4F54-83D5-7B38412B1092}" sibTransId="{8B4B50C4-D9BD-47B4-B851-EA4EA202E427}"/>
-    <dgm:cxn modelId="{AD3698BD-79E1-44F3-A4E4-CDF23F3D9FF9}" type="presOf" srcId="{34A66802-0D4E-4E98-8329-ACAE1FE0747A}" destId="{42E0B7F2-2C85-4B7D-A14F-9275F9D77CB3}" srcOrd="0" destOrd="0" presId="urn:microsoft.com/office/officeart/2005/8/layout/list1"/>
+    <dgm:cxn modelId="{0E229E43-D43D-4803-9876-7B478187FCC8}" type="presOf" srcId="{04DD4B5E-3BDD-4497-9BA2-CBDCD4607EF0}" destId="{B9DBE8BA-5FFA-4800-8DA9-746409569340}" srcOrd="0" destOrd="0" presId="urn:microsoft.com/office/officeart/2005/8/layout/list1"/>
+    <dgm:cxn modelId="{27F58B89-5B6F-4EF4-BACA-E3FE583C7312}" type="presOf" srcId="{E62AC61C-5DE4-4ED0-8E8B-64EC1B047EB7}" destId="{8397A9AE-F50C-4BCC-888B-F79BF181981E}" srcOrd="1" destOrd="0" presId="urn:microsoft.com/office/officeart/2005/8/layout/list1"/>
+    <dgm:cxn modelId="{202F7D96-DCDC-47D3-B07F-1CA78396A33E}" type="presOf" srcId="{9EF486C7-DD9B-4327-A90F-8602E0E89DC3}" destId="{20290F0B-1DCC-4BEE-983B-E33971049006}" srcOrd="0" destOrd="0" presId="urn:microsoft.com/office/officeart/2005/8/layout/list1"/>
+    <dgm:cxn modelId="{007B6199-3AF7-4D38-B71F-29CAA9D3FE4F}" type="presOf" srcId="{9EF486C7-DD9B-4327-A90F-8602E0E89DC3}" destId="{E0AE5A9D-56D7-46B6-B40C-1A260FFEAAB8}" srcOrd="1" destOrd="0" presId="urn:microsoft.com/office/officeart/2005/8/layout/list1"/>
+    <dgm:cxn modelId="{F5163E9C-94B2-460D-9CA3-6D7BAF9E444E}" type="presOf" srcId="{1F546F61-D489-4F6D-8A90-373B3741021B}" destId="{B4D039A4-829B-4E05-BADE-A110732AE240}" srcOrd="0" destOrd="0" presId="urn:microsoft.com/office/officeart/2005/8/layout/list1"/>
+    <dgm:cxn modelId="{F3C90EAE-F3A2-40E0-BDC5-99D4F02E5603}" type="presOf" srcId="{FFC1CE41-156B-4F32-AE2F-5FE5A232EC13}" destId="{C4E777D7-FA04-4266-BABA-10FE491DB90E}" srcOrd="0" destOrd="0" presId="urn:microsoft.com/office/officeart/2005/8/layout/list1"/>
+    <dgm:cxn modelId="{98AA7DB8-09E1-4822-B928-BAE462692BE5}" srcId="{7C6ED9C6-ED9D-438C-8CFF-CEE0EC2160BD}" destId="{E62AC61C-5DE4-4ED0-8E8B-64EC1B047EB7}" srcOrd="3" destOrd="0" parTransId="{707D4A0D-70C8-4F54-83D5-7B38412B1092}" sibTransId="{8B4B50C4-D9BD-47B4-B851-EA4EA202E427}"/>
     <dgm:cxn modelId="{3D9D50C0-D037-4E8B-ACF4-8A649E1F037D}" srcId="{E62AC61C-5DE4-4ED0-8E8B-64EC1B047EB7}" destId="{FFC1CE41-156B-4F32-AE2F-5FE5A232EC13}" srcOrd="0" destOrd="0" parTransId="{E1DF4E77-086A-42F0-92B1-8543B95164F8}" sibTransId="{012AA91A-1314-42E7-AAD1-1BAAE33314B5}"/>
-    <dgm:cxn modelId="{917936C8-68AC-4AC8-80E9-F714E90998F4}" type="presOf" srcId="{1F546F61-D489-4F6D-8A90-373B3741021B}" destId="{B4D039A4-829B-4E05-BADE-A110732AE240}" srcOrd="0" destOrd="0" presId="urn:microsoft.com/office/officeart/2005/8/layout/list1"/>
-    <dgm:cxn modelId="{46485BE0-FB1D-4F03-A1F3-6818D06BFC2B}" srcId="{7C6ED9C6-ED9D-438C-8CFF-CEE0EC2160BD}" destId="{9EF486C7-DD9B-4327-A90F-8602E0E89DC3}" srcOrd="2" destOrd="0" parTransId="{1D3C096D-5821-46E9-B1F9-706A5440D103}" sibTransId="{0592FAEE-A1B1-438E-AAB3-438F0E8F1CE5}"/>
+    <dgm:cxn modelId="{46485BE0-FB1D-4F03-A1F3-6818D06BFC2B}" srcId="{7C6ED9C6-ED9D-438C-8CFF-CEE0EC2160BD}" destId="{9EF486C7-DD9B-4327-A90F-8602E0E89DC3}" srcOrd="1" destOrd="0" parTransId="{1D3C096D-5821-46E9-B1F9-706A5440D103}" sibTransId="{0592FAEE-A1B1-438E-AAB3-438F0E8F1CE5}"/>
+    <dgm:cxn modelId="{1C2C0EED-EB4E-4F74-A3BE-301B85ACC7AB}" type="presOf" srcId="{B5F2D9F4-F6CD-4F5E-9157-39733AAF8438}" destId="{3CC66823-2F7E-498F-9F2C-29E8A0B76D78}" srcOrd="0" destOrd="0" presId="urn:microsoft.com/office/officeart/2005/8/layout/list1"/>
     <dgm:cxn modelId="{51FF81F4-591C-4207-B77C-CAE17F4807BF}" srcId="{9EF486C7-DD9B-4327-A90F-8602E0E89DC3}" destId="{1F546F61-D489-4F6D-8A90-373B3741021B}" srcOrd="0" destOrd="0" parTransId="{9B14774B-F4A7-4D8C-82EF-F26622947130}" sibTransId="{8F575182-7F19-4B38-B57C-521A92387061}"/>
     <dgm:cxn modelId="{75E43CFC-4936-424A-B843-430DB7657037}" srcId="{B5F2D9F4-F6CD-4F5E-9157-39733AAF8438}" destId="{34A66802-0D4E-4E98-8329-ACAE1FE0747A}" srcOrd="0" destOrd="0" parTransId="{A030E145-0F6B-4884-8DFB-C06EFD22DD00}" sibTransId="{6BCAB63D-A0D1-477F-827B-CD6606A0D537}"/>
-    <dgm:cxn modelId="{81A49379-7065-4D85-A6C2-E63C9BD1F22B}" type="presParOf" srcId="{DB45C06E-82FD-4E5D-B528-D893927397DA}" destId="{5E125FB6-33DF-4ED9-A35C-9040710FF1AE}" srcOrd="0" destOrd="0" presId="urn:microsoft.com/office/officeart/2005/8/layout/list1"/>
-    <dgm:cxn modelId="{B3B4E6A6-DA74-4AA0-A2D4-5D89E1D0270B}" type="presParOf" srcId="{5E125FB6-33DF-4ED9-A35C-9040710FF1AE}" destId="{3CC66823-2F7E-498F-9F2C-29E8A0B76D78}" srcOrd="0" destOrd="0" presId="urn:microsoft.com/office/officeart/2005/8/layout/list1"/>
-    <dgm:cxn modelId="{E148834E-6680-44E9-8A13-6584367E519E}" type="presParOf" srcId="{5E125FB6-33DF-4ED9-A35C-9040710FF1AE}" destId="{20499983-B11A-433A-8D7D-CC886C4FA1D3}" srcOrd="1" destOrd="0" presId="urn:microsoft.com/office/officeart/2005/8/layout/list1"/>
-    <dgm:cxn modelId="{C04B222C-731C-4445-948C-0E586A8ADABE}" type="presParOf" srcId="{DB45C06E-82FD-4E5D-B528-D893927397DA}" destId="{77025ABB-53C7-40C3-BF62-5F8BD7AB3B50}" srcOrd="1" destOrd="0" presId="urn:microsoft.com/office/officeart/2005/8/layout/list1"/>
-    <dgm:cxn modelId="{8FFDC744-EA29-4C8A-B086-EB7D4BE72C64}" type="presParOf" srcId="{DB45C06E-82FD-4E5D-B528-D893927397DA}" destId="{42E0B7F2-2C85-4B7D-A14F-9275F9D77CB3}" srcOrd="2" destOrd="0" presId="urn:microsoft.com/office/officeart/2005/8/layout/list1"/>
-    <dgm:cxn modelId="{7B9D0767-AD88-495D-8B06-16F234EE7B18}" type="presParOf" srcId="{DB45C06E-82FD-4E5D-B528-D893927397DA}" destId="{540641ED-871B-4A7B-8571-1971FE520D2E}" srcOrd="3" destOrd="0" presId="urn:microsoft.com/office/officeart/2005/8/layout/list1"/>
-    <dgm:cxn modelId="{76C65B24-7E84-4EBB-A47E-70138A7E14BB}" type="presParOf" srcId="{DB45C06E-82FD-4E5D-B528-D893927397DA}" destId="{5AAB1615-20DA-48E7-AFB1-19943E3DC2A9}" srcOrd="4" destOrd="0" presId="urn:microsoft.com/office/officeart/2005/8/layout/list1"/>
-    <dgm:cxn modelId="{B6CA707F-8BB5-4257-BF17-2C871E669A59}" type="presParOf" srcId="{5AAB1615-20DA-48E7-AFB1-19943E3DC2A9}" destId="{9DCEAAB0-6D23-4421-92D5-042F47D8C4C5}" srcOrd="0" destOrd="0" presId="urn:microsoft.com/office/officeart/2005/8/layout/list1"/>
-    <dgm:cxn modelId="{AB0B7A28-4665-4C75-BF15-1390853B8025}" type="presParOf" srcId="{5AAB1615-20DA-48E7-AFB1-19943E3DC2A9}" destId="{8397A9AE-F50C-4BCC-888B-F79BF181981E}" srcOrd="1" destOrd="0" presId="urn:microsoft.com/office/officeart/2005/8/layout/list1"/>
-    <dgm:cxn modelId="{9ED733BD-465F-47CF-B0F7-DCB5884D0522}" type="presParOf" srcId="{DB45C06E-82FD-4E5D-B528-D893927397DA}" destId="{4AA840D6-6418-49BE-8CDC-0DAC6449683B}" srcOrd="5" destOrd="0" presId="urn:microsoft.com/office/officeart/2005/8/layout/list1"/>
-    <dgm:cxn modelId="{2ED70F5E-4255-4E6E-A60B-4B8CE1BD2F3C}" type="presParOf" srcId="{DB45C06E-82FD-4E5D-B528-D893927397DA}" destId="{C4E777D7-FA04-4266-BABA-10FE491DB90E}" srcOrd="6" destOrd="0" presId="urn:microsoft.com/office/officeart/2005/8/layout/list1"/>
-    <dgm:cxn modelId="{BAE1975E-FBCD-4C35-BF96-A2604CE769EC}" type="presParOf" srcId="{DB45C06E-82FD-4E5D-B528-D893927397DA}" destId="{CB266567-9F39-4CAA-B0A5-B7113222C068}" srcOrd="7" destOrd="0" presId="urn:microsoft.com/office/officeart/2005/8/layout/list1"/>
-    <dgm:cxn modelId="{9EE54695-D775-438F-B5A4-21656CF54F8F}" type="presParOf" srcId="{DB45C06E-82FD-4E5D-B528-D893927397DA}" destId="{500FE704-5E1A-4E93-A44C-7FC4417DA5FE}" srcOrd="8" destOrd="0" presId="urn:microsoft.com/office/officeart/2005/8/layout/list1"/>
-    <dgm:cxn modelId="{365D9D61-3EA2-4B20-B1BB-E11ED03D804F}" type="presParOf" srcId="{500FE704-5E1A-4E93-A44C-7FC4417DA5FE}" destId="{20290F0B-1DCC-4BEE-983B-E33971049006}" srcOrd="0" destOrd="0" presId="urn:microsoft.com/office/officeart/2005/8/layout/list1"/>
-    <dgm:cxn modelId="{AE12264F-0641-4558-AE23-849C173DAF0D}" type="presParOf" srcId="{500FE704-5E1A-4E93-A44C-7FC4417DA5FE}" destId="{E0AE5A9D-56D7-46B6-B40C-1A260FFEAAB8}" srcOrd="1" destOrd="0" presId="urn:microsoft.com/office/officeart/2005/8/layout/list1"/>
-    <dgm:cxn modelId="{8A9ED4D9-C7FC-4FCC-8E8D-FCAAFEAA68DD}" type="presParOf" srcId="{DB45C06E-82FD-4E5D-B528-D893927397DA}" destId="{6E6D4D47-BBC2-4819-B27A-E368696CD0FA}" srcOrd="9" destOrd="0" presId="urn:microsoft.com/office/officeart/2005/8/layout/list1"/>
-    <dgm:cxn modelId="{5E68A751-009D-441B-B597-986FE7BD6928}" type="presParOf" srcId="{DB45C06E-82FD-4E5D-B528-D893927397DA}" destId="{B4D039A4-829B-4E05-BADE-A110732AE240}" srcOrd="10" destOrd="0" presId="urn:microsoft.com/office/officeart/2005/8/layout/list1"/>
-    <dgm:cxn modelId="{C80C94BD-37F5-4BC4-9F08-9FDEC8D19429}" type="presParOf" srcId="{DB45C06E-82FD-4E5D-B528-D893927397DA}" destId="{AB74461F-6011-4BA5-BFB8-F8B0B4F76D07}" srcOrd="11" destOrd="0" presId="urn:microsoft.com/office/officeart/2005/8/layout/list1"/>
-    <dgm:cxn modelId="{65F7D64A-FB4F-49C9-903F-272D63BF4F2E}" type="presParOf" srcId="{DB45C06E-82FD-4E5D-B528-D893927397DA}" destId="{1CBCD44E-B7E6-42BE-BE88-EFBDE4599B4E}" srcOrd="12" destOrd="0" presId="urn:microsoft.com/office/officeart/2005/8/layout/list1"/>
-    <dgm:cxn modelId="{342ECDA7-544B-4CDF-8D6E-79EC44D0EF4F}" type="presParOf" srcId="{1CBCD44E-B7E6-42BE-BE88-EFBDE4599B4E}" destId="{9BA69BA7-D48E-4E54-B839-3868E71CC42B}" srcOrd="0" destOrd="0" presId="urn:microsoft.com/office/officeart/2005/8/layout/list1"/>
-    <dgm:cxn modelId="{EDCA1658-C9E8-4A91-BF4A-D7ED7F520771}" type="presParOf" srcId="{1CBCD44E-B7E6-42BE-BE88-EFBDE4599B4E}" destId="{7622A6F9-2A36-4BCE-891F-C3CB760D30EA}" srcOrd="1" destOrd="0" presId="urn:microsoft.com/office/officeart/2005/8/layout/list1"/>
-    <dgm:cxn modelId="{123EF248-8237-4E27-BF28-32C674953A80}" type="presParOf" srcId="{DB45C06E-82FD-4E5D-B528-D893927397DA}" destId="{25A31397-7DAF-4013-A629-9F24352684A1}" srcOrd="13" destOrd="0" presId="urn:microsoft.com/office/officeart/2005/8/layout/list1"/>
-    <dgm:cxn modelId="{72CEA684-BC68-4694-B021-1A20AE2C7714}" type="presParOf" srcId="{DB45C06E-82FD-4E5D-B528-D893927397DA}" destId="{B9DBE8BA-5FFA-4800-8DA9-746409569340}" srcOrd="14" destOrd="0" presId="urn:microsoft.com/office/officeart/2005/8/layout/list1"/>
+    <dgm:cxn modelId="{BB97442A-FDD2-4A62-91A9-9E4E2C2A202F}" type="presParOf" srcId="{DB45C06E-82FD-4E5D-B528-D893927397DA}" destId="{5E125FB6-33DF-4ED9-A35C-9040710FF1AE}" srcOrd="0" destOrd="0" presId="urn:microsoft.com/office/officeart/2005/8/layout/list1"/>
+    <dgm:cxn modelId="{35A7B022-B192-45B3-9365-BC5CC6B2D5AC}" type="presParOf" srcId="{5E125FB6-33DF-4ED9-A35C-9040710FF1AE}" destId="{3CC66823-2F7E-498F-9F2C-29E8A0B76D78}" srcOrd="0" destOrd="0" presId="urn:microsoft.com/office/officeart/2005/8/layout/list1"/>
+    <dgm:cxn modelId="{8088E629-0615-4539-BA22-086E23591454}" type="presParOf" srcId="{5E125FB6-33DF-4ED9-A35C-9040710FF1AE}" destId="{20499983-B11A-433A-8D7D-CC886C4FA1D3}" srcOrd="1" destOrd="0" presId="urn:microsoft.com/office/officeart/2005/8/layout/list1"/>
+    <dgm:cxn modelId="{D4A71A2B-6736-4F99-B167-337FE1465F1A}" type="presParOf" srcId="{DB45C06E-82FD-4E5D-B528-D893927397DA}" destId="{77025ABB-53C7-40C3-BF62-5F8BD7AB3B50}" srcOrd="1" destOrd="0" presId="urn:microsoft.com/office/officeart/2005/8/layout/list1"/>
+    <dgm:cxn modelId="{D911F70B-02F2-4BE0-8758-F95E2A74FBA0}" type="presParOf" srcId="{DB45C06E-82FD-4E5D-B528-D893927397DA}" destId="{42E0B7F2-2C85-4B7D-A14F-9275F9D77CB3}" srcOrd="2" destOrd="0" presId="urn:microsoft.com/office/officeart/2005/8/layout/list1"/>
+    <dgm:cxn modelId="{07F309B8-67AA-4B5B-BF17-1657EEE652E1}" type="presParOf" srcId="{DB45C06E-82FD-4E5D-B528-D893927397DA}" destId="{540641ED-871B-4A7B-8571-1971FE520D2E}" srcOrd="3" destOrd="0" presId="urn:microsoft.com/office/officeart/2005/8/layout/list1"/>
+    <dgm:cxn modelId="{374EB732-C43F-4A87-BC7C-3F7154BE8814}" type="presParOf" srcId="{DB45C06E-82FD-4E5D-B528-D893927397DA}" destId="{500FE704-5E1A-4E93-A44C-7FC4417DA5FE}" srcOrd="4" destOrd="0" presId="urn:microsoft.com/office/officeart/2005/8/layout/list1"/>
+    <dgm:cxn modelId="{DF77C2C3-0677-417A-80EF-A856C510B0D7}" type="presParOf" srcId="{500FE704-5E1A-4E93-A44C-7FC4417DA5FE}" destId="{20290F0B-1DCC-4BEE-983B-E33971049006}" srcOrd="0" destOrd="0" presId="urn:microsoft.com/office/officeart/2005/8/layout/list1"/>
+    <dgm:cxn modelId="{63659D8F-FF39-4D38-A461-05068E39BED2}" type="presParOf" srcId="{500FE704-5E1A-4E93-A44C-7FC4417DA5FE}" destId="{E0AE5A9D-56D7-46B6-B40C-1A260FFEAAB8}" srcOrd="1" destOrd="0" presId="urn:microsoft.com/office/officeart/2005/8/layout/list1"/>
+    <dgm:cxn modelId="{7DAC4550-D427-44C6-94FA-ECC2CBC6F026}" type="presParOf" srcId="{DB45C06E-82FD-4E5D-B528-D893927397DA}" destId="{6E6D4D47-BBC2-4819-B27A-E368696CD0FA}" srcOrd="5" destOrd="0" presId="urn:microsoft.com/office/officeart/2005/8/layout/list1"/>
+    <dgm:cxn modelId="{F8092E2F-1B35-481A-B4EC-A721F933EDEF}" type="presParOf" srcId="{DB45C06E-82FD-4E5D-B528-D893927397DA}" destId="{B4D039A4-829B-4E05-BADE-A110732AE240}" srcOrd="6" destOrd="0" presId="urn:microsoft.com/office/officeart/2005/8/layout/list1"/>
+    <dgm:cxn modelId="{8B1A61B3-B527-4D02-87DE-1BF902E3AE1C}" type="presParOf" srcId="{DB45C06E-82FD-4E5D-B528-D893927397DA}" destId="{AB74461F-6011-4BA5-BFB8-F8B0B4F76D07}" srcOrd="7" destOrd="0" presId="urn:microsoft.com/office/officeart/2005/8/layout/list1"/>
+    <dgm:cxn modelId="{EFC21514-A4FF-4DC9-8364-B8899D1980B0}" type="presParOf" srcId="{DB45C06E-82FD-4E5D-B528-D893927397DA}" destId="{1CBCD44E-B7E6-42BE-BE88-EFBDE4599B4E}" srcOrd="8" destOrd="0" presId="urn:microsoft.com/office/officeart/2005/8/layout/list1"/>
+    <dgm:cxn modelId="{88CA294C-8FE0-49DE-A07B-56D8E0E5A5C4}" type="presParOf" srcId="{1CBCD44E-B7E6-42BE-BE88-EFBDE4599B4E}" destId="{9BA69BA7-D48E-4E54-B839-3868E71CC42B}" srcOrd="0" destOrd="0" presId="urn:microsoft.com/office/officeart/2005/8/layout/list1"/>
+    <dgm:cxn modelId="{AFDFAC1F-1676-4962-A125-03CA19CF2B59}" type="presParOf" srcId="{1CBCD44E-B7E6-42BE-BE88-EFBDE4599B4E}" destId="{7622A6F9-2A36-4BCE-891F-C3CB760D30EA}" srcOrd="1" destOrd="0" presId="urn:microsoft.com/office/officeart/2005/8/layout/list1"/>
+    <dgm:cxn modelId="{B9FB2182-0EDC-4045-9A1C-C9302D52211B}" type="presParOf" srcId="{DB45C06E-82FD-4E5D-B528-D893927397DA}" destId="{25A31397-7DAF-4013-A629-9F24352684A1}" srcOrd="9" destOrd="0" presId="urn:microsoft.com/office/officeart/2005/8/layout/list1"/>
+    <dgm:cxn modelId="{AF086C23-BC2E-42F4-B8CC-8E348517F014}" type="presParOf" srcId="{DB45C06E-82FD-4E5D-B528-D893927397DA}" destId="{B9DBE8BA-5FFA-4800-8DA9-746409569340}" srcOrd="10" destOrd="0" presId="urn:microsoft.com/office/officeart/2005/8/layout/list1"/>
+    <dgm:cxn modelId="{F14B0C37-48EE-43B4-A49B-156DD681621C}" type="presParOf" srcId="{DB45C06E-82FD-4E5D-B528-D893927397DA}" destId="{3DA91EF9-1A18-463C-B4EB-46064433066F}" srcOrd="11" destOrd="0" presId="urn:microsoft.com/office/officeart/2005/8/layout/list1"/>
+    <dgm:cxn modelId="{26C18C5D-1260-4752-AEF3-64F01B5F5349}" type="presParOf" srcId="{DB45C06E-82FD-4E5D-B528-D893927397DA}" destId="{5AAB1615-20DA-48E7-AFB1-19943E3DC2A9}" srcOrd="12" destOrd="0" presId="urn:microsoft.com/office/officeart/2005/8/layout/list1"/>
+    <dgm:cxn modelId="{8B06A979-35E6-44CB-AE61-A5AC4B7A9CA0}" type="presParOf" srcId="{5AAB1615-20DA-48E7-AFB1-19943E3DC2A9}" destId="{9DCEAAB0-6D23-4421-92D5-042F47D8C4C5}" srcOrd="0" destOrd="0" presId="urn:microsoft.com/office/officeart/2005/8/layout/list1"/>
+    <dgm:cxn modelId="{4BAEE7F1-EA99-43B0-A9F6-B425CD8C13B7}" type="presParOf" srcId="{5AAB1615-20DA-48E7-AFB1-19943E3DC2A9}" destId="{8397A9AE-F50C-4BCC-888B-F79BF181981E}" srcOrd="1" destOrd="0" presId="urn:microsoft.com/office/officeart/2005/8/layout/list1"/>
+    <dgm:cxn modelId="{1A193D21-40BE-4AF7-9072-4C7423FF4B85}" type="presParOf" srcId="{DB45C06E-82FD-4E5D-B528-D893927397DA}" destId="{4AA840D6-6418-49BE-8CDC-0DAC6449683B}" srcOrd="13" destOrd="0" presId="urn:microsoft.com/office/officeart/2005/8/layout/list1"/>
+    <dgm:cxn modelId="{38C8F3EB-F138-4697-AD75-5B7FCB68B752}" type="presParOf" srcId="{DB45C06E-82FD-4E5D-B528-D893927397DA}" destId="{C4E777D7-FA04-4266-BABA-10FE491DB90E}" srcOrd="14" destOrd="0" presId="urn:microsoft.com/office/officeart/2005/8/layout/list1"/>
   </dgm:cxnLst>
   <dgm:bg/>
   <dgm:whole/>
@@ -1903,7 +1910,7 @@
           </a:pPr>
           <a:r>
             <a:rPr lang="en-US" sz="2100" kern="1200" dirty="0"/>
-            <a:t>Applying the Repository Pattern using Copilot Edits</a:t>
+            <a:t>Applying the Repository Pattern </a:t>
           </a:r>
         </a:p>
       </dsp:txBody>
@@ -1990,7 +1997,7 @@
         <a:ext cx="5665191" cy="559396"/>
       </dsp:txXfrm>
     </dsp:sp>
-    <dsp:sp modelId="{C4E777D7-FA04-4266-BABA-10FE491DB90E}">
+    <dsp:sp modelId="{B4D039A4-829B-4E05-BADE-A110732AE240}">
       <dsp:nvSpPr>
         <dsp:cNvPr id="0" name=""/>
         <dsp:cNvSpPr/>
@@ -2057,7 +2064,7 @@
           </a:pPr>
           <a:r>
             <a:rPr lang="en-US" sz="2100" kern="1200"/>
-            <a:t>Generating integration test suites</a:t>
+            <a:t>Creating mocks for external dependencies</a:t>
           </a:r>
         </a:p>
       </dsp:txBody>
@@ -2066,7 +2073,7 @@
         <a:ext cx="8179594" cy="876487"/>
       </dsp:txXfrm>
     </dsp:sp>
-    <dsp:sp modelId="{8397A9AE-F50C-4BCC-888B-F79BF181981E}">
+    <dsp:sp modelId="{E0AE5A9D-56D7-46B6-B40C-1A260FFEAAB8}">
       <dsp:nvSpPr>
         <dsp:cNvPr id="0" name=""/>
         <dsp:cNvSpPr/>
@@ -2134,7 +2141,7 @@
           </a:pPr>
           <a:r>
             <a:rPr lang="en-US" sz="2100" b="1" kern="1200"/>
-            <a:t>Expanding Test Coverage with Copilot</a:t>
+            <a:t>Mock Generation for Isolated Testing</a:t>
           </a:r>
           <a:endParaRPr lang="en-US" sz="2100" kern="1200"/>
         </a:p>
@@ -2144,7 +2151,7 @@
         <a:ext cx="5665191" cy="559396"/>
       </dsp:txXfrm>
     </dsp:sp>
-    <dsp:sp modelId="{B4D039A4-829B-4E05-BADE-A110732AE240}">
+    <dsp:sp modelId="{B9DBE8BA-5FFA-4800-8DA9-746409569340}">
       <dsp:nvSpPr>
         <dsp:cNvPr id="0" name=""/>
         <dsp:cNvSpPr/>
@@ -2210,8 +2217,8 @@
             <a:buChar char="•"/>
           </a:pPr>
           <a:r>
-            <a:rPr lang="en-US" sz="2100" kern="1200"/>
-            <a:t>Creating mocks for external dependencies</a:t>
+            <a:rPr lang="en-US" sz="2100" kern="1200" dirty="0"/>
+            <a:t>Generating reusable test data factories</a:t>
           </a:r>
         </a:p>
       </dsp:txBody>
@@ -2220,7 +2227,7 @@
         <a:ext cx="8179594" cy="876487"/>
       </dsp:txXfrm>
     </dsp:sp>
-    <dsp:sp modelId="{E0AE5A9D-56D7-46B6-B40C-1A260FFEAAB8}">
+    <dsp:sp modelId="{7622A6F9-2A36-4BCE-891F-C3CB760D30EA}">
       <dsp:nvSpPr>
         <dsp:cNvPr id="0" name=""/>
         <dsp:cNvSpPr/>
@@ -2287,10 +2294,10 @@
             <a:buNone/>
           </a:pPr>
           <a:r>
-            <a:rPr lang="en-US" sz="2100" b="1" kern="1200"/>
-            <a:t>Mock Generation for Isolated Testing</a:t>
+            <a:rPr lang="en-US" sz="2100" b="1" kern="1200" dirty="0"/>
+            <a:t>Test Data Management with Factories</a:t>
           </a:r>
-          <a:endParaRPr lang="en-US" sz="2100" kern="1200"/>
+          <a:endParaRPr lang="en-US" sz="2100" kern="1200" dirty="0"/>
         </a:p>
       </dsp:txBody>
       <dsp:txXfrm>
@@ -2298,7 +2305,7 @@
         <a:ext cx="5665191" cy="559396"/>
       </dsp:txXfrm>
     </dsp:sp>
-    <dsp:sp modelId="{B9DBE8BA-5FFA-4800-8DA9-746409569340}">
+    <dsp:sp modelId="{C4E777D7-FA04-4266-BABA-10FE491DB90E}">
       <dsp:nvSpPr>
         <dsp:cNvPr id="0" name=""/>
         <dsp:cNvSpPr/>
@@ -2364,8 +2371,8 @@
             <a:buChar char="•"/>
           </a:pPr>
           <a:r>
-            <a:rPr lang="en-US" sz="2100" kern="1200" dirty="0"/>
-            <a:t>Generating reusable test data factories</a:t>
+            <a:rPr lang="en-US" sz="2100" kern="1200"/>
+            <a:t>Generating integration test suites</a:t>
           </a:r>
         </a:p>
       </dsp:txBody>
@@ -2374,7 +2381,7 @@
         <a:ext cx="8179594" cy="876487"/>
       </dsp:txXfrm>
     </dsp:sp>
-    <dsp:sp modelId="{7622A6F9-2A36-4BCE-891F-C3CB760D30EA}">
+    <dsp:sp modelId="{8397A9AE-F50C-4BCC-888B-F79BF181981E}">
       <dsp:nvSpPr>
         <dsp:cNvPr id="0" name=""/>
         <dsp:cNvSpPr/>
@@ -2442,7 +2449,7 @@
           </a:pPr>
           <a:r>
             <a:rPr lang="en-US" sz="2100" b="1" kern="1200" dirty="0"/>
-            <a:t>Test Data Management with Factories</a:t>
+            <a:t>Expanding Test Coverage with Copilot</a:t>
           </a:r>
           <a:endParaRPr lang="en-US" sz="2100" kern="1200" dirty="0"/>
         </a:p>
@@ -4009,171 +4016,6 @@
           </a:p>
           <a:p>
             <a:r>
-              <a:t>"We've covered building fast (Session 1) and maintaining fast (Session 2). But what about DEPLOYING fast and SCALING fast? That's Sessions 3 and 4.</a:t>
-            </a:r>
-          </a:p>
-          <a:p>
-            <a:endParaRPr/>
-          </a:p>
-          <a:p>
-            <a:r>
-              <a:t>SESSION 3 - SECURITY &amp; DEVOPS: AI doesn't just write code. It can scan for vulnerabilities, generate CI/CD pipelines, write infrastructure as code, and automate deployment. We'll show how to go from code to production with AI assistance at every step.</a:t>
-            </a:r>
-          </a:p>
-          <a:p>
-            <a:endParaRPr/>
-          </a:p>
-          <a:p>
-            <a:r>
-              <a:t>SESSION 4 - ADVANCED WORKFLOWS: The final session brings it all together. Multi-agent orchestration for complex features. Automated code review. Production monitoring. This is the full end-to-end enterprise workflow.</a:t>
-            </a:r>
-          </a:p>
-          <a:p>
-            <a:endParaRPr/>
-          </a:p>
-          <a:p>
-            <a:r>
-              <a:t>YOUR HOMEWORK: Don't just watch - DO. Here's your 5-day challenge:</a:t>
-            </a:r>
-          </a:p>
-          <a:p>
-            <a:r>
-              <a:t>- Day 1: Identify the problem (messy handler)</a:t>
-            </a:r>
-          </a:p>
-          <a:p>
-            <a:r>
-              <a:t>- Day 2: Fix the architecture (repository pattern)</a:t>
-            </a:r>
-          </a:p>
-          <a:p>
-            <a:r>
-              <a:t>- Day 3: Add mocking capability (gomock)</a:t>
-            </a:r>
-          </a:p>
-          <a:p>
-            <a:r>
-              <a:t>- Day 4: Make testing easy (factories)</a:t>
-            </a:r>
-          </a:p>
-          <a:p>
-            <a:r>
-              <a:t>- Day 5: Prove it works (integration tests)</a:t>
-            </a:r>
-          </a:p>
-          <a:p>
-            <a:endParaRPr/>
-          </a:p>
-          <a:p>
-            <a:r>
-              <a:t>By Friday, you'll have transformed ONE piece of technical debt into clean, tested, production-ready code. That's your proof of concept.</a:t>
-            </a:r>
-          </a:p>
-          <a:p>
-            <a:endParaRPr/>
-          </a:p>
-          <a:p>
-            <a:r>
-              <a:t>NEXT WEEK: Do it again with another handler. Before you know it, your entire codebase is clean.</a:t>
-            </a:r>
-          </a:p>
-          <a:p>
-            <a:endParaRPr/>
-          </a:p>
-          <a:p>
-            <a:r>
-              <a:t>This is continuous evolution. This is sustainable velocity. This is the future of software development."</a:t>
-            </a:r>
-          </a:p>
-          <a:p>
-            <a:endParaRPr/>
-          </a:p>
-          <a:p>
-            <a:r>
-              <a:t>END ON HIGH NOTE: "Questions? Who's ready to refactor their first handler this week?"</a:t>
-            </a:r>
-          </a:p>
-          <a:p>
-            <a:endParaRPr/>
-          </a:p>
-        </p:txBody>
-      </p:sp>
-      <p:sp>
-        <p:nvSpPr>
-          <p:cNvPr id="4" name="Slide Number Placeholder 3"/>
-          <p:cNvSpPr>
-            <a:spLocks noGrp="1"/>
-          </p:cNvSpPr>
-          <p:nvPr>
-            <p:ph type="sldNum" sz="quarter" idx="5"/>
-          </p:nvPr>
-        </p:nvSpPr>
-        <p:spPr/>
-      </p:sp>
-    </p:spTree>
-  </p:cSld>
-  <p:clrMapOvr>
-    <a:masterClrMapping/>
-  </p:clrMapOvr>
-</p:notes>
-</file>
-
-<file path=ppt/notesSlides/notesSlide11.xml><?xml version="1.0" encoding="utf-8"?>
-<p:notes xmlns:a="http://schemas.openxmlformats.org/drawingml/2006/main" xmlns:r="http://schemas.openxmlformats.org/officeDocument/2006/relationships" xmlns:p="http://schemas.openxmlformats.org/presentationml/2006/main">
-  <p:cSld>
-    <p:spTree>
-      <p:nvGrpSpPr>
-        <p:cNvPr id="1" name=""/>
-        <p:cNvGrpSpPr/>
-        <p:nvPr/>
-      </p:nvGrpSpPr>
-      <p:grpSpPr>
-        <a:xfrm>
-          <a:off x="0" y="0"/>
-          <a:ext cx="0" cy="0"/>
-          <a:chOff x="0" y="0"/>
-          <a:chExt cx="0" cy="0"/>
-        </a:xfrm>
-      </p:grpSpPr>
-      <p:sp>
-        <p:nvSpPr>
-          <p:cNvPr id="2" name="Slide Image Placeholder 1"/>
-          <p:cNvSpPr>
-            <a:spLocks noGrp="1" noRot="1" noChangeAspect="1"/>
-          </p:cNvSpPr>
-          <p:nvPr>
-            <p:ph type="sldImg" idx="2"/>
-          </p:nvPr>
-        </p:nvSpPr>
-        <p:spPr/>
-      </p:sp>
-      <p:sp>
-        <p:nvSpPr>
-          <p:cNvPr id="3" name="Notes Placeholder 2"/>
-          <p:cNvSpPr>
-            <a:spLocks noGrp="1"/>
-          </p:cNvSpPr>
-          <p:nvPr>
-            <p:ph type="body" sz="quarter" idx="3"/>
-          </p:nvPr>
-        </p:nvSpPr>
-        <p:spPr/>
-        <p:txBody>
-          <a:bodyPr/>
-          <a:lstStyle/>
-          <a:p>
-            <a:endParaRPr/>
-          </a:p>
-          <a:p>
-            <a:r>
-              <a:t>SPEAKER NOTES:</a:t>
-            </a:r>
-          </a:p>
-          <a:p>
-            <a:endParaRPr/>
-          </a:p>
-          <a:p>
-            <a:r>
               <a:t>OPEN THE FLOOR:</a:t>
             </a:r>
           </a:p>
@@ -4475,85 +4317,63 @@
           <a:bodyPr/>
           <a:lstStyle/>
           <a:p>
-            <a:endParaRPr dirty="0"/>
-          </a:p>
-          <a:p>
-            <a:r>
-              <a:rPr dirty="0"/>
+            <a:endParaRPr/>
+          </a:p>
+          <a:p>
+            <a:r>
               <a:t>SPEAKER NOTES:</a:t>
             </a:r>
           </a:p>
           <a:p>
-            <a:endParaRPr dirty="0"/>
-          </a:p>
-          <a:p>
-            <a:r>
-              <a:rPr dirty="0"/>
-              <a:t>"The key difference in Session 2: We're using MULTIPLE agent types strategically.</a:t>
-            </a:r>
-          </a:p>
-          <a:p>
-            <a:endParaRPr dirty="0"/>
-          </a:p>
-          <a:p>
-            <a:r>
-              <a:rPr dirty="0"/>
-              <a:t>COPILOT CODING AGENT: When refactoring spans 5+ files, we need coordination. The agent analyzes dependencies, plans changes across the entire codebase, and executes them in one coordinated transformation. Manual refactoring? One mistake breaks everything. Agent? It handles all the complexity.</a:t>
-            </a:r>
-          </a:p>
-          <a:p>
-            <a:endParaRPr dirty="0"/>
-          </a:p>
-          <a:p>
-            <a:r>
-              <a:rPr dirty="0"/>
-              <a:t>LOCAL AGENT: For generating test infrastructure - mocks and factories - we use Local Agent. Quick generation, iterative refinement. We can see the code immediately and adjust.</a:t>
-            </a:r>
-          </a:p>
-          <a:p>
-            <a:endParaRPr dirty="0"/>
-          </a:p>
-          <a:p>
-            <a:r>
-              <a:rPr dirty="0"/>
-              <a:t>The magic: GitHub Copilot doesn't just generate NEW code fast. It helps TRANSFORM EXISTING code fast. That's the breakthrough.</a:t>
-            </a:r>
-          </a:p>
-          <a:p>
-            <a:endParaRPr dirty="0"/>
-          </a:p>
-          <a:p>
-            <a:r>
-              <a:rPr dirty="0"/>
-              <a:t>Traditional refactoring: Nerve-wracking, time-consuming, risky.</a:t>
-            </a:r>
-          </a:p>
-          <a:p>
-            <a:r>
-              <a:rPr dirty="0"/>
-              <a:t>AI-assisted refactoring: Confident, fast, safe.</a:t>
-            </a:r>
-          </a:p>
-          <a:p>
-            <a:endParaRPr dirty="0"/>
-          </a:p>
-          <a:p>
-            <a:r>
-              <a:rPr dirty="0"/>
-              <a:t>This session proves: Technical debt is no longer expensive to fix. With AI, continuous improvement is economically viable."</a:t>
-            </a:r>
-          </a:p>
-          <a:p>
-            <a:endParaRPr dirty="0"/>
-          </a:p>
-          <a:p>
-            <a:r>
-              <a:rPr dirty="0"/>
-              <a:t>TIMING: Spend 1-2 minutes on this slide. It's the foundation for understanding the demos.</a:t>
-            </a:r>
-          </a:p>
-          <a:p>
-            <a:endParaRPr dirty="0"/>
+            <a:endParaRPr/>
+          </a:p>
+          <a:p>
+            <a:r>
+              <a:t>"Three acts, three transformations, one mission: Turn technical debt into enterprise architecture.</a:t>
+            </a:r>
+          </a:p>
+          <a:p>
+            <a:endParaRPr/>
+          </a:p>
+          <a:p>
+            <a:r>
+              <a:t>ACT 1 - REPOSITORY REFACTORING: This is the foundation. We're taking handlers that directly manipulate global variables and extracting a clean repository pattern. The agent coordinates changes across 5 files simultaneously. Traditional approach? 15 minutes of nerve-wracking surgery. AI approach? 8 minutes of confident delegation.</a:t>
+            </a:r>
+          </a:p>
+          <a:p>
+            <a:endParaRPr/>
+          </a:p>
+          <a:p>
+            <a:r>
+              <a:t>ACT 2 - TEST INFRASTRUCTURE: Clean architecture means nothing without tests. We auto-generate mocks using gomock and create beautiful test data factories with builder pattern. Writing these manually? 45 minutes of boilerplate. With AI? 10 minutes of generation.</a:t>
+            </a:r>
+          </a:p>
+          <a:p>
+            <a:endParaRPr/>
+          </a:p>
+          <a:p>
+            <a:r>
+              <a:t>ACT 3 - TEST EXPANSION: Now we USE our infrastructure. We write comprehensive integration tests covering happy paths, error scenarios, concurrent requests, edge cases. The result? Coverage jumps from 23% to 87% in 7 minutes.</a:t>
+            </a:r>
+          </a:p>
+          <a:p>
+            <a:endParaRPr/>
+          </a:p>
+          <a:p>
+            <a:r>
+              <a:t>The numbers tell the story: 105 minutes of traditional work becomes 25 minutes with AI. But it's not just speed - it's CONFIDENCE. Every step is tested. Every change is verified. This is sustainable velocity."</a:t>
+            </a:r>
+          </a:p>
+          <a:p>
+            <a:endParaRPr/>
+          </a:p>
+          <a:p>
+            <a:r>
+              <a:t>TRANSITION: "Let's dive into Act 1 and watch AI perform architectural surgery on production code..."</a:t>
+            </a:r>
+          </a:p>
+          <a:p>
+            <a:endParaRPr/>
           </a:p>
         </p:txBody>
       </p:sp>
@@ -4633,7 +4453,7 @@
           </a:p>
           <a:p>
             <a:r>
-              <a:t>"Three acts, three transformations, one mission: Turn technical debt into enterprise architecture.</a:t>
+              <a:t>"Let me show you the transformation visually.</a:t>
             </a:r>
           </a:p>
           <a:p>
@@ -4641,7 +4461,7 @@
           </a:p>
           <a:p>
             <a:r>
-              <a:t>ACT 1 - REPOSITORY REFACTORING: This is the foundation. We're taking handlers that directly manipulate global variables and extracting a clean repository pattern. The agent coordinates changes across 5 files simultaneously. Traditional approach? 15 minutes of nerve-wracking surgery. AI approach? 8 minutes of confident delegation.</a:t>
+              <a:t>BEFORE: This is what we inherited. Global variables everywhere. Look at line 14-17 in the handler: var students, var studentsMu, var nextStudentID. All polluting package scope. </a:t>
             </a:r>
           </a:p>
           <a:p>
@@ -4649,7 +4469,7 @@
           </a:p>
           <a:p>
             <a:r>
-              <a:t>ACT 2 - TEST INFRASTRUCTURE: Clean architecture means nothing without tests. We auto-generate mocks using gomock and create beautiful test data factories with builder pattern. Writing these manually? 45 minutes of boilerplate. With AI? 10 minutes of generation.</a:t>
+              <a:t>In CreateStudent function: Seven responsibilities in one place - HTTP decoding, validation, mutex locking, ID generation, storage mutation, serialization. This is a MAINTENANCE NIGHTMARE.</a:t>
             </a:r>
           </a:p>
           <a:p>
@@ -4657,7 +4477,7 @@
           </a:p>
           <a:p>
             <a:r>
-              <a:t>ACT 3 - TEST EXPANSION: Now we USE our infrastructure. We write comprehensive integration tests covering happy paths, error scenarios, concurrent requests, edge cases. The result? Coverage jumps from 23% to 87% in 7 minutes.</a:t>
+              <a:t>AFTER: Look at this beauty. Clean repository interface defining the contract. Handler depends on the INTERFACE, not concrete implementation. All state encapsulated inside repository structs. Constructor injection for testability.</a:t>
             </a:r>
           </a:p>
           <a:p>
@@ -4665,7 +4485,7 @@
           </a:p>
           <a:p>
             <a:r>
-              <a:t>The numbers tell the story: 105 minutes of traditional work becomes 25 minutes with AI. But it's not just speed - it's CONFIDENCE. Every step is tested. Every change is verified. This is sustainable velocity."</a:t>
+              <a:t>The handler is now PURE - it only handles HTTP and delegates storage. Single responsibility principle achieved.</a:t>
             </a:r>
           </a:p>
           <a:p>
@@ -4673,7 +4493,23 @@
           </a:p>
           <a:p>
             <a:r>
-              <a:t>TRANSITION: "Let's dive into Act 1 and watch AI perform architectural surgery on production code..."</a:t>
+              <a:t>THE DEMO: We'll create Jira story TEC-11, delegate to Copilot Coding Agent with detailed architectural requirements, watch it coordinate changes across 5 files, review the generated PR, and then VERIFY with live API testing.</a:t>
+            </a:r>
+          </a:p>
+          <a:p>
+            <a:endParaRPr/>
+          </a:p>
+          <a:p>
+            <a:r>
+              <a:t>The magic moment: When we run curl commands and the refactored API works IDENTICALLY to before. Zero breaking changes. Clean architecture achieved. That's professional refactoring."</a:t>
+            </a:r>
+          </a:p>
+          <a:p>
+            <a:endParaRPr/>
+          </a:p>
+          <a:p>
+            <a:r>
+              <a:t>DEMO CHECKPOINT: Show actual code comparison on screen if possible. Visual impact is powerful.</a:t>
             </a:r>
           </a:p>
           <a:p>
@@ -4757,7 +4593,7 @@
           </a:p>
           <a:p>
             <a:r>
-              <a:t>"Let me show you the transformation visually.</a:t>
+              <a:t>"Act 2 is about TEST INFRASTRUCTURE. We have clean architecture, now we need tools to test it.</a:t>
             </a:r>
           </a:p>
           <a:p>
@@ -4765,7 +4601,7 @@
           </a:p>
           <a:p>
             <a:r>
-              <a:t>BEFORE: This is what we inherited. Global variables everywhere. Look at line 14-17 in the handler: var students, var studentsMu, var nextStudentID. All polluting package scope. </a:t>
+              <a:t>GOMOCK GENERATION: The agent adds go:generate directives to our repository interfaces and runs mockgen. Result? MockStudentRepository with full expectation syntax. We can now write unit tests like:</a:t>
             </a:r>
           </a:p>
           <a:p>
@@ -4773,7 +4609,17 @@
           </a:p>
           <a:p>
             <a:r>
-              <a:t>In CreateStudent function: Seven responsibilities in one place - HTTP decoding, validation, mutex locking, ID generation, storage mutation, serialization. This is a MAINTENANCE NIGHTMARE.</a:t>
+              <a:t>  mock.EXPECT().Create(gomock.Any()).Return(expectedStudent)</a:t>
+            </a:r>
+          </a:p>
+          <a:p>
+            <a:r>
+              <a:t>  </a:t>
+            </a:r>
+          </a:p>
+          <a:p>
+            <a:r>
+              <a:t>This is ISOLATION TESTING. We test the handler without touching any real storage. Fast tests. Reliable tests.</a:t>
             </a:r>
           </a:p>
           <a:p>
@@ -4781,7 +4627,37 @@
           </a:p>
           <a:p>
             <a:r>
-              <a:t>AFTER: Look at this beauty. Clean repository interface defining the contract. Handler depends on the INTERFACE, not concrete implementation. All state encapsulated inside repository structs. Constructor injection for testability.</a:t>
+              <a:t>FACTORY PATTERN: Creating test data manually is PAINFUL. Every test needs:</a:t>
+            </a:r>
+          </a:p>
+          <a:p>
+            <a:r>
+              <a:t>  student := models.Student{</a:t>
+            </a:r>
+          </a:p>
+          <a:p>
+            <a:r>
+              <a:t>    ID: 1,</a:t>
+            </a:r>
+          </a:p>
+          <a:p>
+            <a:r>
+              <a:t>    Name: 'Alice Johnson',</a:t>
+            </a:r>
+          </a:p>
+          <a:p>
+            <a:r>
+              <a:t>    Email: 'alice@university.edu',</a:t>
+            </a:r>
+          </a:p>
+          <a:p>
+            <a:r>
+              <a:t>    Grade: 'A',</a:t>
+            </a:r>
+          </a:p>
+          <a:p>
+            <a:r>
+              <a:t>  }</a:t>
             </a:r>
           </a:p>
           <a:p>
@@ -4789,7 +4665,12 @@
           </a:p>
           <a:p>
             <a:r>
-              <a:t>The handler is now PURE - it only handles HTTP and delegates storage. Single responsibility principle achieved.</a:t>
+              <a:t>That's 7 lines per test. With factory:</a:t>
+            </a:r>
+          </a:p>
+          <a:p>
+            <a:r>
+              <a:t>  student := ValidStudent().Build()</a:t>
             </a:r>
           </a:p>
           <a:p>
@@ -4797,7 +4678,7 @@
           </a:p>
           <a:p>
             <a:r>
-              <a:t>THE DEMO: We'll create Jira story TEC-11, delegate to Copilot Coding Agent with detailed architectural requirements, watch it coordinate changes across 5 files, review the generated PR, and then VERIFY with live API testing.</a:t>
+              <a:t>That's 1 line. 80% less test setup code.</a:t>
             </a:r>
           </a:p>
           <a:p>
@@ -4805,7 +4686,7 @@
           </a:p>
           <a:p>
             <a:r>
-              <a:t>The magic moment: When we run curl commands and the refactored API works IDENTICALLY to before. Zero breaking changes. Clean architecture achieved. That's professional refactoring."</a:t>
+              <a:t>THE DEMO: We'll create Jira TEC-7, use Local Agent to generate both mocks and factories, show example tests using them, and prove how much cleaner test code becomes.</a:t>
             </a:r>
           </a:p>
           <a:p>
@@ -4813,7 +4694,15 @@
           </a:p>
           <a:p>
             <a:r>
-              <a:t>DEMO CHECKPOINT: Show actual code comparison on screen if possible. Visual impact is powerful.</a:t>
+              <a:t>The impact: Test setup goes from 'painful boilerplate' to 'one line of intention'. Tests become DOCUMENTATION."</a:t>
+            </a:r>
+          </a:p>
+          <a:p>
+            <a:endParaRPr/>
+          </a:p>
+          <a:p>
+            <a:r>
+              <a:t>ENERGY: Show excitement about how much easier testing becomes. This is about developer happiness.</a:t>
             </a:r>
           </a:p>
           <a:p>
@@ -4897,7 +4786,7 @@
           </a:p>
           <a:p>
             <a:r>
-              <a:t>"Act 2 is about TEST INFRASTRUCTURE. We have clean architecture, now we need tools to test it.</a:t>
+              <a:t>"Act 3 is where it all comes together. We have clean architecture. We have test infrastructure. Now we USE it to achieve enterprise-grade coverage.</a:t>
             </a:r>
           </a:p>
           <a:p>
@@ -4905,7 +4794,7 @@
           </a:p>
           <a:p>
             <a:r>
-              <a:t>GOMOCK GENERATION: The agent adds go:generate directives to our repository interfaces and runs mockgen. Result? MockStudentRepository with full expectation syntax. We can now write unit tests like:</a:t>
+              <a:t>THE COVERAGE JUMP: From 23% to 87% in 7 minutes. That's not just a number - that's CONFIDENCE.</a:t>
             </a:r>
           </a:p>
           <a:p>
@@ -4913,17 +4802,27 @@
           </a:p>
           <a:p>
             <a:r>
-              <a:t>  mock.EXPECT().Create(gomock.Any()).Return(expectedStudent)</a:t>
-            </a:r>
-          </a:p>
-          <a:p>
-            <a:r>
-              <a:t>  </a:t>
-            </a:r>
-          </a:p>
-          <a:p>
-            <a:r>
-              <a:t>This is ISOLATION TESTING. We test the handler without touching any real storage. Fast tests. Reliable tests.</a:t>
+              <a:t>COMPREHENSIVE TESTS:</a:t>
+            </a:r>
+          </a:p>
+          <a:p>
+            <a:r>
+              <a:t>- CRUD Workflow tests the happy path end-to-end</a:t>
+            </a:r>
+          </a:p>
+          <a:p>
+            <a:r>
+              <a:t>- Concurrent Creation proves our thread safety actually works under load</a:t>
+            </a:r>
+          </a:p>
+          <a:p>
+            <a:r>
+              <a:t>- Error Scenarios test that failures fail gracefully</a:t>
+            </a:r>
+          </a:p>
+          <a:p>
+            <a:r>
+              <a:t>- Edge Cases catch the bugs that slip through</a:t>
             </a:r>
           </a:p>
           <a:p>
@@ -4931,37 +4830,7 @@
           </a:p>
           <a:p>
             <a:r>
-              <a:t>FACTORY PATTERN: Creating test data manually is PAINFUL. Every test needs:</a:t>
-            </a:r>
-          </a:p>
-          <a:p>
-            <a:r>
-              <a:t>  student := models.Student{</a:t>
-            </a:r>
-          </a:p>
-          <a:p>
-            <a:r>
-              <a:t>    ID: 1,</a:t>
-            </a:r>
-          </a:p>
-          <a:p>
-            <a:r>
-              <a:t>    Name: 'Alice Johnson',</a:t>
-            </a:r>
-          </a:p>
-          <a:p>
-            <a:r>
-              <a:t>    Email: 'alice@university.edu',</a:t>
-            </a:r>
-          </a:p>
-          <a:p>
-            <a:r>
-              <a:t>    Grade: 'A',</a:t>
-            </a:r>
-          </a:p>
-          <a:p>
-            <a:r>
-              <a:t>  }</a:t>
+              <a:t>THE MAGIC: These tests read like SPECIFICATIONS. Look at TestStudentCRUDWorkflow - you can read the test and understand exactly how the API should behave. That's documentation that never goes stale because it's EXECUTED.</a:t>
             </a:r>
           </a:p>
           <a:p>
@@ -4969,12 +4838,7 @@
           </a:p>
           <a:p>
             <a:r>
-              <a:t>That's 7 lines per test. With factory:</a:t>
-            </a:r>
-          </a:p>
-          <a:p>
-            <a:r>
-              <a:t>  student := ValidStudent().Build()</a:t>
+              <a:t>THE DEMO: We'll create Jira TEC-12, use Local Agent to generate the test suite, run the tests live showing them all passing, and watch coverage jump in real-time.</a:t>
             </a:r>
           </a:p>
           <a:p>
@@ -4982,7 +4846,7 @@
           </a:p>
           <a:p>
             <a:r>
-              <a:t>That's 1 line. 80% less test setup code.</a:t>
+              <a:t>CELEBRATION MOMENT: When you run 'go test -cover' and see '87.3% coverage' - that's your victory moment. Pause and let the audience appreciate that number.</a:t>
             </a:r>
           </a:p>
           <a:p>
@@ -4990,7 +4854,7 @@
           </a:p>
           <a:p>
             <a:r>
-              <a:t>THE DEMO: We'll create Jira TEC-7, use Local Agent to generate both mocks and factories, show example tests using them, and prove how much cleaner test code becomes.</a:t>
+              <a:t>The real win: These tests execute in 134ms. Fast feedback loops. You can run them every single commit."</a:t>
             </a:r>
           </a:p>
           <a:p>
@@ -4998,15 +4862,7 @@
           </a:p>
           <a:p>
             <a:r>
-              <a:t>The impact: Test setup goes from 'painful boilerplate' to 'one line of intention'. Tests become DOCUMENTATION."</a:t>
-            </a:r>
-          </a:p>
-          <a:p>
-            <a:endParaRPr/>
-          </a:p>
-          <a:p>
-            <a:r>
-              <a:t>ENERGY: Show excitement about how much easier testing becomes. This is about developer happiness.</a:t>
+              <a:t>PAUSE: Before moving to results, check audience engagement. This is a good moment for a quick question.</a:t>
             </a:r>
           </a:p>
           <a:p>
@@ -5090,7 +4946,7 @@
           </a:p>
           <a:p>
             <a:r>
-              <a:t>"Act 3 is where it all comes together. We have clean architecture. We have test infrastructure. Now we USE it to achieve enterprise-grade coverage.</a:t>
+              <a:t>"Let's talk about the IMPACT. Not just speed - TRANSFORMATION.</a:t>
             </a:r>
           </a:p>
           <a:p>
@@ -5098,7 +4954,27 @@
           </a:p>
           <a:p>
             <a:r>
-              <a:t>THE COVERAGE JUMP: From 23% to 87% in 7 minutes. That's not just a number - that's CONFIDENCE.</a:t>
+              <a:t>QUANTITATIVE RESULTS: 4.2x speedup is impressive. But look deeper:</a:t>
+            </a:r>
+          </a:p>
+          <a:p>
+            <a:r>
+              <a:t>- Zero breaking changes means we can deploy immediately</a:t>
+            </a:r>
+          </a:p>
+          <a:p>
+            <a:r>
+              <a:t>- 87% coverage means we catch bugs before production</a:t>
+            </a:r>
+          </a:p>
+          <a:p>
+            <a:r>
+              <a:t>- 134ms test execution means fast feedback loops</a:t>
+            </a:r>
+          </a:p>
+          <a:p>
+            <a:r>
+              <a:t>- 500+ lines generated means less manual tedious work</a:t>
             </a:r>
           </a:p>
           <a:p>
@@ -5106,27 +4982,7 @@
           </a:p>
           <a:p>
             <a:r>
-              <a:t>COMPREHENSIVE TESTS:</a:t>
-            </a:r>
-          </a:p>
-          <a:p>
-            <a:r>
-              <a:t>- CRUD Workflow tests the happy path end-to-end</a:t>
-            </a:r>
-          </a:p>
-          <a:p>
-            <a:r>
-              <a:t>- Concurrent Creation proves our thread safety actually works under load</a:t>
-            </a:r>
-          </a:p>
-          <a:p>
-            <a:r>
-              <a:t>- Error Scenarios test that failures fail gracefully</a:t>
-            </a:r>
-          </a:p>
-          <a:p>
-            <a:r>
-              <a:t>- Edge Cases catch the bugs that slip through</a:t>
+              <a:t>QUALITATIVE IMPACT: This is where it gets real:</a:t>
             </a:r>
           </a:p>
           <a:p>
@@ -5134,7 +4990,7 @@
           </a:p>
           <a:p>
             <a:r>
-              <a:t>THE MAGIC: These tests read like SPECIFICATIONS. Look at TestStudentCRUDWorkflow - you can read the test and understand exactly how the API should behave. That's documentation that never goes stale because it's EXECUTED.</a:t>
+              <a:t>FOR DEVELOPERS: You're not afraid to change code anymore. Tests protect you. Architecture is clean. New features are easy to add.</a:t>
             </a:r>
           </a:p>
           <a:p>
@@ -5142,7 +4998,7 @@
           </a:p>
           <a:p>
             <a:r>
-              <a:t>THE DEMO: We'll create Jira TEC-12, use Local Agent to generate the test suite, run the tests live showing them all passing, and watch coverage jump in real-time.</a:t>
+              <a:t>FOR QA: Your tests are comprehensive and readable. They document expected behavior. Coverage gives you confidence.</a:t>
             </a:r>
           </a:p>
           <a:p>
@@ -5150,7 +5006,7 @@
           </a:p>
           <a:p>
             <a:r>
-              <a:t>CELEBRATION MOMENT: When you run 'go test -cover' and see '87.3% coverage' - that's your victory moment. Pause and let the audience appreciate that number.</a:t>
+              <a:t>FOR TECH LEADS: Technical debt is eliminated without slowing velocity. You can onboard new developers 3x faster because code is clean and documented.</a:t>
             </a:r>
           </a:p>
           <a:p>
@@ -5158,7 +5014,7 @@
           </a:p>
           <a:p>
             <a:r>
-              <a:t>The real win: These tests execute in 134ms. Fast feedback loops. You can run them every single commit."</a:t>
+              <a:t>FOR ENGINEERING LEADERS: This proves ROI on AI tooling. 4.2x faster refactoring means you can afford continuous improvement. Quality and velocity are NOT opposites.</a:t>
             </a:r>
           </a:p>
           <a:p>
@@ -5166,7 +5022,23 @@
           </a:p>
           <a:p>
             <a:r>
-              <a:t>PAUSE: Before moving to results, check audience engagement. This is a good moment for a quick question.</a:t>
+              <a:t>THE BIGGER PICTURE: Session 1 showed speed. Session 2 shows SUSTAINABILITY. With AI, you don't have to choose between shipping fast and maintaining quality. You can do BOTH.</a:t>
+            </a:r>
+          </a:p>
+          <a:p>
+            <a:endParaRPr/>
+          </a:p>
+          <a:p>
+            <a:r>
+              <a:t>This is the evolution of software development: Continuous improvement is no longer expensive."</a:t>
+            </a:r>
+          </a:p>
+          <a:p>
+            <a:endParaRPr/>
+          </a:p>
+          <a:p>
+            <a:r>
+              <a:t>TRANSITION: "So what are the key lessons we take away from this?"</a:t>
             </a:r>
           </a:p>
           <a:p>
@@ -5250,7 +5122,7 @@
           </a:p>
           <a:p>
             <a:r>
-              <a:t>"Let's talk about the IMPACT. Not just speed - TRANSFORMATION.</a:t>
+              <a:t>"Five core lessons from Session 2. These are principles that change how you think about maintenance:</a:t>
             </a:r>
           </a:p>
           <a:p>
@@ -5258,27 +5130,7 @@
           </a:p>
           <a:p>
             <a:r>
-              <a:t>QUANTITATIVE RESULTS: 4.2x speedup is impressive. But look deeper:</a:t>
-            </a:r>
-          </a:p>
-          <a:p>
-            <a:r>
-              <a:t>- Zero breaking changes means we can deploy immediately</a:t>
-            </a:r>
-          </a:p>
-          <a:p>
-            <a:r>
-              <a:t>- 87% coverage means we catch bugs before production</a:t>
-            </a:r>
-          </a:p>
-          <a:p>
-            <a:r>
-              <a:t>- 134ms test execution means fast feedback loops</a:t>
-            </a:r>
-          </a:p>
-          <a:p>
-            <a:r>
-              <a:t>- 500+ lines generated means less manual tedious work</a:t>
+              <a:t>1. REFACTOR EARLY: The old way was 'ship fast, refactor later' - but later never came. With AI, refactoring is FAST. You can afford to do it continuously. Don't wait for debt to compound. Fix it early while it's small.</a:t>
             </a:r>
           </a:p>
           <a:p>
@@ -5286,7 +5138,7 @@
           </a:p>
           <a:p>
             <a:r>
-              <a:t>QUALITATIVE IMPACT: This is where it gets real:</a:t>
+              <a:t>2. INTERFACES UNLOCK TESTABILITY: The repository pattern isn't just about clean code - it's about SPEED. When you can test in isolation with mocks, tests run in milliseconds instead of seconds. Fast tests mean fast feedback. Fast feedback means high velocity.</a:t>
             </a:r>
           </a:p>
           <a:p>
@@ -5294,7 +5146,7 @@
           </a:p>
           <a:p>
             <a:r>
-              <a:t>FOR DEVELOPERS: You're not afraid to change code anymore. Tests protect you. Architecture is clean. New features are easy to add.</a:t>
+              <a:t>3. FACTORIES MAKE TESTS MAINTAINABLE: Here's the dirty secret: Most developers hate writing tests because test setup is PAINFUL. Factories fix that. When creating test data is easy, testing becomes pleasant. When testing is pleasant, coverage goes up.</a:t>
             </a:r>
           </a:p>
           <a:p>
@@ -5302,7 +5154,7 @@
           </a:p>
           <a:p>
             <a:r>
-              <a:t>FOR QA: Your tests are comprehensive and readable. They document expected behavior. Coverage gives you confidence.</a:t>
+              <a:t>4. EVOLUTION &gt; REVOLUTION: Stop thinking in terms of 'big rewrites'. Think continuous evolution. With AI, small improvements are economically viable. Ship features fast. Refactor fast. Test fast. Evolve continuously.</a:t>
             </a:r>
           </a:p>
           <a:p>
@@ -5310,7 +5162,7 @@
           </a:p>
           <a:p>
             <a:r>
-              <a:t>FOR TECH LEADS: Technical debt is eliminated without slowing velocity. You can onboard new developers 3x faster because code is clean and documented.</a:t>
+              <a:t>5. AI TRANSFORMS EXISTING CODE: This is the breakthrough most people miss. AI isn't just for greenfield. It's for BROWNFIELD. Your legacy code can become clean code. Your technical debt can be paid down. That's the real revolution.</a:t>
             </a:r>
           </a:p>
           <a:p>
@@ -5318,31 +5170,7 @@
           </a:p>
           <a:p>
             <a:r>
-              <a:t>FOR ENGINEERING LEADERS: This proves ROI on AI tooling. 4.2x faster refactoring means you can afford continuous improvement. Quality and velocity are NOT opposites.</a:t>
-            </a:r>
-          </a:p>
-          <a:p>
-            <a:endParaRPr/>
-          </a:p>
-          <a:p>
-            <a:r>
-              <a:t>THE BIGGER PICTURE: Session 1 showed speed. Session 2 shows SUSTAINABILITY. With AI, you don't have to choose between shipping fast and maintaining quality. You can do BOTH.</a:t>
-            </a:r>
-          </a:p>
-          <a:p>
-            <a:endParaRPr/>
-          </a:p>
-          <a:p>
-            <a:r>
-              <a:t>This is the evolution of software development: Continuous improvement is no longer expensive."</a:t>
-            </a:r>
-          </a:p>
-          <a:p>
-            <a:endParaRPr/>
-          </a:p>
-          <a:p>
-            <a:r>
-              <a:t>TRANSITION: "So what are the key lessons we take away from this?"</a:t>
+              <a:t>CALL TO ACTION: 'This week, pick ONE messy handler. Spend 30 minutes refactoring it with Copilot Agent. I guarantee you'll see the power of AI-assisted evolution.'"</a:t>
             </a:r>
           </a:p>
           <a:p>
@@ -5426,7 +5254,7 @@
           </a:p>
           <a:p>
             <a:r>
-              <a:t>"Five core lessons from Session 2. These are principles that change how you think about maintenance:</a:t>
+              <a:t>"We've covered building fast (Session 1) and maintaining fast (Session 2). But what about DEPLOYING fast and SCALING fast? That's Sessions 3 and 4.</a:t>
             </a:r>
           </a:p>
           <a:p>
@@ -5434,7 +5262,7 @@
           </a:p>
           <a:p>
             <a:r>
-              <a:t>1. REFACTOR EARLY: The old way was 'ship fast, refactor later' - but later never came. With AI, refactoring is FAST. You can afford to do it continuously. Don't wait for debt to compound. Fix it early while it's small.</a:t>
+              <a:t>SESSION 3 - SECURITY &amp; DEVOPS: AI doesn't just write code. It can scan for vulnerabilities, generate CI/CD pipelines, write infrastructure as code, and automate deployment. We'll show how to go from code to production with AI assistance at every step.</a:t>
             </a:r>
           </a:p>
           <a:p>
@@ -5442,7 +5270,7 @@
           </a:p>
           <a:p>
             <a:r>
-              <a:t>2. INTERFACES UNLOCK TESTABILITY: The repository pattern isn't just about clean code - it's about SPEED. When you can test in isolation with mocks, tests run in milliseconds instead of seconds. Fast tests mean fast feedback. Fast feedback means high velocity.</a:t>
+              <a:t>SESSION 4 - ADVANCED WORKFLOWS: The final session brings it all together. Multi-agent orchestration for complex features. Automated code review. Production monitoring. This is the full end-to-end enterprise workflow.</a:t>
             </a:r>
           </a:p>
           <a:p>
@@ -5450,7 +5278,32 @@
           </a:p>
           <a:p>
             <a:r>
-              <a:t>3. FACTORIES MAKE TESTS MAINTAINABLE: Here's the dirty secret: Most developers hate writing tests because test setup is PAINFUL. Factories fix that. When creating test data is easy, testing becomes pleasant. When testing is pleasant, coverage goes up.</a:t>
+              <a:t>YOUR HOMEWORK: Don't just watch - DO. Here's your 5-day challenge:</a:t>
+            </a:r>
+          </a:p>
+          <a:p>
+            <a:r>
+              <a:t>- Day 1: Identify the problem (messy handler)</a:t>
+            </a:r>
+          </a:p>
+          <a:p>
+            <a:r>
+              <a:t>- Day 2: Fix the architecture (repository pattern)</a:t>
+            </a:r>
+          </a:p>
+          <a:p>
+            <a:r>
+              <a:t>- Day 3: Add mocking capability (gomock)</a:t>
+            </a:r>
+          </a:p>
+          <a:p>
+            <a:r>
+              <a:t>- Day 4: Make testing easy (factories)</a:t>
+            </a:r>
+          </a:p>
+          <a:p>
+            <a:r>
+              <a:t>- Day 5: Prove it works (integration tests)</a:t>
             </a:r>
           </a:p>
           <a:p>
@@ -5458,7 +5311,7 @@
           </a:p>
           <a:p>
             <a:r>
-              <a:t>4. EVOLUTION &gt; REVOLUTION: Stop thinking in terms of 'big rewrites'. Think continuous evolution. With AI, small improvements are economically viable. Ship features fast. Refactor fast. Test fast. Evolve continuously.</a:t>
+              <a:t>By Friday, you'll have transformed ONE piece of technical debt into clean, tested, production-ready code. That's your proof of concept.</a:t>
             </a:r>
           </a:p>
           <a:p>
@@ -5466,7 +5319,7 @@
           </a:p>
           <a:p>
             <a:r>
-              <a:t>5. AI TRANSFORMS EXISTING CODE: This is the breakthrough most people miss. AI isn't just for greenfield. It's for BROWNFIELD. Your legacy code can become clean code. Your technical debt can be paid down. That's the real revolution.</a:t>
+              <a:t>NEXT WEEK: Do it again with another handler. Before you know it, your entire codebase is clean.</a:t>
             </a:r>
           </a:p>
           <a:p>
@@ -5474,7 +5327,15 @@
           </a:p>
           <a:p>
             <a:r>
-              <a:t>CALL TO ACTION: 'This week, pick ONE messy handler. Spend 30 minutes refactoring it with Copilot Agent. I guarantee you'll see the power of AI-assisted evolution.'"</a:t>
+              <a:t>This is continuous evolution. This is sustainable velocity. This is the future of software development."</a:t>
+            </a:r>
+          </a:p>
+          <a:p>
+            <a:endParaRPr/>
+          </a:p>
+          <a:p>
+            <a:r>
+              <a:t>END ON HIGH NOTE: "Questions? Who's ready to refactor their first handler this week?"</a:t>
             </a:r>
           </a:p>
           <a:p>
@@ -13087,267 +12948,6 @@
         <p:spPr>
           <a:xfrm>
             <a:off x="457200" y="457200"/>
-            <a:ext cx="2257349" cy="584775"/>
-          </a:xfrm>
-          <a:prstGeom prst="rect">
-            <a:avLst/>
-          </a:prstGeom>
-          <a:noFill/>
-        </p:spPr>
-        <p:txBody>
-          <a:bodyPr wrap="none">
-            <a:spAutoFit/>
-          </a:bodyPr>
-          <a:lstStyle/>
-          <a:p>
-            <a:pPr>
-              <a:defRPr sz="3200" b="1">
-                <a:solidFill>
-                  <a:srgbClr val="1F4E79"/>
-                </a:solidFill>
-              </a:defRPr>
-            </a:pPr>
-            <a:r>
-              <a:rPr lang="en-US" dirty="0"/>
-              <a:t>Conclusion</a:t>
-            </a:r>
-            <a:endParaRPr dirty="0"/>
-          </a:p>
-        </p:txBody>
-      </p:sp>
-      <p:sp>
-        <p:nvSpPr>
-          <p:cNvPr id="3" name="TextBox 2"/>
-          <p:cNvSpPr txBox="1"/>
-          <p:nvPr/>
-        </p:nvSpPr>
-        <p:spPr>
-          <a:xfrm>
-            <a:off x="731520" y="1371600"/>
-            <a:ext cx="7772400" cy="4001095"/>
-          </a:xfrm>
-          <a:prstGeom prst="rect">
-            <a:avLst/>
-          </a:prstGeom>
-          <a:noFill/>
-        </p:spPr>
-        <p:txBody>
-          <a:bodyPr wrap="square">
-            <a:spAutoFit/>
-          </a:bodyPr>
-          <a:lstStyle/>
-          <a:p>
-            <a:pPr>
-              <a:spcBef>
-                <a:spcPts val="1200"/>
-              </a:spcBef>
-              <a:defRPr sz="1800">
-                <a:solidFill>
-                  <a:srgbClr val="333333"/>
-                </a:solidFill>
-              </a:defRPr>
-            </a:pPr>
-            <a:r>
-              <a:rPr sz="1400" dirty="0"/>
-              <a:t>1️⃣ REFACTOR EARLY WITH AI ASSISTANCE</a:t>
-            </a:r>
-          </a:p>
-          <a:p>
-            <a:pPr>
-              <a:spcBef>
-                <a:spcPts val="1200"/>
-              </a:spcBef>
-              <a:defRPr sz="1800">
-                <a:solidFill>
-                  <a:srgbClr val="333333"/>
-                </a:solidFill>
-              </a:defRPr>
-            </a:pPr>
-            <a:r>
-              <a:rPr sz="1400" dirty="0"/>
-              <a:t>   Don't wait for debt to compound | AI makes refactoring economically viable</a:t>
-            </a:r>
-          </a:p>
-          <a:p>
-            <a:pPr>
-              <a:spcBef>
-                <a:spcPts val="1200"/>
-              </a:spcBef>
-              <a:defRPr sz="1800">
-                <a:solidFill>
-                  <a:srgbClr val="333333"/>
-                </a:solidFill>
-              </a:defRPr>
-            </a:pPr>
-            <a:r>
-              <a:rPr sz="1400" dirty="0"/>
-              <a:t>2️⃣ INTERFACES UNLOCK TESTABILITY</a:t>
-            </a:r>
-          </a:p>
-          <a:p>
-            <a:pPr>
-              <a:spcBef>
-                <a:spcPts val="1200"/>
-              </a:spcBef>
-              <a:defRPr sz="1800">
-                <a:solidFill>
-                  <a:srgbClr val="333333"/>
-                </a:solidFill>
-              </a:defRPr>
-            </a:pPr>
-            <a:r>
-              <a:rPr sz="1400" dirty="0"/>
-              <a:t>   Repository pattern + dependency injection = mockable code</a:t>
-            </a:r>
-          </a:p>
-          <a:p>
-            <a:pPr>
-              <a:spcBef>
-                <a:spcPts val="1200"/>
-              </a:spcBef>
-              <a:defRPr sz="1800">
-                <a:solidFill>
-                  <a:srgbClr val="333333"/>
-                </a:solidFill>
-              </a:defRPr>
-            </a:pPr>
-            <a:r>
-              <a:rPr sz="1400" dirty="0"/>
-              <a:t>   Isolation testing is fast testing | Testable architecture enables rapid development</a:t>
-            </a:r>
-          </a:p>
-          <a:p>
-            <a:pPr>
-              <a:spcBef>
-                <a:spcPts val="1200"/>
-              </a:spcBef>
-              <a:defRPr sz="1800">
-                <a:solidFill>
-                  <a:srgbClr val="333333"/>
-                </a:solidFill>
-              </a:defRPr>
-            </a:pPr>
-            <a:r>
-              <a:rPr sz="1400" dirty="0"/>
-              <a:t>3️⃣ FACTORIES MAKE TESTS MAINTAINABLE</a:t>
-            </a:r>
-          </a:p>
-          <a:p>
-            <a:pPr>
-              <a:spcBef>
-                <a:spcPts val="1200"/>
-              </a:spcBef>
-              <a:defRPr sz="1800">
-                <a:solidFill>
-                  <a:srgbClr val="333333"/>
-                </a:solidFill>
-              </a:defRPr>
-            </a:pPr>
-            <a:r>
-              <a:rPr sz="1400" dirty="0"/>
-              <a:t>   Test code IS documentation | Builder pattern eliminates duplication</a:t>
-            </a:r>
-          </a:p>
-          <a:p>
-            <a:pPr>
-              <a:spcBef>
-                <a:spcPts val="1200"/>
-              </a:spcBef>
-              <a:defRPr sz="1800">
-                <a:solidFill>
-                  <a:srgbClr val="333333"/>
-                </a:solidFill>
-              </a:defRPr>
-            </a:pPr>
-            <a:r>
-              <a:rPr sz="1400" dirty="0"/>
-              <a:t>   80% less test setup = more time testing</a:t>
-            </a:r>
-          </a:p>
-          <a:p>
-            <a:pPr>
-              <a:spcBef>
-                <a:spcPts val="1200"/>
-              </a:spcBef>
-              <a:defRPr sz="1800">
-                <a:solidFill>
-                  <a:srgbClr val="333333"/>
-                </a:solidFill>
-              </a:defRPr>
-            </a:pPr>
-            <a:r>
-              <a:rPr sz="1400" dirty="0"/>
-              <a:t>4️⃣ EVOLUTION &gt; REVOLUTION</a:t>
-            </a:r>
-          </a:p>
-          <a:p>
-            <a:pPr>
-              <a:spcBef>
-                <a:spcPts val="1200"/>
-              </a:spcBef>
-              <a:defRPr sz="1800">
-                <a:solidFill>
-                  <a:srgbClr val="333333"/>
-                </a:solidFill>
-              </a:defRPr>
-            </a:pPr>
-            <a:r>
-              <a:rPr sz="1400" dirty="0"/>
-              <a:t>   Continuous improvement with AI | Maintain velocity while fixing debt</a:t>
-            </a:r>
-          </a:p>
-          <a:p>
-            <a:pPr>
-              <a:spcBef>
-                <a:spcPts val="1200"/>
-              </a:spcBef>
-              <a:defRPr sz="1800">
-                <a:solidFill>
-                  <a:srgbClr val="333333"/>
-                </a:solidFill>
-              </a:defRPr>
-            </a:pPr>
-            <a:r>
-              <a:rPr sz="1400" dirty="0"/>
-              <a:t>   Quality and speed are NOT opposites</a:t>
-            </a:r>
-          </a:p>
-        </p:txBody>
-      </p:sp>
-    </p:spTree>
-  </p:cSld>
-  <p:clrMapOvr>
-    <a:masterClrMapping/>
-  </p:clrMapOvr>
-</p:sld>
-</file>
-
-<file path=ppt/slides/slide11.xml><?xml version="1.0" encoding="utf-8"?>
-<p:sld xmlns:a="http://schemas.openxmlformats.org/drawingml/2006/main" xmlns:r="http://schemas.openxmlformats.org/officeDocument/2006/relationships" xmlns:p="http://schemas.openxmlformats.org/presentationml/2006/main">
-  <p:cSld>
-    <p:spTree>
-      <p:nvGrpSpPr>
-        <p:cNvPr id="1" name=""/>
-        <p:cNvGrpSpPr/>
-        <p:nvPr/>
-      </p:nvGrpSpPr>
-      <p:grpSpPr>
-        <a:xfrm>
-          <a:off x="0" y="0"/>
-          <a:ext cx="0" cy="0"/>
-          <a:chOff x="0" y="0"/>
-          <a:chExt cx="0" cy="0"/>
-        </a:xfrm>
-      </p:grpSpPr>
-      <p:sp>
-        <p:nvSpPr>
-          <p:cNvPr id="2" name="TextBox 1"/>
-          <p:cNvSpPr txBox="1"/>
-          <p:nvPr/>
-        </p:nvSpPr>
-        <p:spPr>
-          <a:xfrm>
-            <a:off x="457200" y="457200"/>
             <a:ext cx="8229600" cy="731520"/>
           </a:xfrm>
           <a:prstGeom prst="rect">
@@ -13453,7 +13053,7 @@
 </p:sld>
 </file>
 
-<file path=ppt/slides/slide12.xml><?xml version="1.0" encoding="utf-8"?>
+<file path=ppt/slides/slide11.xml><?xml version="1.0" encoding="utf-8"?>
 <p:sld xmlns:a="http://schemas.openxmlformats.org/drawingml/2006/main" xmlns:r="http://schemas.openxmlformats.org/officeDocument/2006/relationships" xmlns:p="http://schemas.openxmlformats.org/presentationml/2006/main">
   <p:cSld>
     <p:bg>
@@ -15171,7 +14771,7 @@
           <p:nvPr>
             <p:extLst>
               <p:ext uri="{D42A27DB-BD31-4B8C-83A1-F6EECF244321}">
-                <p14:modId xmlns:p14="http://schemas.microsoft.com/office/powerpoint/2010/main" val="571938012"/>
+                <p14:modId xmlns:p14="http://schemas.microsoft.com/office/powerpoint/2010/main" val="2958306453"/>
               </p:ext>
             </p:extLst>
           </p:nvPr>
@@ -15572,7 +15172,7 @@
               </a:defRPr>
             </a:pPr>
             <a:r>
-              <a:t>How GitHub Copilot Helps in Session 2</a:t>
+              <a:t>Session 2 Demo Topics</a:t>
             </a:r>
           </a:p>
         </p:txBody>
@@ -15585,8 +15185,8 @@
         </p:nvSpPr>
         <p:spPr>
           <a:xfrm>
-            <a:off x="457200" y="934278"/>
-            <a:ext cx="6967330" cy="5581015"/>
+            <a:off x="685800" y="934279"/>
+            <a:ext cx="7772400" cy="5539978"/>
           </a:xfrm>
           <a:prstGeom prst="rect">
             <a:avLst/>
@@ -15599,40 +15199,51 @@
           </a:bodyPr>
           <a:lstStyle/>
           <a:p>
+            <a:endParaRPr dirty="0"/>
+          </a:p>
+          <a:p>
             <a:pPr>
               <a:spcBef>
-                <a:spcPts val="1000"/>
+                <a:spcPts val="1200"/>
               </a:spcBef>
-              <a:defRPr sz="1600">
+              <a:defRPr sz="1800">
                 <a:solidFill>
                   <a:srgbClr val="333333"/>
                 </a:solidFill>
               </a:defRPr>
             </a:pPr>
-            <a:endParaRPr dirty="0"/>
+            <a:r>
+              <a:rPr dirty="0"/>
+              <a:t>1: Repository Refactoring Agent </a:t>
+            </a:r>
+            <a:endParaRPr lang="en-US" dirty="0"/>
           </a:p>
           <a:p>
             <a:pPr>
               <a:spcBef>
-                <a:spcPts val="1000"/>
+                <a:spcPts val="1200"/>
               </a:spcBef>
-              <a:defRPr sz="1600">
+              <a:defRPr sz="1800">
                 <a:solidFill>
                   <a:srgbClr val="333333"/>
                 </a:solidFill>
               </a:defRPr>
             </a:pPr>
             <a:r>
+              <a:rPr lang="en-US" dirty="0"/>
+              <a:t>   </a:t>
+            </a:r>
+            <a:r>
               <a:rPr dirty="0"/>
-              <a:t>1️⃣ Copilot Coding Agent</a:t>
+              <a:t>• Extract repository pattern from messy handlers</a:t>
             </a:r>
           </a:p>
           <a:p>
             <a:pPr>
               <a:spcBef>
-                <a:spcPts val="1000"/>
+                <a:spcPts val="1200"/>
               </a:spcBef>
-              <a:defRPr sz="1600">
+              <a:defRPr sz="1800">
                 <a:solidFill>
                   <a:srgbClr val="333333"/>
                 </a:solidFill>
@@ -15640,15 +15251,15 @@
             </a:pPr>
             <a:r>
               <a:rPr dirty="0"/>
-              <a:t>• Multi-file refactoring</a:t>
+              <a:t>   • Remove global state and inject dependencies</a:t>
             </a:r>
           </a:p>
           <a:p>
             <a:pPr>
               <a:spcBef>
-                <a:spcPts val="1000"/>
+                <a:spcPts val="1200"/>
               </a:spcBef>
-              <a:defRPr sz="1600">
+              <a:defRPr sz="1800">
                 <a:solidFill>
                   <a:srgbClr val="333333"/>
                 </a:solidFill>
@@ -15656,15 +15267,15 @@
             </a:pPr>
             <a:r>
               <a:rPr dirty="0"/>
-              <a:t>• Architectural transformation</a:t>
+              <a:t>   • Surgical multi-file transformation</a:t>
             </a:r>
           </a:p>
           <a:p>
             <a:pPr>
               <a:spcBef>
-                <a:spcPts val="1000"/>
+                <a:spcPts val="1200"/>
               </a:spcBef>
-              <a:defRPr sz="1600">
+              <a:defRPr sz="1800">
                 <a:solidFill>
                   <a:srgbClr val="333333"/>
                 </a:solidFill>
@@ -15672,31 +15283,44 @@
             </a:pPr>
             <a:r>
               <a:rPr dirty="0"/>
-              <a:t>• Coordinated changes across 5+ files</a:t>
-            </a:r>
+              <a:t>2: Mock + Factory Generation Agent </a:t>
+            </a:r>
+            <a:endParaRPr lang="en-US" dirty="0"/>
           </a:p>
           <a:p>
             <a:pPr>
               <a:spcBef>
-                <a:spcPts val="1000"/>
+                <a:spcPts val="1200"/>
               </a:spcBef>
-              <a:defRPr sz="1600">
+              <a:defRPr sz="1800">
                 <a:solidFill>
                   <a:srgbClr val="333333"/>
                 </a:solidFill>
               </a:defRPr>
             </a:pPr>
             <a:r>
+              <a:rPr lang="en-US" dirty="0"/>
+              <a:t>   </a:t>
+            </a:r>
+            <a:r>
               <a:rPr dirty="0"/>
-              <a:t>• Creates PRs automatically</a:t>
+              <a:t>• Auto-generate </a:t>
+            </a:r>
+            <a:r>
+              <a:rPr dirty="0" err="1"/>
+              <a:t>gomock</a:t>
+            </a:r>
+            <a:r>
+              <a:rPr dirty="0"/>
+              <a:t> mocks for repositories</a:t>
             </a:r>
           </a:p>
           <a:p>
             <a:pPr>
               <a:spcBef>
-                <a:spcPts val="1000"/>
+                <a:spcPts val="1200"/>
               </a:spcBef>
-              <a:defRPr sz="1600">
+              <a:defRPr sz="1800">
                 <a:solidFill>
                   <a:srgbClr val="333333"/>
                 </a:solidFill>
@@ -15704,15 +15328,15 @@
             </a:pPr>
             <a:r>
               <a:rPr dirty="0"/>
-              <a:t>2️⃣ Local Agent</a:t>
+              <a:t>   • Create test data factories with builder pattern</a:t>
             </a:r>
           </a:p>
           <a:p>
             <a:pPr>
               <a:spcBef>
-                <a:spcPts val="1000"/>
+                <a:spcPts val="1200"/>
               </a:spcBef>
-              <a:defRPr sz="1600">
+              <a:defRPr sz="1800">
                 <a:solidFill>
                   <a:srgbClr val="333333"/>
                 </a:solidFill>
@@ -15720,15 +15344,15 @@
             </a:pPr>
             <a:r>
               <a:rPr dirty="0"/>
-              <a:t>• Interactive code generation</a:t>
+              <a:t>   • 500+ lines of test infrastructure in minutes</a:t>
             </a:r>
           </a:p>
           <a:p>
             <a:pPr>
               <a:spcBef>
-                <a:spcPts val="1000"/>
+                <a:spcPts val="1200"/>
               </a:spcBef>
-              <a:defRPr sz="1600">
+              <a:defRPr sz="1800">
                 <a:solidFill>
                   <a:srgbClr val="333333"/>
                 </a:solidFill>
@@ -15736,31 +15360,36 @@
             </a:pPr>
             <a:r>
               <a:rPr dirty="0"/>
-              <a:t>• Test infrastructure creation</a:t>
-            </a:r>
+              <a:t>3: Integration Test Expansion Agent </a:t>
+            </a:r>
+            <a:endParaRPr lang="en-US" dirty="0"/>
           </a:p>
           <a:p>
             <a:pPr>
               <a:spcBef>
-                <a:spcPts val="1000"/>
+                <a:spcPts val="1200"/>
               </a:spcBef>
-              <a:defRPr sz="1600">
+              <a:defRPr sz="1800">
                 <a:solidFill>
                   <a:srgbClr val="333333"/>
                 </a:solidFill>
               </a:defRPr>
             </a:pPr>
             <a:r>
+              <a:rPr lang="en-US" dirty="0"/>
+              <a:t>   </a:t>
+            </a:r>
+            <a:r>
               <a:rPr dirty="0"/>
-              <a:t>• Iterative refinement</a:t>
+              <a:t>• Comprehensive CRUD workflow tests</a:t>
             </a:r>
           </a:p>
           <a:p>
             <a:pPr>
               <a:spcBef>
-                <a:spcPts val="1000"/>
+                <a:spcPts val="1200"/>
               </a:spcBef>
-              <a:defRPr sz="1600">
+              <a:defRPr sz="1800">
                 <a:solidFill>
                   <a:srgbClr val="333333"/>
                 </a:solidFill>
@@ -15768,15 +15397,15 @@
             </a:pPr>
             <a:r>
               <a:rPr dirty="0"/>
-              <a:t>• Real-time feedback</a:t>
+              <a:t>   • Concurrent testing for thread safety</a:t>
             </a:r>
           </a:p>
           <a:p>
             <a:pPr>
               <a:spcBef>
-                <a:spcPts val="1000"/>
+                <a:spcPts val="1200"/>
               </a:spcBef>
-              <a:defRPr sz="1600">
+              <a:defRPr sz="1800">
                 <a:solidFill>
                   <a:srgbClr val="333333"/>
                 </a:solidFill>
@@ -15784,55 +15413,7 @@
             </a:pPr>
             <a:r>
               <a:rPr dirty="0"/>
-              <a:t>3️⃣ Background Agent</a:t>
-            </a:r>
-          </a:p>
-          <a:p>
-            <a:pPr>
-              <a:spcBef>
-                <a:spcPts val="1000"/>
-              </a:spcBef>
-              <a:defRPr sz="1600">
-                <a:solidFill>
-                  <a:srgbClr val="333333"/>
-                </a:solidFill>
-              </a:defRPr>
-            </a:pPr>
-            <a:r>
-              <a:rPr dirty="0"/>
-              <a:t>• Parallel documentation</a:t>
-            </a:r>
-          </a:p>
-          <a:p>
-            <a:pPr>
-              <a:spcBef>
-                <a:spcPts val="1000"/>
-              </a:spcBef>
-              <a:defRPr sz="1600">
-                <a:solidFill>
-                  <a:srgbClr val="333333"/>
-                </a:solidFill>
-              </a:defRPr>
-            </a:pPr>
-            <a:r>
-              <a:rPr dirty="0"/>
-              <a:t>• Pattern generation</a:t>
-            </a:r>
-          </a:p>
-          <a:p>
-            <a:pPr>
-              <a:spcBef>
-                <a:spcPts val="1000"/>
-              </a:spcBef>
-              <a:defRPr sz="1600">
-                <a:solidFill>
-                  <a:srgbClr val="333333"/>
-                </a:solidFill>
-              </a:defRPr>
-            </a:pPr>
-            <a:r>
-              <a:rPr dirty="0"/>
-              <a:t>• Non-blocking tasks</a:t>
+              <a:t>   </a:t>
             </a:r>
           </a:p>
         </p:txBody>
@@ -15846,6 +15427,1472 @@
 </file>
 
 <file path=ppt/slides/slide5.xml><?xml version="1.0" encoding="utf-8"?>
+<p:sld xmlns:a="http://schemas.openxmlformats.org/drawingml/2006/main" xmlns:r="http://schemas.openxmlformats.org/officeDocument/2006/relationships" xmlns:p="http://schemas.openxmlformats.org/presentationml/2006/main">
+  <p:cSld>
+    <p:spTree>
+      <p:nvGrpSpPr>
+        <p:cNvPr id="1" name=""/>
+        <p:cNvGrpSpPr/>
+        <p:nvPr/>
+      </p:nvGrpSpPr>
+      <p:grpSpPr>
+        <a:xfrm>
+          <a:off x="0" y="0"/>
+          <a:ext cx="0" cy="0"/>
+          <a:chOff x="0" y="0"/>
+          <a:chExt cx="0" cy="0"/>
+        </a:xfrm>
+      </p:grpSpPr>
+      <p:sp>
+        <p:nvSpPr>
+          <p:cNvPr id="2" name="TextBox 1"/>
+          <p:cNvSpPr txBox="1"/>
+          <p:nvPr/>
+        </p:nvSpPr>
+        <p:spPr>
+          <a:xfrm>
+            <a:off x="457200" y="457200"/>
+            <a:ext cx="6283900" cy="584775"/>
+          </a:xfrm>
+          <a:prstGeom prst="rect">
+            <a:avLst/>
+          </a:prstGeom>
+          <a:noFill/>
+        </p:spPr>
+        <p:txBody>
+          <a:bodyPr wrap="none">
+            <a:spAutoFit/>
+          </a:bodyPr>
+          <a:lstStyle/>
+          <a:p>
+            <a:pPr>
+              <a:defRPr sz="3200" b="1">
+                <a:solidFill>
+                  <a:srgbClr val="1F4E79"/>
+                </a:solidFill>
+              </a:defRPr>
+            </a:pPr>
+            <a:r>
+              <a:rPr dirty="0"/>
+              <a:t>1: Repository Refactoring Agent</a:t>
+            </a:r>
+          </a:p>
+        </p:txBody>
+      </p:sp>
+      <p:sp>
+        <p:nvSpPr>
+          <p:cNvPr id="3" name="TextBox 2"/>
+          <p:cNvSpPr txBox="1"/>
+          <p:nvPr/>
+        </p:nvSpPr>
+        <p:spPr>
+          <a:xfrm>
+            <a:off x="457200" y="914400"/>
+            <a:ext cx="4114800" cy="5237331"/>
+          </a:xfrm>
+          <a:prstGeom prst="rect">
+            <a:avLst/>
+          </a:prstGeom>
+          <a:noFill/>
+        </p:spPr>
+        <p:txBody>
+          <a:bodyPr wrap="square">
+            <a:spAutoFit/>
+          </a:bodyPr>
+          <a:lstStyle/>
+          <a:p>
+            <a:endParaRPr dirty="0"/>
+          </a:p>
+          <a:p>
+            <a:pPr>
+              <a:spcBef>
+                <a:spcPts val="1000"/>
+              </a:spcBef>
+              <a:defRPr sz="1600">
+                <a:solidFill>
+                  <a:srgbClr val="333333"/>
+                </a:solidFill>
+              </a:defRPr>
+            </a:pPr>
+            <a:r>
+              <a:rPr dirty="0"/>
+              <a:t>❌ BEFORE: Technical Debt</a:t>
+            </a:r>
+          </a:p>
+          <a:p>
+            <a:pPr>
+              <a:spcBef>
+                <a:spcPts val="1000"/>
+              </a:spcBef>
+              <a:defRPr sz="1600">
+                <a:solidFill>
+                  <a:srgbClr val="333333"/>
+                </a:solidFill>
+              </a:defRPr>
+            </a:pPr>
+            <a:endParaRPr dirty="0"/>
+          </a:p>
+          <a:p>
+            <a:pPr>
+              <a:spcBef>
+                <a:spcPts val="1000"/>
+              </a:spcBef>
+              <a:defRPr sz="1600">
+                <a:solidFill>
+                  <a:srgbClr val="333333"/>
+                </a:solidFill>
+              </a:defRPr>
+            </a:pPr>
+            <a:r>
+              <a:rPr dirty="0"/>
+              <a:t>• Global variables polluting scope:</a:t>
+            </a:r>
+          </a:p>
+          <a:p>
+            <a:pPr>
+              <a:spcBef>
+                <a:spcPts val="1000"/>
+              </a:spcBef>
+              <a:defRPr sz="1600">
+                <a:solidFill>
+                  <a:srgbClr val="333333"/>
+                </a:solidFill>
+              </a:defRPr>
+            </a:pPr>
+            <a:r>
+              <a:rPr dirty="0"/>
+              <a:t>  var students = make(map[int]...)</a:t>
+            </a:r>
+          </a:p>
+          <a:p>
+            <a:pPr>
+              <a:spcBef>
+                <a:spcPts val="1000"/>
+              </a:spcBef>
+              <a:defRPr sz="1600">
+                <a:solidFill>
+                  <a:srgbClr val="333333"/>
+                </a:solidFill>
+              </a:defRPr>
+            </a:pPr>
+            <a:r>
+              <a:rPr dirty="0"/>
+              <a:t>  var </a:t>
+            </a:r>
+            <a:r>
+              <a:rPr dirty="0" err="1"/>
+              <a:t>studentsMu</a:t>
+            </a:r>
+            <a:r>
+              <a:rPr dirty="0"/>
+              <a:t> </a:t>
+            </a:r>
+            <a:r>
+              <a:rPr dirty="0" err="1"/>
+              <a:t>sync.RWMutex</a:t>
+            </a:r>
+            <a:endParaRPr dirty="0"/>
+          </a:p>
+          <a:p>
+            <a:pPr>
+              <a:spcBef>
+                <a:spcPts val="1000"/>
+              </a:spcBef>
+              <a:defRPr sz="1600">
+                <a:solidFill>
+                  <a:srgbClr val="333333"/>
+                </a:solidFill>
+              </a:defRPr>
+            </a:pPr>
+            <a:r>
+              <a:rPr dirty="0"/>
+              <a:t>• Mixed responsibilities:</a:t>
+            </a:r>
+          </a:p>
+          <a:p>
+            <a:pPr>
+              <a:spcBef>
+                <a:spcPts val="1000"/>
+              </a:spcBef>
+              <a:defRPr sz="1600">
+                <a:solidFill>
+                  <a:srgbClr val="333333"/>
+                </a:solidFill>
+              </a:defRPr>
+            </a:pPr>
+            <a:r>
+              <a:rPr dirty="0"/>
+              <a:t>  HTTP + Database logic together</a:t>
+            </a:r>
+          </a:p>
+          <a:p>
+            <a:pPr>
+              <a:spcBef>
+                <a:spcPts val="1000"/>
+              </a:spcBef>
+              <a:defRPr sz="1600">
+                <a:solidFill>
+                  <a:srgbClr val="333333"/>
+                </a:solidFill>
+              </a:defRPr>
+            </a:pPr>
+            <a:r>
+              <a:rPr dirty="0"/>
+              <a:t>• Tight coupling:</a:t>
+            </a:r>
+          </a:p>
+          <a:p>
+            <a:pPr>
+              <a:spcBef>
+                <a:spcPts val="1000"/>
+              </a:spcBef>
+              <a:defRPr sz="1600">
+                <a:solidFill>
+                  <a:srgbClr val="333333"/>
+                </a:solidFill>
+              </a:defRPr>
+            </a:pPr>
+            <a:r>
+              <a:rPr dirty="0"/>
+              <a:t>  Can't swap storage</a:t>
+            </a:r>
+          </a:p>
+          <a:p>
+            <a:pPr>
+              <a:spcBef>
+                <a:spcPts val="1000"/>
+              </a:spcBef>
+              <a:defRPr sz="1600">
+                <a:solidFill>
+                  <a:srgbClr val="333333"/>
+                </a:solidFill>
+              </a:defRPr>
+            </a:pPr>
+            <a:r>
+              <a:rPr dirty="0"/>
+              <a:t>  Can't test in isolation</a:t>
+            </a:r>
+          </a:p>
+          <a:p>
+            <a:pPr>
+              <a:spcBef>
+                <a:spcPts val="1000"/>
+              </a:spcBef>
+              <a:defRPr sz="1600">
+                <a:solidFill>
+                  <a:srgbClr val="333333"/>
+                </a:solidFill>
+              </a:defRPr>
+            </a:pPr>
+            <a:r>
+              <a:rPr dirty="0"/>
+              <a:t>• Impossible to mock</a:t>
+            </a:r>
+          </a:p>
+          <a:p>
+            <a:pPr>
+              <a:spcBef>
+                <a:spcPts val="1000"/>
+              </a:spcBef>
+              <a:defRPr sz="1600">
+                <a:solidFill>
+                  <a:srgbClr val="333333"/>
+                </a:solidFill>
+              </a:defRPr>
+            </a:pPr>
+            <a:r>
+              <a:rPr dirty="0"/>
+              <a:t>• Race conditions possible</a:t>
+            </a:r>
+          </a:p>
+          <a:p>
+            <a:pPr>
+              <a:spcBef>
+                <a:spcPts val="1000"/>
+              </a:spcBef>
+              <a:defRPr sz="1600">
+                <a:solidFill>
+                  <a:srgbClr val="333333"/>
+                </a:solidFill>
+              </a:defRPr>
+            </a:pPr>
+            <a:endParaRPr dirty="0"/>
+          </a:p>
+        </p:txBody>
+      </p:sp>
+      <p:sp>
+        <p:nvSpPr>
+          <p:cNvPr id="4" name="TextBox 3"/>
+          <p:cNvSpPr txBox="1"/>
+          <p:nvPr/>
+        </p:nvSpPr>
+        <p:spPr>
+          <a:xfrm>
+            <a:off x="3929933" y="894522"/>
+            <a:ext cx="4114800" cy="5237331"/>
+          </a:xfrm>
+          <a:prstGeom prst="rect">
+            <a:avLst/>
+          </a:prstGeom>
+          <a:noFill/>
+        </p:spPr>
+        <p:txBody>
+          <a:bodyPr wrap="square">
+            <a:spAutoFit/>
+          </a:bodyPr>
+          <a:lstStyle/>
+          <a:p>
+            <a:endParaRPr dirty="0"/>
+          </a:p>
+          <a:p>
+            <a:pPr>
+              <a:spcBef>
+                <a:spcPts val="1000"/>
+              </a:spcBef>
+              <a:defRPr sz="1600">
+                <a:solidFill>
+                  <a:srgbClr val="333333"/>
+                </a:solidFill>
+              </a:defRPr>
+            </a:pPr>
+            <a:r>
+              <a:rPr dirty="0"/>
+              <a:t>✅ AFTER: Clean Architecture</a:t>
+            </a:r>
+          </a:p>
+          <a:p>
+            <a:pPr>
+              <a:spcBef>
+                <a:spcPts val="1000"/>
+              </a:spcBef>
+              <a:defRPr sz="1600">
+                <a:solidFill>
+                  <a:srgbClr val="333333"/>
+                </a:solidFill>
+              </a:defRPr>
+            </a:pPr>
+            <a:endParaRPr dirty="0"/>
+          </a:p>
+          <a:p>
+            <a:pPr>
+              <a:spcBef>
+                <a:spcPts val="1000"/>
+              </a:spcBef>
+              <a:defRPr sz="1600">
+                <a:solidFill>
+                  <a:srgbClr val="333333"/>
+                </a:solidFill>
+              </a:defRPr>
+            </a:pPr>
+            <a:r>
+              <a:rPr dirty="0"/>
+              <a:t>• Repository interfaces:</a:t>
+            </a:r>
+          </a:p>
+          <a:p>
+            <a:pPr>
+              <a:spcBef>
+                <a:spcPts val="1000"/>
+              </a:spcBef>
+              <a:defRPr sz="1600">
+                <a:solidFill>
+                  <a:srgbClr val="333333"/>
+                </a:solidFill>
+              </a:defRPr>
+            </a:pPr>
+            <a:r>
+              <a:rPr dirty="0"/>
+              <a:t>  </a:t>
+            </a:r>
+            <a:r>
+              <a:rPr dirty="0" err="1"/>
+              <a:t>StudentRepository</a:t>
+            </a:r>
+            <a:r>
+              <a:rPr dirty="0"/>
+              <a:t> interface</a:t>
+            </a:r>
+          </a:p>
+          <a:p>
+            <a:pPr>
+              <a:spcBef>
+                <a:spcPts val="1000"/>
+              </a:spcBef>
+              <a:defRPr sz="1600">
+                <a:solidFill>
+                  <a:srgbClr val="333333"/>
+                </a:solidFill>
+              </a:defRPr>
+            </a:pPr>
+            <a:r>
+              <a:rPr dirty="0"/>
+              <a:t>  with Create, Get, Update, Delete</a:t>
+            </a:r>
+          </a:p>
+          <a:p>
+            <a:pPr>
+              <a:spcBef>
+                <a:spcPts val="1000"/>
+              </a:spcBef>
+              <a:defRPr sz="1600">
+                <a:solidFill>
+                  <a:srgbClr val="333333"/>
+                </a:solidFill>
+              </a:defRPr>
+            </a:pPr>
+            <a:r>
+              <a:rPr dirty="0"/>
+              <a:t>• Dependency injection:</a:t>
+            </a:r>
+          </a:p>
+          <a:p>
+            <a:pPr>
+              <a:spcBef>
+                <a:spcPts val="1000"/>
+              </a:spcBef>
+              <a:defRPr sz="1600">
+                <a:solidFill>
+                  <a:srgbClr val="333333"/>
+                </a:solidFill>
+              </a:defRPr>
+            </a:pPr>
+            <a:r>
+              <a:rPr dirty="0"/>
+              <a:t>  type </a:t>
+            </a:r>
+            <a:r>
+              <a:rPr dirty="0" err="1"/>
+              <a:t>StudentHandler</a:t>
+            </a:r>
+            <a:r>
+              <a:rPr dirty="0"/>
+              <a:t> struct {</a:t>
+            </a:r>
+          </a:p>
+          <a:p>
+            <a:pPr>
+              <a:spcBef>
+                <a:spcPts val="1000"/>
+              </a:spcBef>
+              <a:defRPr sz="1600">
+                <a:solidFill>
+                  <a:srgbClr val="333333"/>
+                </a:solidFill>
+              </a:defRPr>
+            </a:pPr>
+            <a:r>
+              <a:rPr dirty="0"/>
+              <a:t>    Repo </a:t>
+            </a:r>
+            <a:r>
+              <a:rPr dirty="0" err="1"/>
+              <a:t>repository.StudentRepository</a:t>
+            </a:r>
+            <a:endParaRPr dirty="0"/>
+          </a:p>
+          <a:p>
+            <a:pPr>
+              <a:spcBef>
+                <a:spcPts val="1000"/>
+              </a:spcBef>
+              <a:defRPr sz="1600">
+                <a:solidFill>
+                  <a:srgbClr val="333333"/>
+                </a:solidFill>
+              </a:defRPr>
+            </a:pPr>
+            <a:r>
+              <a:rPr dirty="0"/>
+              <a:t>  }</a:t>
+            </a:r>
+          </a:p>
+          <a:p>
+            <a:pPr>
+              <a:spcBef>
+                <a:spcPts val="1000"/>
+              </a:spcBef>
+              <a:defRPr sz="1600">
+                <a:solidFill>
+                  <a:srgbClr val="333333"/>
+                </a:solidFill>
+              </a:defRPr>
+            </a:pPr>
+            <a:r>
+              <a:rPr dirty="0"/>
+              <a:t>• Encapsulated state:</a:t>
+            </a:r>
+          </a:p>
+          <a:p>
+            <a:pPr>
+              <a:spcBef>
+                <a:spcPts val="1000"/>
+              </a:spcBef>
+              <a:defRPr sz="1600">
+                <a:solidFill>
+                  <a:srgbClr val="333333"/>
+                </a:solidFill>
+              </a:defRPr>
+            </a:pPr>
+            <a:r>
+              <a:rPr dirty="0"/>
+              <a:t>  All storage inside repository</a:t>
+            </a:r>
+          </a:p>
+          <a:p>
+            <a:pPr>
+              <a:spcBef>
+                <a:spcPts val="1000"/>
+              </a:spcBef>
+              <a:defRPr sz="1600">
+                <a:solidFill>
+                  <a:srgbClr val="333333"/>
+                </a:solidFill>
+              </a:defRPr>
+            </a:pPr>
+            <a:r>
+              <a:rPr dirty="0"/>
+              <a:t>• Thread-safe implementations</a:t>
+            </a:r>
+          </a:p>
+          <a:p>
+            <a:pPr>
+              <a:spcBef>
+                <a:spcPts val="1000"/>
+              </a:spcBef>
+              <a:defRPr sz="1600">
+                <a:solidFill>
+                  <a:srgbClr val="333333"/>
+                </a:solidFill>
+              </a:defRPr>
+            </a:pPr>
+            <a:endParaRPr dirty="0"/>
+          </a:p>
+        </p:txBody>
+      </p:sp>
+    </p:spTree>
+  </p:cSld>
+  <p:clrMapOvr>
+    <a:masterClrMapping/>
+  </p:clrMapOvr>
+</p:sld>
+</file>
+
+<file path=ppt/slides/slide6.xml><?xml version="1.0" encoding="utf-8"?>
+<p:sld xmlns:a="http://schemas.openxmlformats.org/drawingml/2006/main" xmlns:r="http://schemas.openxmlformats.org/officeDocument/2006/relationships" xmlns:p="http://schemas.openxmlformats.org/presentationml/2006/main">
+  <p:cSld>
+    <p:spTree>
+      <p:nvGrpSpPr>
+        <p:cNvPr id="1" name=""/>
+        <p:cNvGrpSpPr/>
+        <p:nvPr/>
+      </p:nvGrpSpPr>
+      <p:grpSpPr>
+        <a:xfrm>
+          <a:off x="0" y="0"/>
+          <a:ext cx="0" cy="0"/>
+          <a:chOff x="0" y="0"/>
+          <a:chExt cx="0" cy="0"/>
+        </a:xfrm>
+      </p:grpSpPr>
+      <p:sp>
+        <p:nvSpPr>
+          <p:cNvPr id="2" name="TextBox 1"/>
+          <p:cNvSpPr txBox="1"/>
+          <p:nvPr/>
+        </p:nvSpPr>
+        <p:spPr>
+          <a:xfrm>
+            <a:off x="457200" y="457200"/>
+            <a:ext cx="7112845" cy="584775"/>
+          </a:xfrm>
+          <a:prstGeom prst="rect">
+            <a:avLst/>
+          </a:prstGeom>
+          <a:noFill/>
+        </p:spPr>
+        <p:txBody>
+          <a:bodyPr wrap="none">
+            <a:spAutoFit/>
+          </a:bodyPr>
+          <a:lstStyle/>
+          <a:p>
+            <a:pPr>
+              <a:defRPr sz="3200" b="1">
+                <a:solidFill>
+                  <a:srgbClr val="1F4E79"/>
+                </a:solidFill>
+              </a:defRPr>
+            </a:pPr>
+            <a:r>
+              <a:rPr dirty="0"/>
+              <a:t>2: Mock + Factory Generation Agent</a:t>
+            </a:r>
+          </a:p>
+        </p:txBody>
+      </p:sp>
+      <p:sp>
+        <p:nvSpPr>
+          <p:cNvPr id="3" name="TextBox 2"/>
+          <p:cNvSpPr txBox="1"/>
+          <p:nvPr/>
+        </p:nvSpPr>
+        <p:spPr>
+          <a:xfrm>
+            <a:off x="457200" y="1371600"/>
+            <a:ext cx="4114800" cy="4457631"/>
+          </a:xfrm>
+          <a:prstGeom prst="rect">
+            <a:avLst/>
+          </a:prstGeom>
+          <a:noFill/>
+        </p:spPr>
+        <p:txBody>
+          <a:bodyPr wrap="square">
+            <a:spAutoFit/>
+          </a:bodyPr>
+          <a:lstStyle/>
+          <a:p>
+            <a:pPr>
+              <a:spcBef>
+                <a:spcPts val="1000"/>
+              </a:spcBef>
+              <a:defRPr sz="1600">
+                <a:solidFill>
+                  <a:srgbClr val="333333"/>
+                </a:solidFill>
+              </a:defRPr>
+            </a:pPr>
+            <a:r>
+              <a:rPr dirty="0"/>
+              <a:t>🎭 GOMOCK GENERATION:</a:t>
+            </a:r>
+          </a:p>
+          <a:p>
+            <a:pPr>
+              <a:spcBef>
+                <a:spcPts val="1000"/>
+              </a:spcBef>
+              <a:defRPr sz="1600">
+                <a:solidFill>
+                  <a:srgbClr val="333333"/>
+                </a:solidFill>
+              </a:defRPr>
+            </a:pPr>
+            <a:endParaRPr dirty="0"/>
+          </a:p>
+          <a:p>
+            <a:pPr>
+              <a:spcBef>
+                <a:spcPts val="1000"/>
+              </a:spcBef>
+              <a:defRPr sz="1600">
+                <a:solidFill>
+                  <a:srgbClr val="333333"/>
+                </a:solidFill>
+              </a:defRPr>
+            </a:pPr>
+            <a:r>
+              <a:rPr dirty="0"/>
+              <a:t>• Auto-generate from interfaces:</a:t>
+            </a:r>
+          </a:p>
+          <a:p>
+            <a:pPr>
+              <a:spcBef>
+                <a:spcPts val="1000"/>
+              </a:spcBef>
+              <a:defRPr sz="1600">
+                <a:solidFill>
+                  <a:srgbClr val="333333"/>
+                </a:solidFill>
+              </a:defRPr>
+            </a:pPr>
+            <a:r>
+              <a:rPr dirty="0"/>
+              <a:t>  //</a:t>
+            </a:r>
+            <a:r>
+              <a:rPr dirty="0" err="1"/>
+              <a:t>go:generate</a:t>
+            </a:r>
+            <a:r>
+              <a:rPr dirty="0"/>
+              <a:t> </a:t>
+            </a:r>
+            <a:r>
+              <a:rPr dirty="0" err="1"/>
+              <a:t>mockgen</a:t>
+            </a:r>
+            <a:r>
+              <a:rPr dirty="0"/>
+              <a:t>...</a:t>
+            </a:r>
+          </a:p>
+          <a:p>
+            <a:pPr>
+              <a:spcBef>
+                <a:spcPts val="1000"/>
+              </a:spcBef>
+              <a:defRPr sz="1600">
+                <a:solidFill>
+                  <a:srgbClr val="333333"/>
+                </a:solidFill>
+              </a:defRPr>
+            </a:pPr>
+            <a:r>
+              <a:rPr dirty="0"/>
+              <a:t>• </a:t>
+            </a:r>
+            <a:r>
+              <a:rPr dirty="0" err="1"/>
+              <a:t>MockStudentRepository</a:t>
+            </a:r>
+            <a:endParaRPr dirty="0"/>
+          </a:p>
+          <a:p>
+            <a:pPr>
+              <a:spcBef>
+                <a:spcPts val="1000"/>
+              </a:spcBef>
+              <a:defRPr sz="1600">
+                <a:solidFill>
+                  <a:srgbClr val="333333"/>
+                </a:solidFill>
+              </a:defRPr>
+            </a:pPr>
+            <a:r>
+              <a:rPr dirty="0"/>
+              <a:t>  with expectation setting</a:t>
+            </a:r>
+          </a:p>
+          <a:p>
+            <a:pPr>
+              <a:spcBef>
+                <a:spcPts val="1000"/>
+              </a:spcBef>
+              <a:defRPr sz="1600">
+                <a:solidFill>
+                  <a:srgbClr val="333333"/>
+                </a:solidFill>
+              </a:defRPr>
+            </a:pPr>
+            <a:r>
+              <a:rPr dirty="0"/>
+              <a:t>• </a:t>
+            </a:r>
+            <a:r>
+              <a:rPr dirty="0" err="1"/>
+              <a:t>MockGradeRepository</a:t>
+            </a:r>
+            <a:endParaRPr dirty="0"/>
+          </a:p>
+          <a:p>
+            <a:pPr>
+              <a:spcBef>
+                <a:spcPts val="1000"/>
+              </a:spcBef>
+              <a:defRPr sz="1600">
+                <a:solidFill>
+                  <a:srgbClr val="333333"/>
+                </a:solidFill>
+              </a:defRPr>
+            </a:pPr>
+            <a:r>
+              <a:rPr dirty="0"/>
+              <a:t>  with call verification</a:t>
+            </a:r>
+          </a:p>
+          <a:p>
+            <a:pPr>
+              <a:spcBef>
+                <a:spcPts val="1000"/>
+              </a:spcBef>
+              <a:defRPr sz="1600">
+                <a:solidFill>
+                  <a:srgbClr val="333333"/>
+                </a:solidFill>
+              </a:defRPr>
+            </a:pPr>
+            <a:r>
+              <a:rPr dirty="0"/>
+              <a:t>• 500+ lines generated</a:t>
+            </a:r>
+          </a:p>
+          <a:p>
+            <a:pPr>
+              <a:spcBef>
+                <a:spcPts val="1000"/>
+              </a:spcBef>
+              <a:defRPr sz="1600">
+                <a:solidFill>
+                  <a:srgbClr val="333333"/>
+                </a:solidFill>
+              </a:defRPr>
+            </a:pPr>
+            <a:r>
+              <a:rPr dirty="0"/>
+              <a:t>  in seconds</a:t>
+            </a:r>
+          </a:p>
+          <a:p>
+            <a:pPr>
+              <a:spcBef>
+                <a:spcPts val="1000"/>
+              </a:spcBef>
+              <a:defRPr sz="1600">
+                <a:solidFill>
+                  <a:srgbClr val="333333"/>
+                </a:solidFill>
+              </a:defRPr>
+            </a:pPr>
+            <a:r>
+              <a:rPr dirty="0"/>
+              <a:t>• Full EXPECT() syntax support</a:t>
+            </a:r>
+          </a:p>
+          <a:p>
+            <a:pPr>
+              <a:spcBef>
+                <a:spcPts val="1000"/>
+              </a:spcBef>
+              <a:defRPr sz="1600">
+                <a:solidFill>
+                  <a:srgbClr val="333333"/>
+                </a:solidFill>
+              </a:defRPr>
+            </a:pPr>
+            <a:endParaRPr dirty="0"/>
+          </a:p>
+        </p:txBody>
+      </p:sp>
+      <p:sp>
+        <p:nvSpPr>
+          <p:cNvPr id="4" name="TextBox 3"/>
+          <p:cNvSpPr txBox="1"/>
+          <p:nvPr/>
+        </p:nvSpPr>
+        <p:spPr>
+          <a:xfrm>
+            <a:off x="3860358" y="1371600"/>
+            <a:ext cx="4114800" cy="4832092"/>
+          </a:xfrm>
+          <a:prstGeom prst="rect">
+            <a:avLst/>
+          </a:prstGeom>
+          <a:noFill/>
+        </p:spPr>
+        <p:txBody>
+          <a:bodyPr wrap="square">
+            <a:spAutoFit/>
+          </a:bodyPr>
+          <a:lstStyle/>
+          <a:p>
+            <a:pPr>
+              <a:spcBef>
+                <a:spcPts val="1000"/>
+              </a:spcBef>
+              <a:defRPr sz="1600">
+                <a:solidFill>
+                  <a:srgbClr val="333333"/>
+                </a:solidFill>
+              </a:defRPr>
+            </a:pPr>
+            <a:r>
+              <a:rPr dirty="0"/>
+              <a:t>🏭 FACTORY PATTERN:</a:t>
+            </a:r>
+          </a:p>
+          <a:p>
+            <a:pPr>
+              <a:spcBef>
+                <a:spcPts val="1000"/>
+              </a:spcBef>
+              <a:defRPr sz="1600">
+                <a:solidFill>
+                  <a:srgbClr val="333333"/>
+                </a:solidFill>
+              </a:defRPr>
+            </a:pPr>
+            <a:endParaRPr dirty="0"/>
+          </a:p>
+          <a:p>
+            <a:pPr>
+              <a:spcBef>
+                <a:spcPts val="1000"/>
+              </a:spcBef>
+              <a:defRPr sz="1600">
+                <a:solidFill>
+                  <a:srgbClr val="333333"/>
+                </a:solidFill>
+              </a:defRPr>
+            </a:pPr>
+            <a:r>
+              <a:rPr dirty="0"/>
+              <a:t>• Builder pattern with fluent API:</a:t>
+            </a:r>
+          </a:p>
+          <a:p>
+            <a:pPr>
+              <a:spcBef>
+                <a:spcPts val="1000"/>
+              </a:spcBef>
+              <a:defRPr sz="1600">
+                <a:solidFill>
+                  <a:srgbClr val="333333"/>
+                </a:solidFill>
+              </a:defRPr>
+            </a:pPr>
+            <a:r>
+              <a:rPr dirty="0"/>
+              <a:t>  </a:t>
+            </a:r>
+            <a:r>
+              <a:rPr dirty="0" err="1"/>
+              <a:t>NewStudentBuilder</a:t>
+            </a:r>
+            <a:r>
+              <a:rPr dirty="0"/>
+              <a:t>()</a:t>
+            </a:r>
+          </a:p>
+          <a:p>
+            <a:pPr>
+              <a:spcBef>
+                <a:spcPts val="1000"/>
+              </a:spcBef>
+              <a:defRPr sz="1600">
+                <a:solidFill>
+                  <a:srgbClr val="333333"/>
+                </a:solidFill>
+              </a:defRPr>
+            </a:pPr>
+            <a:r>
+              <a:rPr dirty="0"/>
+              <a:t>  .</a:t>
+            </a:r>
+            <a:r>
+              <a:rPr dirty="0" err="1"/>
+              <a:t>WithName</a:t>
+            </a:r>
+            <a:r>
+              <a:rPr dirty="0"/>
+              <a:t>('Alice')</a:t>
+            </a:r>
+          </a:p>
+          <a:p>
+            <a:pPr>
+              <a:spcBef>
+                <a:spcPts val="1000"/>
+              </a:spcBef>
+              <a:defRPr sz="1600">
+                <a:solidFill>
+                  <a:srgbClr val="333333"/>
+                </a:solidFill>
+              </a:defRPr>
+            </a:pPr>
+            <a:r>
+              <a:rPr dirty="0"/>
+              <a:t>  .</a:t>
+            </a:r>
+            <a:r>
+              <a:rPr dirty="0" err="1"/>
+              <a:t>WithGrade</a:t>
+            </a:r>
+            <a:r>
+              <a:rPr dirty="0"/>
+              <a:t>('A')</a:t>
+            </a:r>
+          </a:p>
+          <a:p>
+            <a:pPr>
+              <a:spcBef>
+                <a:spcPts val="1000"/>
+              </a:spcBef>
+              <a:defRPr sz="1600">
+                <a:solidFill>
+                  <a:srgbClr val="333333"/>
+                </a:solidFill>
+              </a:defRPr>
+            </a:pPr>
+            <a:r>
+              <a:rPr dirty="0"/>
+              <a:t>  .Build()</a:t>
+            </a:r>
+          </a:p>
+          <a:p>
+            <a:pPr>
+              <a:spcBef>
+                <a:spcPts val="1000"/>
+              </a:spcBef>
+              <a:defRPr sz="1600">
+                <a:solidFill>
+                  <a:srgbClr val="333333"/>
+                </a:solidFill>
+              </a:defRPr>
+            </a:pPr>
+            <a:r>
+              <a:rPr dirty="0"/>
+              <a:t>• Sensible defaults included</a:t>
+            </a:r>
+          </a:p>
+          <a:p>
+            <a:pPr>
+              <a:spcBef>
+                <a:spcPts val="1000"/>
+              </a:spcBef>
+              <a:defRPr sz="1600">
+                <a:solidFill>
+                  <a:srgbClr val="333333"/>
+                </a:solidFill>
+              </a:defRPr>
+            </a:pPr>
+            <a:r>
+              <a:rPr dirty="0"/>
+              <a:t>• Preset configurations:</a:t>
+            </a:r>
+          </a:p>
+          <a:p>
+            <a:pPr>
+              <a:spcBef>
+                <a:spcPts val="1000"/>
+              </a:spcBef>
+              <a:defRPr sz="1600">
+                <a:solidFill>
+                  <a:srgbClr val="333333"/>
+                </a:solidFill>
+              </a:defRPr>
+            </a:pPr>
+            <a:r>
+              <a:rPr dirty="0"/>
+              <a:t>  </a:t>
+            </a:r>
+            <a:r>
+              <a:rPr dirty="0" err="1"/>
+              <a:t>ValidStudent</a:t>
+            </a:r>
+            <a:r>
+              <a:rPr dirty="0"/>
+              <a:t>()</a:t>
+            </a:r>
+          </a:p>
+          <a:p>
+            <a:pPr>
+              <a:spcBef>
+                <a:spcPts val="1000"/>
+              </a:spcBef>
+              <a:defRPr sz="1600">
+                <a:solidFill>
+                  <a:srgbClr val="333333"/>
+                </a:solidFill>
+              </a:defRPr>
+            </a:pPr>
+            <a:r>
+              <a:rPr dirty="0"/>
+              <a:t>  </a:t>
+            </a:r>
+            <a:r>
+              <a:rPr dirty="0" err="1"/>
+              <a:t>HighAchiever</a:t>
+            </a:r>
+            <a:r>
+              <a:rPr dirty="0"/>
+              <a:t>()</a:t>
+            </a:r>
+          </a:p>
+          <a:p>
+            <a:pPr>
+              <a:spcBef>
+                <a:spcPts val="1000"/>
+              </a:spcBef>
+              <a:defRPr sz="1600">
+                <a:solidFill>
+                  <a:srgbClr val="333333"/>
+                </a:solidFill>
+              </a:defRPr>
+            </a:pPr>
+            <a:r>
+              <a:rPr dirty="0"/>
+              <a:t>  </a:t>
+            </a:r>
+            <a:r>
+              <a:rPr dirty="0" err="1"/>
+              <a:t>FailingStudent</a:t>
+            </a:r>
+            <a:r>
+              <a:rPr dirty="0"/>
+              <a:t>()</a:t>
+            </a:r>
+          </a:p>
+          <a:p>
+            <a:pPr>
+              <a:spcBef>
+                <a:spcPts val="1000"/>
+              </a:spcBef>
+              <a:defRPr sz="1600">
+                <a:solidFill>
+                  <a:srgbClr val="333333"/>
+                </a:solidFill>
+              </a:defRPr>
+            </a:pPr>
+            <a:r>
+              <a:rPr dirty="0"/>
+              <a:t>• </a:t>
+            </a:r>
+            <a:r>
+              <a:rPr dirty="0" err="1"/>
+              <a:t>BuildN</a:t>
+            </a:r>
+            <a:r>
+              <a:rPr dirty="0"/>
+              <a:t>(n) for bulk generation</a:t>
+            </a:r>
+          </a:p>
+        </p:txBody>
+      </p:sp>
+    </p:spTree>
+  </p:cSld>
+  <p:clrMapOvr>
+    <a:masterClrMapping/>
+  </p:clrMapOvr>
+</p:sld>
+</file>
+
+<file path=ppt/slides/slide7.xml><?xml version="1.0" encoding="utf-8"?>
+<p:sld xmlns:a="http://schemas.openxmlformats.org/drawingml/2006/main" xmlns:r="http://schemas.openxmlformats.org/officeDocument/2006/relationships" xmlns:p="http://schemas.openxmlformats.org/presentationml/2006/main">
+  <p:cSld>
+    <p:spTree>
+      <p:nvGrpSpPr>
+        <p:cNvPr id="1" name=""/>
+        <p:cNvGrpSpPr/>
+        <p:nvPr/>
+      </p:nvGrpSpPr>
+      <p:grpSpPr>
+        <a:xfrm>
+          <a:off x="0" y="0"/>
+          <a:ext cx="0" cy="0"/>
+          <a:chOff x="0" y="0"/>
+          <a:chExt cx="0" cy="0"/>
+        </a:xfrm>
+      </p:grpSpPr>
+      <p:sp>
+        <p:nvSpPr>
+          <p:cNvPr id="2" name="TextBox 1"/>
+          <p:cNvSpPr txBox="1"/>
+          <p:nvPr/>
+        </p:nvSpPr>
+        <p:spPr>
+          <a:xfrm>
+            <a:off x="457200" y="457200"/>
+            <a:ext cx="7050328" cy="584775"/>
+          </a:xfrm>
+          <a:prstGeom prst="rect">
+            <a:avLst/>
+          </a:prstGeom>
+          <a:noFill/>
+        </p:spPr>
+        <p:txBody>
+          <a:bodyPr wrap="none">
+            <a:spAutoFit/>
+          </a:bodyPr>
+          <a:lstStyle/>
+          <a:p>
+            <a:pPr>
+              <a:defRPr sz="3200" b="1">
+                <a:solidFill>
+                  <a:srgbClr val="1F4E79"/>
+                </a:solidFill>
+              </a:defRPr>
+            </a:pPr>
+            <a:r>
+              <a:rPr dirty="0"/>
+              <a:t>3: Integration Test Expansion Agent</a:t>
+            </a:r>
+          </a:p>
+        </p:txBody>
+      </p:sp>
+      <p:sp>
+        <p:nvSpPr>
+          <p:cNvPr id="3" name="TextBox 2"/>
+          <p:cNvSpPr txBox="1"/>
+          <p:nvPr/>
+        </p:nvSpPr>
+        <p:spPr>
+          <a:xfrm>
+            <a:off x="731520" y="1371600"/>
+            <a:ext cx="7772400" cy="5539978"/>
+          </a:xfrm>
+          <a:prstGeom prst="rect">
+            <a:avLst/>
+          </a:prstGeom>
+          <a:noFill/>
+        </p:spPr>
+        <p:txBody>
+          <a:bodyPr wrap="square">
+            <a:spAutoFit/>
+          </a:bodyPr>
+          <a:lstStyle/>
+          <a:p>
+            <a:pPr>
+              <a:spcBef>
+                <a:spcPts val="1200"/>
+              </a:spcBef>
+              <a:defRPr sz="1800">
+                <a:solidFill>
+                  <a:srgbClr val="333333"/>
+                </a:solidFill>
+              </a:defRPr>
+            </a:pPr>
+            <a:r>
+              <a:rPr dirty="0"/>
+              <a:t>📊 COVERAGE EXPLOSION:</a:t>
+            </a:r>
+          </a:p>
+          <a:p>
+            <a:pPr>
+              <a:spcBef>
+                <a:spcPts val="1200"/>
+              </a:spcBef>
+              <a:defRPr sz="1800">
+                <a:solidFill>
+                  <a:srgbClr val="333333"/>
+                </a:solidFill>
+              </a:defRPr>
+            </a:pPr>
+            <a:r>
+              <a:rPr dirty="0"/>
+              <a:t>   Before: </a:t>
+            </a:r>
+            <a:r>
+              <a:rPr lang="en-US" dirty="0"/>
+              <a:t>low</a:t>
+            </a:r>
+            <a:r>
+              <a:rPr dirty="0"/>
+              <a:t> coverage    →    After: </a:t>
+            </a:r>
+            <a:r>
+              <a:rPr lang="en-US" dirty="0"/>
+              <a:t>higher</a:t>
+            </a:r>
+            <a:r>
+              <a:rPr dirty="0"/>
+              <a:t> coverage</a:t>
+            </a:r>
+            <a:endParaRPr lang="en-US" dirty="0"/>
+          </a:p>
+          <a:p>
+            <a:pPr>
+              <a:spcBef>
+                <a:spcPts val="1200"/>
+              </a:spcBef>
+              <a:defRPr sz="1800">
+                <a:solidFill>
+                  <a:srgbClr val="333333"/>
+                </a:solidFill>
+              </a:defRPr>
+            </a:pPr>
+            <a:endParaRPr dirty="0"/>
+          </a:p>
+          <a:p>
+            <a:pPr>
+              <a:spcBef>
+                <a:spcPts val="1200"/>
+              </a:spcBef>
+              <a:defRPr sz="1800">
+                <a:solidFill>
+                  <a:srgbClr val="333333"/>
+                </a:solidFill>
+              </a:defRPr>
+            </a:pPr>
+            <a:r>
+              <a:rPr dirty="0"/>
+              <a:t>🧪 COMPREHENSIVE TEST SUITE:</a:t>
+            </a:r>
+          </a:p>
+          <a:p>
+            <a:pPr>
+              <a:spcBef>
+                <a:spcPts val="1200"/>
+              </a:spcBef>
+              <a:defRPr sz="1800">
+                <a:solidFill>
+                  <a:srgbClr val="333333"/>
+                </a:solidFill>
+              </a:defRPr>
+            </a:pPr>
+            <a:r>
+              <a:rPr dirty="0"/>
+              <a:t>• </a:t>
+            </a:r>
+            <a:r>
+              <a:rPr dirty="0" err="1"/>
+              <a:t>TestStudentCRUDWorkflow</a:t>
+            </a:r>
+            <a:r>
+              <a:rPr dirty="0"/>
+              <a:t> - Full lifecycle testing</a:t>
+            </a:r>
+          </a:p>
+          <a:p>
+            <a:pPr>
+              <a:spcBef>
+                <a:spcPts val="1200"/>
+              </a:spcBef>
+              <a:defRPr sz="1800">
+                <a:solidFill>
+                  <a:srgbClr val="333333"/>
+                </a:solidFill>
+              </a:defRPr>
+            </a:pPr>
+            <a:r>
+              <a:rPr dirty="0"/>
+              <a:t>  Create → Read → Update → Delete → Verify 404</a:t>
+            </a:r>
+          </a:p>
+          <a:p>
+            <a:pPr>
+              <a:spcBef>
+                <a:spcPts val="1200"/>
+              </a:spcBef>
+              <a:defRPr sz="1800">
+                <a:solidFill>
+                  <a:srgbClr val="333333"/>
+                </a:solidFill>
+              </a:defRPr>
+            </a:pPr>
+            <a:r>
+              <a:rPr dirty="0"/>
+              <a:t>• </a:t>
+            </a:r>
+            <a:r>
+              <a:rPr dirty="0" err="1"/>
+              <a:t>TestStudentConcurrentCreation</a:t>
+            </a:r>
+            <a:r>
+              <a:rPr dirty="0"/>
+              <a:t> - Thread safety validation</a:t>
+            </a:r>
+          </a:p>
+          <a:p>
+            <a:pPr>
+              <a:spcBef>
+                <a:spcPts val="1200"/>
+              </a:spcBef>
+              <a:defRPr sz="1800">
+                <a:solidFill>
+                  <a:srgbClr val="333333"/>
+                </a:solidFill>
+              </a:defRPr>
+            </a:pPr>
+            <a:r>
+              <a:rPr dirty="0"/>
+              <a:t>  100 parallel requests with unique ID verification</a:t>
+            </a:r>
+          </a:p>
+          <a:p>
+            <a:pPr>
+              <a:spcBef>
+                <a:spcPts val="1200"/>
+              </a:spcBef>
+              <a:defRPr sz="1800">
+                <a:solidFill>
+                  <a:srgbClr val="333333"/>
+                </a:solidFill>
+              </a:defRPr>
+            </a:pPr>
+            <a:r>
+              <a:rPr dirty="0"/>
+              <a:t>• </a:t>
+            </a:r>
+            <a:r>
+              <a:rPr dirty="0" err="1"/>
+              <a:t>TestStudentErrorScenarios</a:t>
+            </a:r>
+            <a:r>
+              <a:rPr dirty="0"/>
+              <a:t> - Sad path coverage</a:t>
+            </a:r>
+          </a:p>
+          <a:p>
+            <a:pPr>
+              <a:spcBef>
+                <a:spcPts val="1200"/>
+              </a:spcBef>
+              <a:defRPr sz="1800">
+                <a:solidFill>
+                  <a:srgbClr val="333333"/>
+                </a:solidFill>
+              </a:defRPr>
+            </a:pPr>
+            <a:r>
+              <a:rPr dirty="0"/>
+              <a:t>  404 for missing resources, 400 for invalid input</a:t>
+            </a:r>
+          </a:p>
+          <a:p>
+            <a:pPr>
+              <a:spcBef>
+                <a:spcPts val="1200"/>
+              </a:spcBef>
+              <a:defRPr sz="1800">
+                <a:solidFill>
+                  <a:srgbClr val="333333"/>
+                </a:solidFill>
+              </a:defRPr>
+            </a:pPr>
+            <a:r>
+              <a:rPr dirty="0"/>
+              <a:t>• </a:t>
+            </a:r>
+            <a:r>
+              <a:rPr dirty="0" err="1"/>
+              <a:t>TestStudentListPagination</a:t>
+            </a:r>
+            <a:r>
+              <a:rPr dirty="0"/>
+              <a:t> - Edge cases</a:t>
+            </a:r>
+          </a:p>
+          <a:p>
+            <a:pPr>
+              <a:spcBef>
+                <a:spcPts val="1200"/>
+              </a:spcBef>
+              <a:defRPr sz="1800">
+                <a:solidFill>
+                  <a:srgbClr val="333333"/>
+                </a:solidFill>
+              </a:defRPr>
+            </a:pPr>
+            <a:r>
+              <a:rPr dirty="0"/>
+              <a:t>  Empty lists, bulk operations, boundary conditions</a:t>
+            </a:r>
+          </a:p>
+          <a:p>
+            <a:pPr>
+              <a:spcBef>
+                <a:spcPts val="1200"/>
+              </a:spcBef>
+              <a:defRPr sz="1800">
+                <a:solidFill>
+                  <a:srgbClr val="333333"/>
+                </a:solidFill>
+              </a:defRPr>
+            </a:pPr>
+            <a:endParaRPr dirty="0"/>
+          </a:p>
+        </p:txBody>
+      </p:sp>
+    </p:spTree>
+  </p:cSld>
+  <p:clrMapOvr>
+    <a:masterClrMapping/>
+  </p:clrMapOvr>
+</p:sld>
+</file>
+
+<file path=ppt/slides/slide8.xml><?xml version="1.0" encoding="utf-8"?>
 <p:sld xmlns:a="http://schemas.openxmlformats.org/drawingml/2006/main" xmlns:r="http://schemas.openxmlformats.org/officeDocument/2006/relationships" xmlns:p="http://schemas.openxmlformats.org/presentationml/2006/main">
   <p:cSld>
     <p:spTree>
@@ -15892,21 +16939,241 @@
               </a:defRPr>
             </a:pPr>
             <a:r>
-              <a:t>Session 2 Demo Topics</a:t>
+              <a:t>Session 2 Results &amp; Impact</a:t>
             </a:r>
           </a:p>
         </p:txBody>
       </p:sp>
       <p:sp>
         <p:nvSpPr>
-          <p:cNvPr id="3" name="TextBox 2"/>
+          <p:cNvPr id="4" name="TextBox 3"/>
           <p:cNvSpPr txBox="1"/>
           <p:nvPr/>
         </p:nvSpPr>
         <p:spPr>
           <a:xfrm>
-            <a:off x="685800" y="934279"/>
-            <a:ext cx="7772400" cy="5539978"/>
+            <a:off x="457200" y="1282148"/>
+            <a:ext cx="3607904" cy="4862870"/>
+          </a:xfrm>
+          <a:prstGeom prst="rect">
+            <a:avLst/>
+          </a:prstGeom>
+          <a:noFill/>
+        </p:spPr>
+        <p:txBody>
+          <a:bodyPr wrap="square" numCol="1">
+            <a:spAutoFit/>
+          </a:bodyPr>
+          <a:lstStyle/>
+          <a:p>
+            <a:endParaRPr dirty="0"/>
+          </a:p>
+          <a:p>
+            <a:pPr>
+              <a:spcBef>
+                <a:spcPts val="1000"/>
+              </a:spcBef>
+              <a:defRPr sz="1600">
+                <a:solidFill>
+                  <a:srgbClr val="333333"/>
+                </a:solidFill>
+              </a:defRPr>
+            </a:pPr>
+            <a:r>
+              <a:rPr dirty="0"/>
+              <a:t>🎯 QUALITATIVE IMPACT:</a:t>
+            </a:r>
+          </a:p>
+          <a:p>
+            <a:pPr>
+              <a:spcBef>
+                <a:spcPts val="1000"/>
+              </a:spcBef>
+              <a:defRPr sz="1600">
+                <a:solidFill>
+                  <a:srgbClr val="333333"/>
+                </a:solidFill>
+              </a:defRPr>
+            </a:pPr>
+            <a:endParaRPr dirty="0"/>
+          </a:p>
+          <a:p>
+            <a:pPr>
+              <a:spcBef>
+                <a:spcPts val="1000"/>
+              </a:spcBef>
+              <a:defRPr sz="1600">
+                <a:solidFill>
+                  <a:srgbClr val="333333"/>
+                </a:solidFill>
+              </a:defRPr>
+            </a:pPr>
+            <a:r>
+              <a:rPr dirty="0"/>
+              <a:t>✅ Architecture:</a:t>
+            </a:r>
+          </a:p>
+          <a:p>
+            <a:pPr>
+              <a:spcBef>
+                <a:spcPts val="1000"/>
+              </a:spcBef>
+              <a:defRPr sz="1600">
+                <a:solidFill>
+                  <a:srgbClr val="333333"/>
+                </a:solidFill>
+              </a:defRPr>
+            </a:pPr>
+            <a:r>
+              <a:rPr lang="en-US" dirty="0"/>
+              <a:t>   </a:t>
+            </a:r>
+            <a:r>
+              <a:rPr dirty="0"/>
+              <a:t>Clean repository pattern</a:t>
+            </a:r>
+            <a:endParaRPr lang="en-US" dirty="0"/>
+          </a:p>
+          <a:p>
+            <a:pPr>
+              <a:spcBef>
+                <a:spcPts val="1000"/>
+              </a:spcBef>
+              <a:defRPr sz="1600">
+                <a:solidFill>
+                  <a:srgbClr val="333333"/>
+                </a:solidFill>
+              </a:defRPr>
+            </a:pPr>
+            <a:r>
+              <a:rPr lang="en-US" dirty="0"/>
+              <a:t>   SOLID principles followed</a:t>
+            </a:r>
+          </a:p>
+          <a:p>
+            <a:pPr>
+              <a:spcBef>
+                <a:spcPts val="1000"/>
+              </a:spcBef>
+              <a:defRPr sz="1600">
+                <a:solidFill>
+                  <a:srgbClr val="333333"/>
+                </a:solidFill>
+              </a:defRPr>
+            </a:pPr>
+            <a:r>
+              <a:rPr dirty="0"/>
+              <a:t>   Dependency injection</a:t>
+            </a:r>
+          </a:p>
+          <a:p>
+            <a:pPr>
+              <a:spcBef>
+                <a:spcPts val="1000"/>
+              </a:spcBef>
+              <a:defRPr sz="1600">
+                <a:solidFill>
+                  <a:srgbClr val="333333"/>
+                </a:solidFill>
+              </a:defRPr>
+            </a:pPr>
+            <a:endParaRPr dirty="0"/>
+          </a:p>
+          <a:p>
+            <a:pPr>
+              <a:spcBef>
+                <a:spcPts val="1000"/>
+              </a:spcBef>
+              <a:defRPr sz="1600">
+                <a:solidFill>
+                  <a:srgbClr val="333333"/>
+                </a:solidFill>
+              </a:defRPr>
+            </a:pPr>
+            <a:r>
+              <a:rPr dirty="0"/>
+              <a:t>✅ Testability:</a:t>
+            </a:r>
+          </a:p>
+          <a:p>
+            <a:pPr>
+              <a:spcBef>
+                <a:spcPts val="1000"/>
+              </a:spcBef>
+              <a:defRPr sz="1600">
+                <a:solidFill>
+                  <a:srgbClr val="333333"/>
+                </a:solidFill>
+              </a:defRPr>
+            </a:pPr>
+            <a:r>
+              <a:rPr dirty="0"/>
+              <a:t>   Can mock any component</a:t>
+            </a:r>
+          </a:p>
+          <a:p>
+            <a:pPr>
+              <a:spcBef>
+                <a:spcPts val="1000"/>
+              </a:spcBef>
+              <a:defRPr sz="1600">
+                <a:solidFill>
+                  <a:srgbClr val="333333"/>
+                </a:solidFill>
+              </a:defRPr>
+            </a:pPr>
+            <a:r>
+              <a:rPr dirty="0"/>
+              <a:t>   Fast isolated unit tests</a:t>
+            </a:r>
+          </a:p>
+          <a:p>
+            <a:pPr>
+              <a:spcBef>
+                <a:spcPts val="1000"/>
+              </a:spcBef>
+              <a:defRPr sz="1600">
+                <a:solidFill>
+                  <a:srgbClr val="333333"/>
+                </a:solidFill>
+              </a:defRPr>
+            </a:pPr>
+            <a:r>
+              <a:rPr dirty="0"/>
+              <a:t>   Comprehensive integration tests</a:t>
+            </a:r>
+          </a:p>
+          <a:p>
+            <a:pPr>
+              <a:spcBef>
+                <a:spcPts val="1000"/>
+              </a:spcBef>
+              <a:defRPr sz="1600">
+                <a:solidFill>
+                  <a:srgbClr val="333333"/>
+                </a:solidFill>
+              </a:defRPr>
+            </a:pPr>
+            <a:endParaRPr lang="en-US" dirty="0"/>
+          </a:p>
+        </p:txBody>
+      </p:sp>
+      <p:sp>
+        <p:nvSpPr>
+          <p:cNvPr id="6" name="TextBox 5">
+            <a:extLst>
+              <a:ext uri="{FF2B5EF4-FFF2-40B4-BE49-F238E27FC236}">
+                <a16:creationId xmlns:a16="http://schemas.microsoft.com/office/drawing/2014/main" id="{A5AC279B-89C2-B6B9-BD89-23F97F2423C8}"/>
+              </a:ext>
+            </a:extLst>
+          </p:cNvPr>
+          <p:cNvSpPr txBox="1"/>
+          <p:nvPr/>
+        </p:nvSpPr>
+        <p:spPr>
+          <a:xfrm>
+            <a:off x="4099892" y="2427799"/>
+            <a:ext cx="4586908" cy="3334246"/>
           </a:xfrm>
           <a:prstGeom prst="rect">
             <a:avLst/>
@@ -15919,311 +17186,6 @@
           </a:bodyPr>
           <a:lstStyle/>
           <a:p>
-            <a:endParaRPr dirty="0"/>
-          </a:p>
-          <a:p>
-            <a:pPr>
-              <a:spcBef>
-                <a:spcPts val="1200"/>
-              </a:spcBef>
-              <a:defRPr sz="1800">
-                <a:solidFill>
-                  <a:srgbClr val="333333"/>
-                </a:solidFill>
-              </a:defRPr>
-            </a:pPr>
-            <a:r>
-              <a:rPr dirty="0"/>
-              <a:t>1: Repository Refactoring Agent </a:t>
-            </a:r>
-            <a:endParaRPr lang="en-US" dirty="0"/>
-          </a:p>
-          <a:p>
-            <a:pPr>
-              <a:spcBef>
-                <a:spcPts val="1200"/>
-              </a:spcBef>
-              <a:defRPr sz="1800">
-                <a:solidFill>
-                  <a:srgbClr val="333333"/>
-                </a:solidFill>
-              </a:defRPr>
-            </a:pPr>
-            <a:r>
-              <a:rPr lang="en-US" dirty="0"/>
-              <a:t>   </a:t>
-            </a:r>
-            <a:r>
-              <a:rPr dirty="0"/>
-              <a:t>• Extract repository pattern from messy handlers</a:t>
-            </a:r>
-          </a:p>
-          <a:p>
-            <a:pPr>
-              <a:spcBef>
-                <a:spcPts val="1200"/>
-              </a:spcBef>
-              <a:defRPr sz="1800">
-                <a:solidFill>
-                  <a:srgbClr val="333333"/>
-                </a:solidFill>
-              </a:defRPr>
-            </a:pPr>
-            <a:r>
-              <a:rPr dirty="0"/>
-              <a:t>   • Remove global state and inject dependencies</a:t>
-            </a:r>
-          </a:p>
-          <a:p>
-            <a:pPr>
-              <a:spcBef>
-                <a:spcPts val="1200"/>
-              </a:spcBef>
-              <a:defRPr sz="1800">
-                <a:solidFill>
-                  <a:srgbClr val="333333"/>
-                </a:solidFill>
-              </a:defRPr>
-            </a:pPr>
-            <a:r>
-              <a:rPr dirty="0"/>
-              <a:t>   • Surgical multi-file transformation</a:t>
-            </a:r>
-          </a:p>
-          <a:p>
-            <a:pPr>
-              <a:spcBef>
-                <a:spcPts val="1200"/>
-              </a:spcBef>
-              <a:defRPr sz="1800">
-                <a:solidFill>
-                  <a:srgbClr val="333333"/>
-                </a:solidFill>
-              </a:defRPr>
-            </a:pPr>
-            <a:r>
-              <a:rPr dirty="0"/>
-              <a:t>2: Mock + Factory Generation Agent </a:t>
-            </a:r>
-            <a:endParaRPr lang="en-US" dirty="0"/>
-          </a:p>
-          <a:p>
-            <a:pPr>
-              <a:spcBef>
-                <a:spcPts val="1200"/>
-              </a:spcBef>
-              <a:defRPr sz="1800">
-                <a:solidFill>
-                  <a:srgbClr val="333333"/>
-                </a:solidFill>
-              </a:defRPr>
-            </a:pPr>
-            <a:r>
-              <a:rPr lang="en-US" dirty="0"/>
-              <a:t>   </a:t>
-            </a:r>
-            <a:r>
-              <a:rPr dirty="0"/>
-              <a:t>• Auto-generate </a:t>
-            </a:r>
-            <a:r>
-              <a:rPr dirty="0" err="1"/>
-              <a:t>gomock</a:t>
-            </a:r>
-            <a:r>
-              <a:rPr dirty="0"/>
-              <a:t> mocks for repositories</a:t>
-            </a:r>
-          </a:p>
-          <a:p>
-            <a:pPr>
-              <a:spcBef>
-                <a:spcPts val="1200"/>
-              </a:spcBef>
-              <a:defRPr sz="1800">
-                <a:solidFill>
-                  <a:srgbClr val="333333"/>
-                </a:solidFill>
-              </a:defRPr>
-            </a:pPr>
-            <a:r>
-              <a:rPr dirty="0"/>
-              <a:t>   • Create test data factories with builder pattern</a:t>
-            </a:r>
-          </a:p>
-          <a:p>
-            <a:pPr>
-              <a:spcBef>
-                <a:spcPts val="1200"/>
-              </a:spcBef>
-              <a:defRPr sz="1800">
-                <a:solidFill>
-                  <a:srgbClr val="333333"/>
-                </a:solidFill>
-              </a:defRPr>
-            </a:pPr>
-            <a:r>
-              <a:rPr dirty="0"/>
-              <a:t>   • 500+ lines of test infrastructure in minutes</a:t>
-            </a:r>
-          </a:p>
-          <a:p>
-            <a:pPr>
-              <a:spcBef>
-                <a:spcPts val="1200"/>
-              </a:spcBef>
-              <a:defRPr sz="1800">
-                <a:solidFill>
-                  <a:srgbClr val="333333"/>
-                </a:solidFill>
-              </a:defRPr>
-            </a:pPr>
-            <a:r>
-              <a:rPr dirty="0"/>
-              <a:t>3: Integration Test Expansion Agent </a:t>
-            </a:r>
-            <a:endParaRPr lang="en-US" dirty="0"/>
-          </a:p>
-          <a:p>
-            <a:pPr>
-              <a:spcBef>
-                <a:spcPts val="1200"/>
-              </a:spcBef>
-              <a:defRPr sz="1800">
-                <a:solidFill>
-                  <a:srgbClr val="333333"/>
-                </a:solidFill>
-              </a:defRPr>
-            </a:pPr>
-            <a:r>
-              <a:rPr lang="en-US" dirty="0"/>
-              <a:t>   </a:t>
-            </a:r>
-            <a:r>
-              <a:rPr dirty="0"/>
-              <a:t>• Comprehensive CRUD workflow tests</a:t>
-            </a:r>
-          </a:p>
-          <a:p>
-            <a:pPr>
-              <a:spcBef>
-                <a:spcPts val="1200"/>
-              </a:spcBef>
-              <a:defRPr sz="1800">
-                <a:solidFill>
-                  <a:srgbClr val="333333"/>
-                </a:solidFill>
-              </a:defRPr>
-            </a:pPr>
-            <a:r>
-              <a:rPr dirty="0"/>
-              <a:t>   • Concurrent testing for thread safety</a:t>
-            </a:r>
-          </a:p>
-          <a:p>
-            <a:pPr>
-              <a:spcBef>
-                <a:spcPts val="1200"/>
-              </a:spcBef>
-              <a:defRPr sz="1800">
-                <a:solidFill>
-                  <a:srgbClr val="333333"/>
-                </a:solidFill>
-              </a:defRPr>
-            </a:pPr>
-            <a:r>
-              <a:rPr dirty="0"/>
-              <a:t>   </a:t>
-            </a:r>
-          </a:p>
-        </p:txBody>
-      </p:sp>
-    </p:spTree>
-  </p:cSld>
-  <p:clrMapOvr>
-    <a:masterClrMapping/>
-  </p:clrMapOvr>
-</p:sld>
-</file>
-
-<file path=ppt/slides/slide6.xml><?xml version="1.0" encoding="utf-8"?>
-<p:sld xmlns:a="http://schemas.openxmlformats.org/drawingml/2006/main" xmlns:r="http://schemas.openxmlformats.org/officeDocument/2006/relationships" xmlns:p="http://schemas.openxmlformats.org/presentationml/2006/main">
-  <p:cSld>
-    <p:spTree>
-      <p:nvGrpSpPr>
-        <p:cNvPr id="1" name=""/>
-        <p:cNvGrpSpPr/>
-        <p:nvPr/>
-      </p:nvGrpSpPr>
-      <p:grpSpPr>
-        <a:xfrm>
-          <a:off x="0" y="0"/>
-          <a:ext cx="0" cy="0"/>
-          <a:chOff x="0" y="0"/>
-          <a:chExt cx="0" cy="0"/>
-        </a:xfrm>
-      </p:grpSpPr>
-      <p:sp>
-        <p:nvSpPr>
-          <p:cNvPr id="2" name="TextBox 1"/>
-          <p:cNvSpPr txBox="1"/>
-          <p:nvPr/>
-        </p:nvSpPr>
-        <p:spPr>
-          <a:xfrm>
-            <a:off x="457200" y="457200"/>
-            <a:ext cx="6283900" cy="584775"/>
-          </a:xfrm>
-          <a:prstGeom prst="rect">
-            <a:avLst/>
-          </a:prstGeom>
-          <a:noFill/>
-        </p:spPr>
-        <p:txBody>
-          <a:bodyPr wrap="none">
-            <a:spAutoFit/>
-          </a:bodyPr>
-          <a:lstStyle/>
-          <a:p>
-            <a:pPr>
-              <a:defRPr sz="3200" b="1">
-                <a:solidFill>
-                  <a:srgbClr val="1F4E79"/>
-                </a:solidFill>
-              </a:defRPr>
-            </a:pPr>
-            <a:r>
-              <a:rPr dirty="0"/>
-              <a:t>1: Repository Refactoring Agent</a:t>
-            </a:r>
-          </a:p>
-        </p:txBody>
-      </p:sp>
-      <p:sp>
-        <p:nvSpPr>
-          <p:cNvPr id="3" name="TextBox 2"/>
-          <p:cNvSpPr txBox="1"/>
-          <p:nvPr/>
-        </p:nvSpPr>
-        <p:spPr>
-          <a:xfrm>
-            <a:off x="457200" y="914400"/>
-            <a:ext cx="4114800" cy="5237331"/>
-          </a:xfrm>
-          <a:prstGeom prst="rect">
-            <a:avLst/>
-          </a:prstGeom>
-          <a:noFill/>
-        </p:spPr>
-        <p:txBody>
-          <a:bodyPr wrap="square">
-            <a:spAutoFit/>
-          </a:bodyPr>
-          <a:lstStyle/>
-          <a:p>
-            <a:endParaRPr dirty="0"/>
-          </a:p>
-          <a:p>
             <a:pPr>
               <a:spcBef>
                 <a:spcPts val="1000"/>
@@ -16235,8 +17197,8 @@
               </a:defRPr>
             </a:pPr>
             <a:r>
-              <a:rPr dirty="0"/>
-              <a:t>❌ BEFORE: Technical Debt</a:t>
+              <a:rPr lang="en-US" dirty="0"/>
+              <a:t>✅ Maintainability:</a:t>
             </a:r>
           </a:p>
           <a:p>
@@ -16250,7 +17212,10 @@
                 </a:solidFill>
               </a:defRPr>
             </a:pPr>
-            <a:endParaRPr dirty="0"/>
+            <a:r>
+              <a:rPr lang="en-US" dirty="0"/>
+              <a:t>   Single responsibility</a:t>
+            </a:r>
           </a:p>
           <a:p>
             <a:pPr>
@@ -16264,8 +17229,8 @@
               </a:defRPr>
             </a:pPr>
             <a:r>
-              <a:rPr dirty="0"/>
-              <a:t>• Global variables polluting scope:</a:t>
+              <a:rPr lang="en-US" dirty="0"/>
+              <a:t>   Clear separation of concerns</a:t>
             </a:r>
           </a:p>
           <a:p>
@@ -16280,8 +17245,8 @@
               </a:defRPr>
             </a:pPr>
             <a:r>
-              <a:rPr dirty="0"/>
-              <a:t>  var students = make(map[int]...)</a:t>
+              <a:rPr lang="en-US" dirty="0"/>
+              <a:t>   Tests as documentation</a:t>
             </a:r>
           </a:p>
           <a:p>
@@ -16295,23 +17260,7 @@
                 </a:solidFill>
               </a:defRPr>
             </a:pPr>
-            <a:r>
-              <a:rPr dirty="0"/>
-              <a:t>  var </a:t>
-            </a:r>
-            <a:r>
-              <a:rPr dirty="0" err="1"/>
-              <a:t>studentsMu</a:t>
-            </a:r>
-            <a:r>
-              <a:rPr dirty="0"/>
-              <a:t> </a:t>
-            </a:r>
-            <a:r>
-              <a:rPr dirty="0" err="1"/>
-              <a:t>sync.RWMutex</a:t>
-            </a:r>
-            <a:endParaRPr dirty="0"/>
+            <a:endParaRPr lang="en-US" dirty="0"/>
           </a:p>
           <a:p>
             <a:pPr>
@@ -16325,8 +17274,8 @@
               </a:defRPr>
             </a:pPr>
             <a:r>
-              <a:rPr dirty="0"/>
-              <a:t>• Mixed responsibilities:</a:t>
+              <a:rPr lang="en-US" dirty="0"/>
+              <a:t>✅ Flexibility:</a:t>
             </a:r>
           </a:p>
           <a:p>
@@ -16341,8 +17290,8 @@
               </a:defRPr>
             </a:pPr>
             <a:r>
-              <a:rPr dirty="0"/>
-              <a:t>  HTTP + Database logic together</a:t>
+              <a:rPr lang="en-US" dirty="0"/>
+              <a:t>   Can swap storage (PostgreSQL,</a:t>
             </a:r>
           </a:p>
           <a:p>
@@ -16357,8 +17306,8 @@
               </a:defRPr>
             </a:pPr>
             <a:r>
-              <a:rPr dirty="0"/>
-              <a:t>• Tight coupling:</a:t>
+              <a:rPr lang="en-US" dirty="0"/>
+              <a:t>   MongoDB, Redis) without</a:t>
             </a:r>
           </a:p>
           <a:p>
@@ -16373,1234 +17322,9 @@
               </a:defRPr>
             </a:pPr>
             <a:r>
-              <a:rPr dirty="0"/>
-              <a:t>  Can't swap storage</a:t>
-            </a:r>
-          </a:p>
-          <a:p>
-            <a:pPr>
-              <a:spcBef>
-                <a:spcPts val="1000"/>
-              </a:spcBef>
-              <a:defRPr sz="1600">
-                <a:solidFill>
-                  <a:srgbClr val="333333"/>
-                </a:solidFill>
-              </a:defRPr>
-            </a:pPr>
-            <a:r>
-              <a:rPr dirty="0"/>
-              <a:t>  Can't test in isolation</a:t>
-            </a:r>
-          </a:p>
-          <a:p>
-            <a:pPr>
-              <a:spcBef>
-                <a:spcPts val="1000"/>
-              </a:spcBef>
-              <a:defRPr sz="1600">
-                <a:solidFill>
-                  <a:srgbClr val="333333"/>
-                </a:solidFill>
-              </a:defRPr>
-            </a:pPr>
-            <a:r>
-              <a:rPr dirty="0"/>
-              <a:t>• Impossible to mock</a:t>
-            </a:r>
-          </a:p>
-          <a:p>
-            <a:pPr>
-              <a:spcBef>
-                <a:spcPts val="1000"/>
-              </a:spcBef>
-              <a:defRPr sz="1600">
-                <a:solidFill>
-                  <a:srgbClr val="333333"/>
-                </a:solidFill>
-              </a:defRPr>
-            </a:pPr>
-            <a:r>
-              <a:rPr dirty="0"/>
-              <a:t>• Race conditions possible</a:t>
-            </a:r>
-          </a:p>
-          <a:p>
-            <a:pPr>
-              <a:spcBef>
-                <a:spcPts val="1000"/>
-              </a:spcBef>
-              <a:defRPr sz="1600">
-                <a:solidFill>
-                  <a:srgbClr val="333333"/>
-                </a:solidFill>
-              </a:defRPr>
-            </a:pPr>
-            <a:endParaRPr dirty="0"/>
-          </a:p>
-        </p:txBody>
-      </p:sp>
-      <p:sp>
-        <p:nvSpPr>
-          <p:cNvPr id="4" name="TextBox 3"/>
-          <p:cNvSpPr txBox="1"/>
-          <p:nvPr/>
-        </p:nvSpPr>
-        <p:spPr>
-          <a:xfrm>
-            <a:off x="3929933" y="894522"/>
-            <a:ext cx="4114800" cy="5237331"/>
-          </a:xfrm>
-          <a:prstGeom prst="rect">
-            <a:avLst/>
-          </a:prstGeom>
-          <a:noFill/>
-        </p:spPr>
-        <p:txBody>
-          <a:bodyPr wrap="square">
-            <a:spAutoFit/>
-          </a:bodyPr>
-          <a:lstStyle/>
-          <a:p>
-            <a:endParaRPr dirty="0"/>
-          </a:p>
-          <a:p>
-            <a:pPr>
-              <a:spcBef>
-                <a:spcPts val="1000"/>
-              </a:spcBef>
-              <a:defRPr sz="1600">
-                <a:solidFill>
-                  <a:srgbClr val="333333"/>
-                </a:solidFill>
-              </a:defRPr>
-            </a:pPr>
-            <a:r>
-              <a:rPr dirty="0"/>
-              <a:t>✅ AFTER: Clean Architecture</a:t>
-            </a:r>
-          </a:p>
-          <a:p>
-            <a:pPr>
-              <a:spcBef>
-                <a:spcPts val="1000"/>
-              </a:spcBef>
-              <a:defRPr sz="1600">
-                <a:solidFill>
-                  <a:srgbClr val="333333"/>
-                </a:solidFill>
-              </a:defRPr>
-            </a:pPr>
-            <a:endParaRPr dirty="0"/>
-          </a:p>
-          <a:p>
-            <a:pPr>
-              <a:spcBef>
-                <a:spcPts val="1000"/>
-              </a:spcBef>
-              <a:defRPr sz="1600">
-                <a:solidFill>
-                  <a:srgbClr val="333333"/>
-                </a:solidFill>
-              </a:defRPr>
-            </a:pPr>
-            <a:r>
-              <a:rPr dirty="0"/>
-              <a:t>• Repository interfaces:</a:t>
-            </a:r>
-          </a:p>
-          <a:p>
-            <a:pPr>
-              <a:spcBef>
-                <a:spcPts val="1000"/>
-              </a:spcBef>
-              <a:defRPr sz="1600">
-                <a:solidFill>
-                  <a:srgbClr val="333333"/>
-                </a:solidFill>
-              </a:defRPr>
-            </a:pPr>
-            <a:r>
-              <a:rPr dirty="0"/>
-              <a:t>  </a:t>
-            </a:r>
-            <a:r>
-              <a:rPr dirty="0" err="1"/>
-              <a:t>StudentRepository</a:t>
-            </a:r>
-            <a:r>
-              <a:rPr dirty="0"/>
-              <a:t> interface</a:t>
-            </a:r>
-          </a:p>
-          <a:p>
-            <a:pPr>
-              <a:spcBef>
-                <a:spcPts val="1000"/>
-              </a:spcBef>
-              <a:defRPr sz="1600">
-                <a:solidFill>
-                  <a:srgbClr val="333333"/>
-                </a:solidFill>
-              </a:defRPr>
-            </a:pPr>
-            <a:r>
-              <a:rPr dirty="0"/>
-              <a:t>  with Create, Get, Update, Delete</a:t>
-            </a:r>
-          </a:p>
-          <a:p>
-            <a:pPr>
-              <a:spcBef>
-                <a:spcPts val="1000"/>
-              </a:spcBef>
-              <a:defRPr sz="1600">
-                <a:solidFill>
-                  <a:srgbClr val="333333"/>
-                </a:solidFill>
-              </a:defRPr>
-            </a:pPr>
-            <a:r>
-              <a:rPr dirty="0"/>
-              <a:t>• Dependency injection:</a:t>
-            </a:r>
-          </a:p>
-          <a:p>
-            <a:pPr>
-              <a:spcBef>
-                <a:spcPts val="1000"/>
-              </a:spcBef>
-              <a:defRPr sz="1600">
-                <a:solidFill>
-                  <a:srgbClr val="333333"/>
-                </a:solidFill>
-              </a:defRPr>
-            </a:pPr>
-            <a:r>
-              <a:rPr dirty="0"/>
-              <a:t>  type </a:t>
-            </a:r>
-            <a:r>
-              <a:rPr dirty="0" err="1"/>
-              <a:t>StudentHandler</a:t>
-            </a:r>
-            <a:r>
-              <a:rPr dirty="0"/>
-              <a:t> struct {</a:t>
-            </a:r>
-          </a:p>
-          <a:p>
-            <a:pPr>
-              <a:spcBef>
-                <a:spcPts val="1000"/>
-              </a:spcBef>
-              <a:defRPr sz="1600">
-                <a:solidFill>
-                  <a:srgbClr val="333333"/>
-                </a:solidFill>
-              </a:defRPr>
-            </a:pPr>
-            <a:r>
-              <a:rPr dirty="0"/>
-              <a:t>    Repo </a:t>
-            </a:r>
-            <a:r>
-              <a:rPr dirty="0" err="1"/>
-              <a:t>repository.StudentRepository</a:t>
-            </a:r>
-            <a:endParaRPr dirty="0"/>
-          </a:p>
-          <a:p>
-            <a:pPr>
-              <a:spcBef>
-                <a:spcPts val="1000"/>
-              </a:spcBef>
-              <a:defRPr sz="1600">
-                <a:solidFill>
-                  <a:srgbClr val="333333"/>
-                </a:solidFill>
-              </a:defRPr>
-            </a:pPr>
-            <a:r>
-              <a:rPr dirty="0"/>
-              <a:t>  }</a:t>
-            </a:r>
-          </a:p>
-          <a:p>
-            <a:pPr>
-              <a:spcBef>
-                <a:spcPts val="1000"/>
-              </a:spcBef>
-              <a:defRPr sz="1600">
-                <a:solidFill>
-                  <a:srgbClr val="333333"/>
-                </a:solidFill>
-              </a:defRPr>
-            </a:pPr>
-            <a:r>
-              <a:rPr dirty="0"/>
-              <a:t>• Encapsulated state:</a:t>
-            </a:r>
-          </a:p>
-          <a:p>
-            <a:pPr>
-              <a:spcBef>
-                <a:spcPts val="1000"/>
-              </a:spcBef>
-              <a:defRPr sz="1600">
-                <a:solidFill>
-                  <a:srgbClr val="333333"/>
-                </a:solidFill>
-              </a:defRPr>
-            </a:pPr>
-            <a:r>
-              <a:rPr dirty="0"/>
-              <a:t>  All storage inside repository</a:t>
-            </a:r>
-          </a:p>
-          <a:p>
-            <a:pPr>
-              <a:spcBef>
-                <a:spcPts val="1000"/>
-              </a:spcBef>
-              <a:defRPr sz="1600">
-                <a:solidFill>
-                  <a:srgbClr val="333333"/>
-                </a:solidFill>
-              </a:defRPr>
-            </a:pPr>
-            <a:r>
-              <a:rPr dirty="0"/>
-              <a:t>• Thread-safe implementations</a:t>
-            </a:r>
-          </a:p>
-          <a:p>
-            <a:pPr>
-              <a:spcBef>
-                <a:spcPts val="1000"/>
-              </a:spcBef>
-              <a:defRPr sz="1600">
-                <a:solidFill>
-                  <a:srgbClr val="333333"/>
-                </a:solidFill>
-              </a:defRPr>
-            </a:pPr>
-            <a:endParaRPr dirty="0"/>
-          </a:p>
-        </p:txBody>
-      </p:sp>
-    </p:spTree>
-  </p:cSld>
-  <p:clrMapOvr>
-    <a:masterClrMapping/>
-  </p:clrMapOvr>
-</p:sld>
-</file>
-
-<file path=ppt/slides/slide7.xml><?xml version="1.0" encoding="utf-8"?>
-<p:sld xmlns:a="http://schemas.openxmlformats.org/drawingml/2006/main" xmlns:r="http://schemas.openxmlformats.org/officeDocument/2006/relationships" xmlns:p="http://schemas.openxmlformats.org/presentationml/2006/main">
-  <p:cSld>
-    <p:spTree>
-      <p:nvGrpSpPr>
-        <p:cNvPr id="1" name=""/>
-        <p:cNvGrpSpPr/>
-        <p:nvPr/>
-      </p:nvGrpSpPr>
-      <p:grpSpPr>
-        <a:xfrm>
-          <a:off x="0" y="0"/>
-          <a:ext cx="0" cy="0"/>
-          <a:chOff x="0" y="0"/>
-          <a:chExt cx="0" cy="0"/>
-        </a:xfrm>
-      </p:grpSpPr>
-      <p:sp>
-        <p:nvSpPr>
-          <p:cNvPr id="2" name="TextBox 1"/>
-          <p:cNvSpPr txBox="1"/>
-          <p:nvPr/>
-        </p:nvSpPr>
-        <p:spPr>
-          <a:xfrm>
-            <a:off x="457200" y="457200"/>
-            <a:ext cx="7112845" cy="584775"/>
-          </a:xfrm>
-          <a:prstGeom prst="rect">
-            <a:avLst/>
-          </a:prstGeom>
-          <a:noFill/>
-        </p:spPr>
-        <p:txBody>
-          <a:bodyPr wrap="none">
-            <a:spAutoFit/>
-          </a:bodyPr>
-          <a:lstStyle/>
-          <a:p>
-            <a:pPr>
-              <a:defRPr sz="3200" b="1">
-                <a:solidFill>
-                  <a:srgbClr val="1F4E79"/>
-                </a:solidFill>
-              </a:defRPr>
-            </a:pPr>
-            <a:r>
-              <a:rPr dirty="0"/>
-              <a:t>2: Mock + Factory Generation Agent</a:t>
-            </a:r>
-          </a:p>
-        </p:txBody>
-      </p:sp>
-      <p:sp>
-        <p:nvSpPr>
-          <p:cNvPr id="3" name="TextBox 2"/>
-          <p:cNvSpPr txBox="1"/>
-          <p:nvPr/>
-        </p:nvSpPr>
-        <p:spPr>
-          <a:xfrm>
-            <a:off x="457200" y="1371600"/>
-            <a:ext cx="4114800" cy="4457631"/>
-          </a:xfrm>
-          <a:prstGeom prst="rect">
-            <a:avLst/>
-          </a:prstGeom>
-          <a:noFill/>
-        </p:spPr>
-        <p:txBody>
-          <a:bodyPr wrap="square">
-            <a:spAutoFit/>
-          </a:bodyPr>
-          <a:lstStyle/>
-          <a:p>
-            <a:pPr>
-              <a:spcBef>
-                <a:spcPts val="1000"/>
-              </a:spcBef>
-              <a:defRPr sz="1600">
-                <a:solidFill>
-                  <a:srgbClr val="333333"/>
-                </a:solidFill>
-              </a:defRPr>
-            </a:pPr>
-            <a:r>
-              <a:rPr dirty="0"/>
-              <a:t>🎭 GOMOCK GENERATION:</a:t>
-            </a:r>
-          </a:p>
-          <a:p>
-            <a:pPr>
-              <a:spcBef>
-                <a:spcPts val="1000"/>
-              </a:spcBef>
-              <a:defRPr sz="1600">
-                <a:solidFill>
-                  <a:srgbClr val="333333"/>
-                </a:solidFill>
-              </a:defRPr>
-            </a:pPr>
-            <a:endParaRPr dirty="0"/>
-          </a:p>
-          <a:p>
-            <a:pPr>
-              <a:spcBef>
-                <a:spcPts val="1000"/>
-              </a:spcBef>
-              <a:defRPr sz="1600">
-                <a:solidFill>
-                  <a:srgbClr val="333333"/>
-                </a:solidFill>
-              </a:defRPr>
-            </a:pPr>
-            <a:r>
-              <a:rPr dirty="0"/>
-              <a:t>• Auto-generate from interfaces:</a:t>
-            </a:r>
-          </a:p>
-          <a:p>
-            <a:pPr>
-              <a:spcBef>
-                <a:spcPts val="1000"/>
-              </a:spcBef>
-              <a:defRPr sz="1600">
-                <a:solidFill>
-                  <a:srgbClr val="333333"/>
-                </a:solidFill>
-              </a:defRPr>
-            </a:pPr>
-            <a:r>
-              <a:rPr dirty="0"/>
-              <a:t>  //</a:t>
-            </a:r>
-            <a:r>
-              <a:rPr dirty="0" err="1"/>
-              <a:t>go:generate</a:t>
-            </a:r>
-            <a:r>
-              <a:rPr dirty="0"/>
-              <a:t> </a:t>
-            </a:r>
-            <a:r>
-              <a:rPr dirty="0" err="1"/>
-              <a:t>mockgen</a:t>
-            </a:r>
-            <a:r>
-              <a:rPr dirty="0"/>
-              <a:t>...</a:t>
-            </a:r>
-          </a:p>
-          <a:p>
-            <a:pPr>
-              <a:spcBef>
-                <a:spcPts val="1000"/>
-              </a:spcBef>
-              <a:defRPr sz="1600">
-                <a:solidFill>
-                  <a:srgbClr val="333333"/>
-                </a:solidFill>
-              </a:defRPr>
-            </a:pPr>
-            <a:r>
-              <a:rPr dirty="0"/>
-              <a:t>• </a:t>
-            </a:r>
-            <a:r>
-              <a:rPr dirty="0" err="1"/>
-              <a:t>MockStudentRepository</a:t>
-            </a:r>
-            <a:endParaRPr dirty="0"/>
-          </a:p>
-          <a:p>
-            <a:pPr>
-              <a:spcBef>
-                <a:spcPts val="1000"/>
-              </a:spcBef>
-              <a:defRPr sz="1600">
-                <a:solidFill>
-                  <a:srgbClr val="333333"/>
-                </a:solidFill>
-              </a:defRPr>
-            </a:pPr>
-            <a:r>
-              <a:rPr dirty="0"/>
-              <a:t>  with expectation setting</a:t>
-            </a:r>
-          </a:p>
-          <a:p>
-            <a:pPr>
-              <a:spcBef>
-                <a:spcPts val="1000"/>
-              </a:spcBef>
-              <a:defRPr sz="1600">
-                <a:solidFill>
-                  <a:srgbClr val="333333"/>
-                </a:solidFill>
-              </a:defRPr>
-            </a:pPr>
-            <a:r>
-              <a:rPr dirty="0"/>
-              <a:t>• </a:t>
-            </a:r>
-            <a:r>
-              <a:rPr dirty="0" err="1"/>
-              <a:t>MockGradeRepository</a:t>
-            </a:r>
-            <a:endParaRPr dirty="0"/>
-          </a:p>
-          <a:p>
-            <a:pPr>
-              <a:spcBef>
-                <a:spcPts val="1000"/>
-              </a:spcBef>
-              <a:defRPr sz="1600">
-                <a:solidFill>
-                  <a:srgbClr val="333333"/>
-                </a:solidFill>
-              </a:defRPr>
-            </a:pPr>
-            <a:r>
-              <a:rPr dirty="0"/>
-              <a:t>  with call verification</a:t>
-            </a:r>
-          </a:p>
-          <a:p>
-            <a:pPr>
-              <a:spcBef>
-                <a:spcPts val="1000"/>
-              </a:spcBef>
-              <a:defRPr sz="1600">
-                <a:solidFill>
-                  <a:srgbClr val="333333"/>
-                </a:solidFill>
-              </a:defRPr>
-            </a:pPr>
-            <a:r>
-              <a:rPr dirty="0"/>
-              <a:t>• 500+ lines generated</a:t>
-            </a:r>
-          </a:p>
-          <a:p>
-            <a:pPr>
-              <a:spcBef>
-                <a:spcPts val="1000"/>
-              </a:spcBef>
-              <a:defRPr sz="1600">
-                <a:solidFill>
-                  <a:srgbClr val="333333"/>
-                </a:solidFill>
-              </a:defRPr>
-            </a:pPr>
-            <a:r>
-              <a:rPr dirty="0"/>
-              <a:t>  in seconds</a:t>
-            </a:r>
-          </a:p>
-          <a:p>
-            <a:pPr>
-              <a:spcBef>
-                <a:spcPts val="1000"/>
-              </a:spcBef>
-              <a:defRPr sz="1600">
-                <a:solidFill>
-                  <a:srgbClr val="333333"/>
-                </a:solidFill>
-              </a:defRPr>
-            </a:pPr>
-            <a:r>
-              <a:rPr dirty="0"/>
-              <a:t>• Full EXPECT() syntax support</a:t>
-            </a:r>
-          </a:p>
-          <a:p>
-            <a:pPr>
-              <a:spcBef>
-                <a:spcPts val="1000"/>
-              </a:spcBef>
-              <a:defRPr sz="1600">
-                <a:solidFill>
-                  <a:srgbClr val="333333"/>
-                </a:solidFill>
-              </a:defRPr>
-            </a:pPr>
-            <a:endParaRPr dirty="0"/>
-          </a:p>
-        </p:txBody>
-      </p:sp>
-      <p:sp>
-        <p:nvSpPr>
-          <p:cNvPr id="4" name="TextBox 3"/>
-          <p:cNvSpPr txBox="1"/>
-          <p:nvPr/>
-        </p:nvSpPr>
-        <p:spPr>
-          <a:xfrm>
-            <a:off x="3860358" y="1371600"/>
-            <a:ext cx="4114800" cy="4832092"/>
-          </a:xfrm>
-          <a:prstGeom prst="rect">
-            <a:avLst/>
-          </a:prstGeom>
-          <a:noFill/>
-        </p:spPr>
-        <p:txBody>
-          <a:bodyPr wrap="square">
-            <a:spAutoFit/>
-          </a:bodyPr>
-          <a:lstStyle/>
-          <a:p>
-            <a:pPr>
-              <a:spcBef>
-                <a:spcPts val="1000"/>
-              </a:spcBef>
-              <a:defRPr sz="1600">
-                <a:solidFill>
-                  <a:srgbClr val="333333"/>
-                </a:solidFill>
-              </a:defRPr>
-            </a:pPr>
-            <a:r>
-              <a:rPr dirty="0"/>
-              <a:t>🏭 FACTORY PATTERN:</a:t>
-            </a:r>
-          </a:p>
-          <a:p>
-            <a:pPr>
-              <a:spcBef>
-                <a:spcPts val="1000"/>
-              </a:spcBef>
-              <a:defRPr sz="1600">
-                <a:solidFill>
-                  <a:srgbClr val="333333"/>
-                </a:solidFill>
-              </a:defRPr>
-            </a:pPr>
-            <a:endParaRPr dirty="0"/>
-          </a:p>
-          <a:p>
-            <a:pPr>
-              <a:spcBef>
-                <a:spcPts val="1000"/>
-              </a:spcBef>
-              <a:defRPr sz="1600">
-                <a:solidFill>
-                  <a:srgbClr val="333333"/>
-                </a:solidFill>
-              </a:defRPr>
-            </a:pPr>
-            <a:r>
-              <a:rPr dirty="0"/>
-              <a:t>• Builder pattern with fluent API:</a:t>
-            </a:r>
-          </a:p>
-          <a:p>
-            <a:pPr>
-              <a:spcBef>
-                <a:spcPts val="1000"/>
-              </a:spcBef>
-              <a:defRPr sz="1600">
-                <a:solidFill>
-                  <a:srgbClr val="333333"/>
-                </a:solidFill>
-              </a:defRPr>
-            </a:pPr>
-            <a:r>
-              <a:rPr dirty="0"/>
-              <a:t>  </a:t>
-            </a:r>
-            <a:r>
-              <a:rPr dirty="0" err="1"/>
-              <a:t>NewStudentBuilder</a:t>
-            </a:r>
-            <a:r>
-              <a:rPr dirty="0"/>
-              <a:t>()</a:t>
-            </a:r>
-          </a:p>
-          <a:p>
-            <a:pPr>
-              <a:spcBef>
-                <a:spcPts val="1000"/>
-              </a:spcBef>
-              <a:defRPr sz="1600">
-                <a:solidFill>
-                  <a:srgbClr val="333333"/>
-                </a:solidFill>
-              </a:defRPr>
-            </a:pPr>
-            <a:r>
-              <a:rPr dirty="0"/>
-              <a:t>  .</a:t>
-            </a:r>
-            <a:r>
-              <a:rPr dirty="0" err="1"/>
-              <a:t>WithName</a:t>
-            </a:r>
-            <a:r>
-              <a:rPr dirty="0"/>
-              <a:t>('Alice')</a:t>
-            </a:r>
-          </a:p>
-          <a:p>
-            <a:pPr>
-              <a:spcBef>
-                <a:spcPts val="1000"/>
-              </a:spcBef>
-              <a:defRPr sz="1600">
-                <a:solidFill>
-                  <a:srgbClr val="333333"/>
-                </a:solidFill>
-              </a:defRPr>
-            </a:pPr>
-            <a:r>
-              <a:rPr dirty="0"/>
-              <a:t>  .</a:t>
-            </a:r>
-            <a:r>
-              <a:rPr dirty="0" err="1"/>
-              <a:t>WithGrade</a:t>
-            </a:r>
-            <a:r>
-              <a:rPr dirty="0"/>
-              <a:t>('A')</a:t>
-            </a:r>
-          </a:p>
-          <a:p>
-            <a:pPr>
-              <a:spcBef>
-                <a:spcPts val="1000"/>
-              </a:spcBef>
-              <a:defRPr sz="1600">
-                <a:solidFill>
-                  <a:srgbClr val="333333"/>
-                </a:solidFill>
-              </a:defRPr>
-            </a:pPr>
-            <a:r>
-              <a:rPr dirty="0"/>
-              <a:t>  .Build()</a:t>
-            </a:r>
-          </a:p>
-          <a:p>
-            <a:pPr>
-              <a:spcBef>
-                <a:spcPts val="1000"/>
-              </a:spcBef>
-              <a:defRPr sz="1600">
-                <a:solidFill>
-                  <a:srgbClr val="333333"/>
-                </a:solidFill>
-              </a:defRPr>
-            </a:pPr>
-            <a:r>
-              <a:rPr dirty="0"/>
-              <a:t>• Sensible defaults included</a:t>
-            </a:r>
-          </a:p>
-          <a:p>
-            <a:pPr>
-              <a:spcBef>
-                <a:spcPts val="1000"/>
-              </a:spcBef>
-              <a:defRPr sz="1600">
-                <a:solidFill>
-                  <a:srgbClr val="333333"/>
-                </a:solidFill>
-              </a:defRPr>
-            </a:pPr>
-            <a:r>
-              <a:rPr dirty="0"/>
-              <a:t>• Preset configurations:</a:t>
-            </a:r>
-          </a:p>
-          <a:p>
-            <a:pPr>
-              <a:spcBef>
-                <a:spcPts val="1000"/>
-              </a:spcBef>
-              <a:defRPr sz="1600">
-                <a:solidFill>
-                  <a:srgbClr val="333333"/>
-                </a:solidFill>
-              </a:defRPr>
-            </a:pPr>
-            <a:r>
-              <a:rPr dirty="0"/>
-              <a:t>  </a:t>
-            </a:r>
-            <a:r>
-              <a:rPr dirty="0" err="1"/>
-              <a:t>ValidStudent</a:t>
-            </a:r>
-            <a:r>
-              <a:rPr dirty="0"/>
-              <a:t>()</a:t>
-            </a:r>
-          </a:p>
-          <a:p>
-            <a:pPr>
-              <a:spcBef>
-                <a:spcPts val="1000"/>
-              </a:spcBef>
-              <a:defRPr sz="1600">
-                <a:solidFill>
-                  <a:srgbClr val="333333"/>
-                </a:solidFill>
-              </a:defRPr>
-            </a:pPr>
-            <a:r>
-              <a:rPr dirty="0"/>
-              <a:t>  </a:t>
-            </a:r>
-            <a:r>
-              <a:rPr dirty="0" err="1"/>
-              <a:t>HighAchiever</a:t>
-            </a:r>
-            <a:r>
-              <a:rPr dirty="0"/>
-              <a:t>()</a:t>
-            </a:r>
-          </a:p>
-          <a:p>
-            <a:pPr>
-              <a:spcBef>
-                <a:spcPts val="1000"/>
-              </a:spcBef>
-              <a:defRPr sz="1600">
-                <a:solidFill>
-                  <a:srgbClr val="333333"/>
-                </a:solidFill>
-              </a:defRPr>
-            </a:pPr>
-            <a:r>
-              <a:rPr dirty="0"/>
-              <a:t>  </a:t>
-            </a:r>
-            <a:r>
-              <a:rPr dirty="0" err="1"/>
-              <a:t>FailingStudent</a:t>
-            </a:r>
-            <a:r>
-              <a:rPr dirty="0"/>
-              <a:t>()</a:t>
-            </a:r>
-          </a:p>
-          <a:p>
-            <a:pPr>
-              <a:spcBef>
-                <a:spcPts val="1000"/>
-              </a:spcBef>
-              <a:defRPr sz="1600">
-                <a:solidFill>
-                  <a:srgbClr val="333333"/>
-                </a:solidFill>
-              </a:defRPr>
-            </a:pPr>
-            <a:r>
-              <a:rPr dirty="0"/>
-              <a:t>• </a:t>
-            </a:r>
-            <a:r>
-              <a:rPr dirty="0" err="1"/>
-              <a:t>BuildN</a:t>
-            </a:r>
-            <a:r>
-              <a:rPr dirty="0"/>
-              <a:t>(n) for bulk generation</a:t>
-            </a:r>
-          </a:p>
-        </p:txBody>
-      </p:sp>
-    </p:spTree>
-  </p:cSld>
-  <p:clrMapOvr>
-    <a:masterClrMapping/>
-  </p:clrMapOvr>
-</p:sld>
-</file>
-
-<file path=ppt/slides/slide8.xml><?xml version="1.0" encoding="utf-8"?>
-<p:sld xmlns:a="http://schemas.openxmlformats.org/drawingml/2006/main" xmlns:r="http://schemas.openxmlformats.org/officeDocument/2006/relationships" xmlns:p="http://schemas.openxmlformats.org/presentationml/2006/main">
-  <p:cSld>
-    <p:spTree>
-      <p:nvGrpSpPr>
-        <p:cNvPr id="1" name=""/>
-        <p:cNvGrpSpPr/>
-        <p:nvPr/>
-      </p:nvGrpSpPr>
-      <p:grpSpPr>
-        <a:xfrm>
-          <a:off x="0" y="0"/>
-          <a:ext cx="0" cy="0"/>
-          <a:chOff x="0" y="0"/>
-          <a:chExt cx="0" cy="0"/>
-        </a:xfrm>
-      </p:grpSpPr>
-      <p:sp>
-        <p:nvSpPr>
-          <p:cNvPr id="2" name="TextBox 1"/>
-          <p:cNvSpPr txBox="1"/>
-          <p:nvPr/>
-        </p:nvSpPr>
-        <p:spPr>
-          <a:xfrm>
-            <a:off x="457200" y="457200"/>
-            <a:ext cx="7050328" cy="584775"/>
-          </a:xfrm>
-          <a:prstGeom prst="rect">
-            <a:avLst/>
-          </a:prstGeom>
-          <a:noFill/>
-        </p:spPr>
-        <p:txBody>
-          <a:bodyPr wrap="none">
-            <a:spAutoFit/>
-          </a:bodyPr>
-          <a:lstStyle/>
-          <a:p>
-            <a:pPr>
-              <a:defRPr sz="3200" b="1">
-                <a:solidFill>
-                  <a:srgbClr val="1F4E79"/>
-                </a:solidFill>
-              </a:defRPr>
-            </a:pPr>
-            <a:r>
-              <a:rPr dirty="0"/>
-              <a:t>3: Integration Test Expansion Agent</a:t>
-            </a:r>
-          </a:p>
-        </p:txBody>
-      </p:sp>
-      <p:sp>
-        <p:nvSpPr>
-          <p:cNvPr id="3" name="TextBox 2"/>
-          <p:cNvSpPr txBox="1"/>
-          <p:nvPr/>
-        </p:nvSpPr>
-        <p:spPr>
-          <a:xfrm>
-            <a:off x="731520" y="1371600"/>
-            <a:ext cx="7772400" cy="5539978"/>
-          </a:xfrm>
-          <a:prstGeom prst="rect">
-            <a:avLst/>
-          </a:prstGeom>
-          <a:noFill/>
-        </p:spPr>
-        <p:txBody>
-          <a:bodyPr wrap="square">
-            <a:spAutoFit/>
-          </a:bodyPr>
-          <a:lstStyle/>
-          <a:p>
-            <a:pPr>
-              <a:spcBef>
-                <a:spcPts val="1200"/>
-              </a:spcBef>
-              <a:defRPr sz="1800">
-                <a:solidFill>
-                  <a:srgbClr val="333333"/>
-                </a:solidFill>
-              </a:defRPr>
-            </a:pPr>
-            <a:r>
-              <a:rPr dirty="0"/>
-              <a:t>📊 COVERAGE EXPLOSION:</a:t>
-            </a:r>
-          </a:p>
-          <a:p>
-            <a:pPr>
-              <a:spcBef>
-                <a:spcPts val="1200"/>
-              </a:spcBef>
-              <a:defRPr sz="1800">
-                <a:solidFill>
-                  <a:srgbClr val="333333"/>
-                </a:solidFill>
-              </a:defRPr>
-            </a:pPr>
-            <a:r>
-              <a:rPr dirty="0"/>
-              <a:t>   Before: </a:t>
-            </a:r>
-            <a:r>
               <a:rPr lang="en-US" dirty="0"/>
-              <a:t>low</a:t>
-            </a:r>
-            <a:r>
-              <a:rPr dirty="0"/>
-              <a:t> coverage    →    After: </a:t>
-            </a:r>
-            <a:r>
-              <a:rPr lang="en-US" dirty="0"/>
-              <a:t>higher</a:t>
-            </a:r>
-            <a:r>
-              <a:rPr dirty="0"/>
-              <a:t> coverage</a:t>
-            </a:r>
-            <a:endParaRPr lang="en-US" dirty="0"/>
-          </a:p>
-          <a:p>
-            <a:pPr>
-              <a:spcBef>
-                <a:spcPts val="1200"/>
-              </a:spcBef>
-              <a:defRPr sz="1800">
-                <a:solidFill>
-                  <a:srgbClr val="333333"/>
-                </a:solidFill>
-              </a:defRPr>
-            </a:pPr>
-            <a:endParaRPr dirty="0"/>
-          </a:p>
-          <a:p>
-            <a:pPr>
-              <a:spcBef>
-                <a:spcPts val="1200"/>
-              </a:spcBef>
-              <a:defRPr sz="1800">
-                <a:solidFill>
-                  <a:srgbClr val="333333"/>
-                </a:solidFill>
-              </a:defRPr>
-            </a:pPr>
-            <a:r>
-              <a:rPr dirty="0"/>
-              <a:t>🧪 COMPREHENSIVE TEST SUITE:</a:t>
-            </a:r>
-          </a:p>
-          <a:p>
-            <a:pPr>
-              <a:spcBef>
-                <a:spcPts val="1200"/>
-              </a:spcBef>
-              <a:defRPr sz="1800">
-                <a:solidFill>
-                  <a:srgbClr val="333333"/>
-                </a:solidFill>
-              </a:defRPr>
-            </a:pPr>
-            <a:r>
-              <a:rPr dirty="0"/>
-              <a:t>• </a:t>
-            </a:r>
-            <a:r>
-              <a:rPr dirty="0" err="1"/>
-              <a:t>TestStudentCRUDWorkflow</a:t>
-            </a:r>
-            <a:r>
-              <a:rPr dirty="0"/>
-              <a:t> - Full lifecycle testing</a:t>
-            </a:r>
-          </a:p>
-          <a:p>
-            <a:pPr>
-              <a:spcBef>
-                <a:spcPts val="1200"/>
-              </a:spcBef>
-              <a:defRPr sz="1800">
-                <a:solidFill>
-                  <a:srgbClr val="333333"/>
-                </a:solidFill>
-              </a:defRPr>
-            </a:pPr>
-            <a:r>
-              <a:rPr dirty="0"/>
-              <a:t>  Create → Read → Update → Delete → Verify 404</a:t>
-            </a:r>
-          </a:p>
-          <a:p>
-            <a:pPr>
-              <a:spcBef>
-                <a:spcPts val="1200"/>
-              </a:spcBef>
-              <a:defRPr sz="1800">
-                <a:solidFill>
-                  <a:srgbClr val="333333"/>
-                </a:solidFill>
-              </a:defRPr>
-            </a:pPr>
-            <a:r>
-              <a:rPr dirty="0"/>
-              <a:t>• </a:t>
-            </a:r>
-            <a:r>
-              <a:rPr dirty="0" err="1"/>
-              <a:t>TestStudentConcurrentCreation</a:t>
-            </a:r>
-            <a:r>
-              <a:rPr dirty="0"/>
-              <a:t> - Thread safety validation</a:t>
-            </a:r>
-          </a:p>
-          <a:p>
-            <a:pPr>
-              <a:spcBef>
-                <a:spcPts val="1200"/>
-              </a:spcBef>
-              <a:defRPr sz="1800">
-                <a:solidFill>
-                  <a:srgbClr val="333333"/>
-                </a:solidFill>
-              </a:defRPr>
-            </a:pPr>
-            <a:r>
-              <a:rPr dirty="0"/>
-              <a:t>  100 parallel requests with unique ID verification</a:t>
-            </a:r>
-          </a:p>
-          <a:p>
-            <a:pPr>
-              <a:spcBef>
-                <a:spcPts val="1200"/>
-              </a:spcBef>
-              <a:defRPr sz="1800">
-                <a:solidFill>
-                  <a:srgbClr val="333333"/>
-                </a:solidFill>
-              </a:defRPr>
-            </a:pPr>
-            <a:r>
-              <a:rPr dirty="0"/>
-              <a:t>• </a:t>
-            </a:r>
-            <a:r>
-              <a:rPr dirty="0" err="1"/>
-              <a:t>TestStudentErrorScenarios</a:t>
-            </a:r>
-            <a:r>
-              <a:rPr dirty="0"/>
-              <a:t> - Sad path coverage</a:t>
-            </a:r>
-          </a:p>
-          <a:p>
-            <a:pPr>
-              <a:spcBef>
-                <a:spcPts val="1200"/>
-              </a:spcBef>
-              <a:defRPr sz="1800">
-                <a:solidFill>
-                  <a:srgbClr val="333333"/>
-                </a:solidFill>
-              </a:defRPr>
-            </a:pPr>
-            <a:r>
-              <a:rPr dirty="0"/>
-              <a:t>  404 for missing resources, 400 for invalid input</a:t>
-            </a:r>
-          </a:p>
-          <a:p>
-            <a:pPr>
-              <a:spcBef>
-                <a:spcPts val="1200"/>
-              </a:spcBef>
-              <a:defRPr sz="1800">
-                <a:solidFill>
-                  <a:srgbClr val="333333"/>
-                </a:solidFill>
-              </a:defRPr>
-            </a:pPr>
-            <a:r>
-              <a:rPr dirty="0"/>
-              <a:t>• </a:t>
-            </a:r>
-            <a:r>
-              <a:rPr dirty="0" err="1"/>
-              <a:t>TestStudentListPagination</a:t>
-            </a:r>
-            <a:r>
-              <a:rPr dirty="0"/>
-              <a:t> - Edge cases</a:t>
-            </a:r>
-          </a:p>
-          <a:p>
-            <a:pPr>
-              <a:spcBef>
-                <a:spcPts val="1200"/>
-              </a:spcBef>
-              <a:defRPr sz="1800">
-                <a:solidFill>
-                  <a:srgbClr val="333333"/>
-                </a:solidFill>
-              </a:defRPr>
-            </a:pPr>
-            <a:r>
-              <a:rPr dirty="0"/>
-              <a:t>  Empty lists, bulk operations, boundary conditions</a:t>
-            </a:r>
-          </a:p>
-          <a:p>
-            <a:pPr>
-              <a:spcBef>
-                <a:spcPts val="1200"/>
-              </a:spcBef>
-              <a:defRPr sz="1800">
-                <a:solidFill>
-                  <a:srgbClr val="333333"/>
-                </a:solidFill>
-              </a:defRPr>
-            </a:pPr>
-            <a:endParaRPr dirty="0"/>
+              <a:t>   touching handlers</a:t>
+            </a:r>
           </a:p>
         </p:txBody>
       </p:sp>
@@ -17638,7 +17362,7 @@
         <p:spPr>
           <a:xfrm>
             <a:off x="457200" y="457200"/>
-            <a:ext cx="8229600" cy="731520"/>
+            <a:ext cx="2257349" cy="584775"/>
           </a:xfrm>
           <a:prstGeom prst="rect">
             <a:avLst/>
@@ -17659,241 +17383,23 @@
               </a:defRPr>
             </a:pPr>
             <a:r>
-              <a:t>Session 2 Results &amp; Impact</a:t>
-            </a:r>
+              <a:rPr lang="en-US" dirty="0"/>
+              <a:t>Conclusion</a:t>
+            </a:r>
+            <a:endParaRPr dirty="0"/>
           </a:p>
         </p:txBody>
       </p:sp>
       <p:sp>
         <p:nvSpPr>
-          <p:cNvPr id="4" name="TextBox 3"/>
+          <p:cNvPr id="3" name="TextBox 2"/>
           <p:cNvSpPr txBox="1"/>
           <p:nvPr/>
         </p:nvSpPr>
         <p:spPr>
           <a:xfrm>
-            <a:off x="457200" y="1282148"/>
-            <a:ext cx="3607904" cy="4862870"/>
-          </a:xfrm>
-          <a:prstGeom prst="rect">
-            <a:avLst/>
-          </a:prstGeom>
-          <a:noFill/>
-        </p:spPr>
-        <p:txBody>
-          <a:bodyPr wrap="square" numCol="1">
-            <a:spAutoFit/>
-          </a:bodyPr>
-          <a:lstStyle/>
-          <a:p>
-            <a:endParaRPr dirty="0"/>
-          </a:p>
-          <a:p>
-            <a:pPr>
-              <a:spcBef>
-                <a:spcPts val="1000"/>
-              </a:spcBef>
-              <a:defRPr sz="1600">
-                <a:solidFill>
-                  <a:srgbClr val="333333"/>
-                </a:solidFill>
-              </a:defRPr>
-            </a:pPr>
-            <a:r>
-              <a:rPr dirty="0"/>
-              <a:t>🎯 QUALITATIVE IMPACT:</a:t>
-            </a:r>
-          </a:p>
-          <a:p>
-            <a:pPr>
-              <a:spcBef>
-                <a:spcPts val="1000"/>
-              </a:spcBef>
-              <a:defRPr sz="1600">
-                <a:solidFill>
-                  <a:srgbClr val="333333"/>
-                </a:solidFill>
-              </a:defRPr>
-            </a:pPr>
-            <a:endParaRPr dirty="0"/>
-          </a:p>
-          <a:p>
-            <a:pPr>
-              <a:spcBef>
-                <a:spcPts val="1000"/>
-              </a:spcBef>
-              <a:defRPr sz="1600">
-                <a:solidFill>
-                  <a:srgbClr val="333333"/>
-                </a:solidFill>
-              </a:defRPr>
-            </a:pPr>
-            <a:r>
-              <a:rPr dirty="0"/>
-              <a:t>✅ Architecture:</a:t>
-            </a:r>
-          </a:p>
-          <a:p>
-            <a:pPr>
-              <a:spcBef>
-                <a:spcPts val="1000"/>
-              </a:spcBef>
-              <a:defRPr sz="1600">
-                <a:solidFill>
-                  <a:srgbClr val="333333"/>
-                </a:solidFill>
-              </a:defRPr>
-            </a:pPr>
-            <a:r>
-              <a:rPr lang="en-US" dirty="0"/>
-              <a:t>   </a:t>
-            </a:r>
-            <a:r>
-              <a:rPr dirty="0"/>
-              <a:t>Clean repository pattern</a:t>
-            </a:r>
-            <a:endParaRPr lang="en-US" dirty="0"/>
-          </a:p>
-          <a:p>
-            <a:pPr>
-              <a:spcBef>
-                <a:spcPts val="1000"/>
-              </a:spcBef>
-              <a:defRPr sz="1600">
-                <a:solidFill>
-                  <a:srgbClr val="333333"/>
-                </a:solidFill>
-              </a:defRPr>
-            </a:pPr>
-            <a:r>
-              <a:rPr lang="en-US" dirty="0"/>
-              <a:t>   SOLID principles followed</a:t>
-            </a:r>
-          </a:p>
-          <a:p>
-            <a:pPr>
-              <a:spcBef>
-                <a:spcPts val="1000"/>
-              </a:spcBef>
-              <a:defRPr sz="1600">
-                <a:solidFill>
-                  <a:srgbClr val="333333"/>
-                </a:solidFill>
-              </a:defRPr>
-            </a:pPr>
-            <a:r>
-              <a:rPr dirty="0"/>
-              <a:t>   Dependency injection</a:t>
-            </a:r>
-          </a:p>
-          <a:p>
-            <a:pPr>
-              <a:spcBef>
-                <a:spcPts val="1000"/>
-              </a:spcBef>
-              <a:defRPr sz="1600">
-                <a:solidFill>
-                  <a:srgbClr val="333333"/>
-                </a:solidFill>
-              </a:defRPr>
-            </a:pPr>
-            <a:endParaRPr dirty="0"/>
-          </a:p>
-          <a:p>
-            <a:pPr>
-              <a:spcBef>
-                <a:spcPts val="1000"/>
-              </a:spcBef>
-              <a:defRPr sz="1600">
-                <a:solidFill>
-                  <a:srgbClr val="333333"/>
-                </a:solidFill>
-              </a:defRPr>
-            </a:pPr>
-            <a:r>
-              <a:rPr dirty="0"/>
-              <a:t>✅ Testability:</a:t>
-            </a:r>
-          </a:p>
-          <a:p>
-            <a:pPr>
-              <a:spcBef>
-                <a:spcPts val="1000"/>
-              </a:spcBef>
-              <a:defRPr sz="1600">
-                <a:solidFill>
-                  <a:srgbClr val="333333"/>
-                </a:solidFill>
-              </a:defRPr>
-            </a:pPr>
-            <a:r>
-              <a:rPr dirty="0"/>
-              <a:t>   Can mock any component</a:t>
-            </a:r>
-          </a:p>
-          <a:p>
-            <a:pPr>
-              <a:spcBef>
-                <a:spcPts val="1000"/>
-              </a:spcBef>
-              <a:defRPr sz="1600">
-                <a:solidFill>
-                  <a:srgbClr val="333333"/>
-                </a:solidFill>
-              </a:defRPr>
-            </a:pPr>
-            <a:r>
-              <a:rPr dirty="0"/>
-              <a:t>   Fast isolated unit tests</a:t>
-            </a:r>
-          </a:p>
-          <a:p>
-            <a:pPr>
-              <a:spcBef>
-                <a:spcPts val="1000"/>
-              </a:spcBef>
-              <a:defRPr sz="1600">
-                <a:solidFill>
-                  <a:srgbClr val="333333"/>
-                </a:solidFill>
-              </a:defRPr>
-            </a:pPr>
-            <a:r>
-              <a:rPr dirty="0"/>
-              <a:t>   Comprehensive integration tests</a:t>
-            </a:r>
-          </a:p>
-          <a:p>
-            <a:pPr>
-              <a:spcBef>
-                <a:spcPts val="1000"/>
-              </a:spcBef>
-              <a:defRPr sz="1600">
-                <a:solidFill>
-                  <a:srgbClr val="333333"/>
-                </a:solidFill>
-              </a:defRPr>
-            </a:pPr>
-            <a:endParaRPr lang="en-US" dirty="0"/>
-          </a:p>
-        </p:txBody>
-      </p:sp>
-      <p:sp>
-        <p:nvSpPr>
-          <p:cNvPr id="6" name="TextBox 5">
-            <a:extLst>
-              <a:ext uri="{FF2B5EF4-FFF2-40B4-BE49-F238E27FC236}">
-                <a16:creationId xmlns:a16="http://schemas.microsoft.com/office/drawing/2014/main" id="{A5AC279B-89C2-B6B9-BD89-23F97F2423C8}"/>
-              </a:ext>
-            </a:extLst>
-          </p:cNvPr>
-          <p:cNvSpPr txBox="1"/>
-          <p:nvPr/>
-        </p:nvSpPr>
-        <p:spPr>
-          <a:xfrm>
-            <a:off x="4099892" y="2427799"/>
-            <a:ext cx="4586908" cy="3334246"/>
+            <a:off x="731520" y="1371600"/>
+            <a:ext cx="7772400" cy="4001095"/>
           </a:xfrm>
           <a:prstGeom prst="rect">
             <a:avLst/>
@@ -17908,142 +17414,177 @@
           <a:p>
             <a:pPr>
               <a:spcBef>
-                <a:spcPts val="1000"/>
+                <a:spcPts val="1200"/>
               </a:spcBef>
-              <a:defRPr sz="1600">
+              <a:defRPr sz="1800">
                 <a:solidFill>
                   <a:srgbClr val="333333"/>
                 </a:solidFill>
               </a:defRPr>
             </a:pPr>
             <a:r>
-              <a:rPr lang="en-US" dirty="0"/>
-              <a:t>✅ Maintainability:</a:t>
+              <a:rPr sz="1400" dirty="0"/>
+              <a:t>1️⃣ REFACTOR EARLY WITH AI ASSISTANCE</a:t>
             </a:r>
           </a:p>
           <a:p>
             <a:pPr>
               <a:spcBef>
-                <a:spcPts val="1000"/>
+                <a:spcPts val="1200"/>
               </a:spcBef>
-              <a:defRPr sz="1600">
+              <a:defRPr sz="1800">
                 <a:solidFill>
                   <a:srgbClr val="333333"/>
                 </a:solidFill>
               </a:defRPr>
             </a:pPr>
             <a:r>
-              <a:rPr lang="en-US" dirty="0"/>
-              <a:t>   Single responsibility</a:t>
+              <a:rPr sz="1400" dirty="0"/>
+              <a:t>   Don't wait for debt to compound | AI makes refactoring economically viable</a:t>
             </a:r>
           </a:p>
           <a:p>
             <a:pPr>
               <a:spcBef>
-                <a:spcPts val="1000"/>
+                <a:spcPts val="1200"/>
               </a:spcBef>
-              <a:defRPr sz="1600">
+              <a:defRPr sz="1800">
                 <a:solidFill>
                   <a:srgbClr val="333333"/>
                 </a:solidFill>
               </a:defRPr>
             </a:pPr>
             <a:r>
-              <a:rPr lang="en-US" dirty="0"/>
-              <a:t>   Clear separation of concerns</a:t>
+              <a:rPr sz="1400" dirty="0"/>
+              <a:t>2️⃣ INTERFACES UNLOCK TESTABILITY</a:t>
             </a:r>
           </a:p>
           <a:p>
             <a:pPr>
               <a:spcBef>
-                <a:spcPts val="1000"/>
+                <a:spcPts val="1200"/>
               </a:spcBef>
-              <a:defRPr sz="1600">
+              <a:defRPr sz="1800">
                 <a:solidFill>
                   <a:srgbClr val="333333"/>
                 </a:solidFill>
               </a:defRPr>
             </a:pPr>
             <a:r>
-              <a:rPr lang="en-US" dirty="0"/>
-              <a:t>   Tests as documentation</a:t>
+              <a:rPr sz="1400" dirty="0"/>
+              <a:t>   Repository pattern + dependency injection = mockable code</a:t>
             </a:r>
           </a:p>
           <a:p>
             <a:pPr>
               <a:spcBef>
-                <a:spcPts val="1000"/>
+                <a:spcPts val="1200"/>
               </a:spcBef>
-              <a:defRPr sz="1600">
+              <a:defRPr sz="1800">
                 <a:solidFill>
                   <a:srgbClr val="333333"/>
                 </a:solidFill>
               </a:defRPr>
             </a:pPr>
-            <a:endParaRPr lang="en-US" dirty="0"/>
+            <a:r>
+              <a:rPr sz="1400" dirty="0"/>
+              <a:t>   Isolation testing is fast testing | Testable architecture enables rapid development</a:t>
+            </a:r>
           </a:p>
           <a:p>
             <a:pPr>
               <a:spcBef>
-                <a:spcPts val="1000"/>
+                <a:spcPts val="1200"/>
               </a:spcBef>
-              <a:defRPr sz="1600">
+              <a:defRPr sz="1800">
                 <a:solidFill>
                   <a:srgbClr val="333333"/>
                 </a:solidFill>
               </a:defRPr>
             </a:pPr>
             <a:r>
-              <a:rPr lang="en-US" dirty="0"/>
-              <a:t>✅ Flexibility:</a:t>
+              <a:rPr sz="1400" dirty="0"/>
+              <a:t>3️⃣ FACTORIES MAKE TESTS MAINTAINABLE</a:t>
             </a:r>
           </a:p>
           <a:p>
             <a:pPr>
               <a:spcBef>
-                <a:spcPts val="1000"/>
+                <a:spcPts val="1200"/>
               </a:spcBef>
-              <a:defRPr sz="1600">
+              <a:defRPr sz="1800">
                 <a:solidFill>
                   <a:srgbClr val="333333"/>
                 </a:solidFill>
               </a:defRPr>
             </a:pPr>
             <a:r>
-              <a:rPr lang="en-US" dirty="0"/>
-              <a:t>   Can swap storage (PostgreSQL,</a:t>
+              <a:rPr sz="1400" dirty="0"/>
+              <a:t>   Test code IS documentation | Builder pattern eliminates duplication</a:t>
             </a:r>
           </a:p>
           <a:p>
             <a:pPr>
               <a:spcBef>
-                <a:spcPts val="1000"/>
+                <a:spcPts val="1200"/>
               </a:spcBef>
-              <a:defRPr sz="1600">
+              <a:defRPr sz="1800">
                 <a:solidFill>
                   <a:srgbClr val="333333"/>
                 </a:solidFill>
               </a:defRPr>
             </a:pPr>
             <a:r>
-              <a:rPr lang="en-US" dirty="0"/>
-              <a:t>   MongoDB, Redis) without</a:t>
+              <a:rPr sz="1400" dirty="0"/>
+              <a:t>   80% less test setup = more time testing</a:t>
             </a:r>
           </a:p>
           <a:p>
             <a:pPr>
               <a:spcBef>
-                <a:spcPts val="1000"/>
+                <a:spcPts val="1200"/>
               </a:spcBef>
-              <a:defRPr sz="1600">
+              <a:defRPr sz="1800">
                 <a:solidFill>
                   <a:srgbClr val="333333"/>
                 </a:solidFill>
               </a:defRPr>
             </a:pPr>
             <a:r>
-              <a:rPr lang="en-US" dirty="0"/>
-              <a:t>   touching handlers</a:t>
+              <a:rPr sz="1400" dirty="0"/>
+              <a:t>4️⃣ EVOLUTION &gt; REVOLUTION</a:t>
+            </a:r>
+          </a:p>
+          <a:p>
+            <a:pPr>
+              <a:spcBef>
+                <a:spcPts val="1200"/>
+              </a:spcBef>
+              <a:defRPr sz="1800">
+                <a:solidFill>
+                  <a:srgbClr val="333333"/>
+                </a:solidFill>
+              </a:defRPr>
+            </a:pPr>
+            <a:r>
+              <a:rPr sz="1400" dirty="0"/>
+              <a:t>   Continuous improvement with AI | Maintain velocity while fixing debt</a:t>
+            </a:r>
+          </a:p>
+          <a:p>
+            <a:pPr>
+              <a:spcBef>
+                <a:spcPts val="1200"/>
+              </a:spcBef>
+              <a:defRPr sz="1800">
+                <a:solidFill>
+                  <a:srgbClr val="333333"/>
+                </a:solidFill>
+              </a:defRPr>
+            </a:pPr>
+            <a:r>
+              <a:rPr sz="1400" dirty="0"/>
+              <a:t>   Quality and speed are NOT opposites</a:t>
             </a:r>
           </a:p>
         </p:txBody>
